--- a/제출물/DevFocus_발표자료.pptx
+++ b/제출물/DevFocus_발표자료.pptx
@@ -18,9 +18,10 @@
     <p:sldId id="266" r:id="rId12"/>
     <p:sldId id="267" r:id="rId13"/>
     <p:sldId id="268" r:id="rId14"/>
+    <p:sldId id="269" r:id="rId15"/>
   </p:sldIdLst>
   <p:notesMasterIdLst>
-    <p:notesMasterId r:id="rId15"/>
+    <p:notesMasterId r:id="rId16"/>
   </p:notesMasterIdLst>
   <p:sldSz cx="12192000" cy="6858000"/>
   <p:notesSz cx="6858000" cy="12192000"/>
@@ -890,6 +891,94 @@
             <a:fld id="{F7021451-1387-4CA6-816F-3879F97B5CBC}" type="slidenum">
               <a:rPr lang="en-US"/>
               <a:t>13</a:t>
+            </a:fld>
+            <a:endParaRPr lang="en-US"/>
+          </a:p>
+        </p:txBody>
+      </p:sp>
+    </p:spTree>
+    <p:extLst>
+      <p:ext uri="{BB962C8B-B14F-4D97-AF65-F5344CB8AC3E}">
+        <p14:creationId xmlns:p14="http://schemas.microsoft.com/office/powerpoint/2010/main" val="1024086991"/>
+      </p:ext>
+    </p:extLst>
+  </p:cSld>
+  <p:clrMapOvr>
+    <a:masterClrMapping/>
+  </p:clrMapOvr>
+</p:notes>
+</file>
+
+<file path=ppt/notesSlides/notesSlide14.xml><?xml version="1.0" encoding="utf-8"?>
+<p:notes xmlns:a="http://schemas.openxmlformats.org/drawingml/2006/main" xmlns:r="http://schemas.openxmlformats.org/officeDocument/2006/relationships" xmlns:p="http://schemas.openxmlformats.org/presentationml/2006/main">
+  <p:cSld>
+    <p:spTree>
+      <p:nvGrpSpPr>
+        <p:cNvPr id="1" name=""/>
+        <p:cNvGrpSpPr/>
+        <p:nvPr/>
+      </p:nvGrpSpPr>
+      <p:grpSpPr>
+        <a:xfrm>
+          <a:off x="0" y="0"/>
+          <a:ext cx="0" cy="0"/>
+          <a:chOff x="0" y="0"/>
+          <a:chExt cx="0" cy="0"/>
+        </a:xfrm>
+      </p:grpSpPr>
+      <p:sp>
+        <p:nvSpPr>
+          <p:cNvPr id="2" name="Slide Image Placeholder 1"/>
+          <p:cNvSpPr>
+            <a:spLocks noGrp="1" noRot="1" noChangeAspect="1"/>
+          </p:cNvSpPr>
+          <p:nvPr>
+            <p:ph type="sldImg"/>
+          </p:nvPr>
+        </p:nvSpPr>
+        <p:spPr/>
+      </p:sp>
+      <p:sp>
+        <p:nvSpPr>
+          <p:cNvPr id="3" name="Notes Placeholder 2"/>
+          <p:cNvSpPr>
+            <a:spLocks noGrp="1"/>
+          </p:cNvSpPr>
+          <p:nvPr>
+            <p:ph type="body" idx="1"/>
+          </p:nvPr>
+        </p:nvSpPr>
+        <p:spPr/>
+        <p:txBody>
+          <a:bodyPr/>
+          <a:lstStyle/>
+          <a:p>
+            <a:r>
+              <a:rPr lang="en-US" dirty="0"/>
+              <a:t/>
+            </a:r>
+            <a:endParaRPr lang="en-US" dirty="0"/>
+          </a:p>
+        </p:txBody>
+      </p:sp>
+      <p:sp>
+        <p:nvSpPr>
+          <p:cNvPr id="4" name="Slide Number Placeholder 3"/>
+          <p:cNvSpPr>
+            <a:spLocks noGrp="1"/>
+          </p:cNvSpPr>
+          <p:nvPr>
+            <p:ph type="sldNum" sz="quarter" idx="10"/>
+          </p:nvPr>
+        </p:nvSpPr>
+        <p:spPr/>
+        <p:txBody>
+          <a:bodyPr/>
+          <a:lstStyle/>
+          <a:p>
+            <a:fld id="{F7021451-1387-4CA6-816F-3879F97B5CBC}" type="slidenum">
+              <a:rPr lang="en-US"/>
+              <a:t>14</a:t>
             </a:fld>
             <a:endParaRPr lang="en-US"/>
           </a:p>
@@ -2339,7 +2428,7 @@
                   <a:srgbClr val="FF5A5F"/>
                 </a:solidFill>
               </a:rPr>
-              <a:t>VALIDATION</a:t>
+              <a:t>OPERATIONS</a:t>
             </a:r>
             <a:endParaRPr lang="en-US" sz="1000" dirty="0"/>
           </a:p>
@@ -2354,7 +2443,7 @@
         <p:spPr>
           <a:xfrm>
             <a:off x="640080" y="1371600"/>
-            <a:ext cx="6400800" cy="1371600"/>
+            <a:ext cx="7040880" cy="1417320"/>
           </a:xfrm>
           <a:prstGeom prst="rect">
             <a:avLst/>
@@ -2377,7 +2466,7 @@
                   <a:srgbClr val="222222"/>
                 </a:solidFill>
               </a:rPr>
-              <a:t>기능은 만들었고,</a:t>
+              <a:t>문제가 생긴 뒤가 아니라</a:t>
             </a:r>
             <a:endParaRPr lang="en-US" sz="3700" dirty="0"/>
           </a:p>
@@ -2391,7 +2480,7 @@
                   <a:srgbClr val="222222"/>
                 </a:solidFill>
               </a:rPr>
-              <a:t>자동 검증으로 확인했습니다.</a:t>
+              <a:t>생기는 순간을 봅니다.</a:t>
             </a:r>
             <a:endParaRPr lang="en-US" sz="3700" dirty="0"/>
           </a:p>
@@ -2405,17 +2494,19 @@
         </p:nvSpPr>
         <p:spPr>
           <a:xfrm>
-            <a:off x="731520" y="2971800"/>
-            <a:ext cx="4206240" cy="347472"/>
-          </a:xfrm>
-          <a:prstGeom prst="rect">
-            <a:avLst/>
-          </a:prstGeom>
-          <a:noFill/>
-          <a:ln/>
-        </p:spPr>
-        <p:txBody>
-          <a:bodyPr wrap="square" lIns="0" tIns="0" rIns="0" bIns="0" rtlCol="0" anchor="ctr"/>
+            <a:off x="667512" y="2788920"/>
+            <a:ext cx="6858000" cy="731520"/>
+          </a:xfrm>
+          <a:prstGeom prst="rect">
+            <a:avLst/>
+          </a:prstGeom>
+          <a:noFill/>
+          <a:ln/>
+        </p:spPr>
+        <p:txBody>
+          <a:bodyPr wrap="square" lIns="0" tIns="0" rIns="0" bIns="0" rtlCol="0" anchor="ctr">
+            <a:normAutofit/>
+          </a:bodyPr>
           <a:lstStyle/>
           <a:p>
             <a:pPr indent="0" marL="0">
@@ -2427,7 +2518,7 @@
                   <a:srgbClr val="6B7280"/>
                 </a:solidFill>
               </a:rPr>
-              <a:t>Frontend build</a:t>
+              <a:t>운영자는 요청, 배치, Webhook, DB 상태를 한 흐름에서 추적할 수 있습니다.</a:t>
             </a:r>
             <a:endParaRPr lang="en-US" sz="1500" dirty="0"/>
           </a:p>
@@ -2435,26 +2526,41 @@
       </p:sp>
       <p:sp>
         <p:nvSpPr>
-          <p:cNvPr id="7" name="Shape 5"/>
-          <p:cNvSpPr/>
-          <p:nvPr/>
-        </p:nvSpPr>
-        <p:spPr>
-          <a:xfrm>
-            <a:off x="4389120" y="3136392"/>
-            <a:ext cx="4114800" cy="0"/>
-          </a:xfrm>
-          <a:prstGeom prst="line">
-            <a:avLst/>
-          </a:prstGeom>
-          <a:noFill/>
-          <a:ln w="12700">
-            <a:solidFill>
-              <a:srgbClr val="E8E8E8"/>
-            </a:solidFill>
-            <a:prstDash val="solid"/>
-          </a:ln>
-        </p:spPr>
+          <p:cNvPr id="7" name="Text 5"/>
+          <p:cNvSpPr/>
+          <p:nvPr/>
+        </p:nvSpPr>
+        <p:spPr>
+          <a:xfrm>
+            <a:off x="685800" y="3886200"/>
+            <a:ext cx="2560320" cy="685800"/>
+          </a:xfrm>
+          <a:prstGeom prst="rect">
+            <a:avLst/>
+          </a:prstGeom>
+          <a:noFill/>
+          <a:ln/>
+        </p:spPr>
+        <p:txBody>
+          <a:bodyPr wrap="square" lIns="0" tIns="0" rIns="0" bIns="0" rtlCol="0" anchor="ctr">
+            <a:normAutofit/>
+          </a:bodyPr>
+          <a:lstStyle/>
+          <a:p>
+            <a:pPr indent="0" marL="0">
+              <a:buNone/>
+            </a:pPr>
+            <a:r>
+              <a:rPr lang="en-US" sz="3400" b="1" dirty="0">
+                <a:solidFill>
+                  <a:srgbClr val="FF5A5F"/>
+                </a:solidFill>
+              </a:rPr>
+              <a:t>JSON</a:t>
+            </a:r>
+            <a:endParaRPr lang="en-US" sz="3400" dirty="0"/>
+          </a:p>
+        </p:txBody>
       </p:sp>
       <p:sp>
         <p:nvSpPr>
@@ -2464,92 +2570,111 @@
         </p:nvSpPr>
         <p:spPr>
           <a:xfrm>
-            <a:off x="8915400" y="2971800"/>
-            <a:ext cx="2103120" cy="347472"/>
-          </a:xfrm>
-          <a:prstGeom prst="rect">
-            <a:avLst/>
-          </a:prstGeom>
-          <a:noFill/>
-          <a:ln/>
-        </p:spPr>
-        <p:txBody>
-          <a:bodyPr wrap="square" lIns="0" tIns="0" rIns="0" bIns="0" rtlCol="0" anchor="ctr"/>
-          <a:lstStyle/>
-          <a:p>
-            <a:pPr algn="r" indent="0" marL="0">
-              <a:buNone/>
-            </a:pPr>
-            <a:r>
-              <a:rPr lang="en-US" sz="1500" b="1" dirty="0">
+            <a:off x="685800" y="4636008"/>
+            <a:ext cx="2560320" cy="457200"/>
+          </a:xfrm>
+          <a:prstGeom prst="rect">
+            <a:avLst/>
+          </a:prstGeom>
+          <a:noFill/>
+          <a:ln/>
+        </p:spPr>
+        <p:txBody>
+          <a:bodyPr wrap="square" lIns="0" tIns="0" rIns="0" bIns="0" rtlCol="0" anchor="ctr">
+            <a:normAutofit/>
+          </a:bodyPr>
+          <a:lstStyle/>
+          <a:p>
+            <a:pPr indent="0" marL="0">
+              <a:buNone/>
+            </a:pPr>
+            <a:r>
+              <a:rPr lang="en-US" sz="1200" dirty="0">
+                <a:solidFill>
+                  <a:srgbClr val="6B7280"/>
+                </a:solidFill>
+              </a:rPr>
+              <a:t>구조화 요청 로그</a:t>
+            </a:r>
+            <a:endParaRPr lang="en-US" sz="1200" dirty="0"/>
+          </a:p>
+        </p:txBody>
+      </p:sp>
+      <p:sp>
+        <p:nvSpPr>
+          <p:cNvPr id="9" name="Text 7"/>
+          <p:cNvSpPr/>
+          <p:nvPr/>
+        </p:nvSpPr>
+        <p:spPr>
+          <a:xfrm>
+            <a:off x="3657600" y="3886200"/>
+            <a:ext cx="2560320" cy="685800"/>
+          </a:xfrm>
+          <a:prstGeom prst="rect">
+            <a:avLst/>
+          </a:prstGeom>
+          <a:noFill/>
+          <a:ln/>
+        </p:spPr>
+        <p:txBody>
+          <a:bodyPr wrap="square" lIns="0" tIns="0" rIns="0" bIns="0" rtlCol="0" anchor="ctr">
+            <a:normAutofit/>
+          </a:bodyPr>
+          <a:lstStyle/>
+          <a:p>
+            <a:pPr indent="0" marL="0">
+              <a:buNone/>
+            </a:pPr>
+            <a:r>
+              <a:rPr lang="en-US" sz="3400" b="1" dirty="0">
                 <a:solidFill>
                   <a:srgbClr val="00A86B"/>
                 </a:solidFill>
               </a:rPr>
-              <a:t>PASS</a:t>
-            </a:r>
-            <a:endParaRPr lang="en-US" sz="1500" dirty="0"/>
-          </a:p>
-        </p:txBody>
-      </p:sp>
-      <p:sp>
-        <p:nvSpPr>
-          <p:cNvPr id="9" name="Text 7"/>
-          <p:cNvSpPr/>
-          <p:nvPr/>
-        </p:nvSpPr>
-        <p:spPr>
-          <a:xfrm>
-            <a:off x="731520" y="3721608"/>
-            <a:ext cx="4206240" cy="347472"/>
-          </a:xfrm>
-          <a:prstGeom prst="rect">
-            <a:avLst/>
-          </a:prstGeom>
-          <a:noFill/>
-          <a:ln/>
-        </p:spPr>
-        <p:txBody>
-          <a:bodyPr wrap="square" lIns="0" tIns="0" rIns="0" bIns="0" rtlCol="0" anchor="ctr"/>
-          <a:lstStyle/>
-          <a:p>
-            <a:pPr indent="0" marL="0">
-              <a:buNone/>
-            </a:pPr>
-            <a:r>
-              <a:rPr lang="en-US" sz="1500" dirty="0">
+              <a:t>/health</a:t>
+            </a:r>
+            <a:endParaRPr lang="en-US" sz="3400" dirty="0"/>
+          </a:p>
+        </p:txBody>
+      </p:sp>
+      <p:sp>
+        <p:nvSpPr>
+          <p:cNvPr id="10" name="Text 8"/>
+          <p:cNvSpPr/>
+          <p:nvPr/>
+        </p:nvSpPr>
+        <p:spPr>
+          <a:xfrm>
+            <a:off x="3657600" y="4636008"/>
+            <a:ext cx="2560320" cy="457200"/>
+          </a:xfrm>
+          <a:prstGeom prst="rect">
+            <a:avLst/>
+          </a:prstGeom>
+          <a:noFill/>
+          <a:ln/>
+        </p:spPr>
+        <p:txBody>
+          <a:bodyPr wrap="square" lIns="0" tIns="0" rIns="0" bIns="0" rtlCol="0" anchor="ctr">
+            <a:normAutofit/>
+          </a:bodyPr>
+          <a:lstStyle/>
+          <a:p>
+            <a:pPr indent="0" marL="0">
+              <a:buNone/>
+            </a:pPr>
+            <a:r>
+              <a:rPr lang="en-US" sz="1200" dirty="0">
                 <a:solidFill>
                   <a:srgbClr val="6B7280"/>
                 </a:solidFill>
               </a:rPr>
-              <a:t>Backend tests</a:t>
-            </a:r>
-            <a:endParaRPr lang="en-US" sz="1500" dirty="0"/>
-          </a:p>
-        </p:txBody>
-      </p:sp>
-      <p:sp>
-        <p:nvSpPr>
-          <p:cNvPr id="10" name="Shape 8"/>
-          <p:cNvSpPr/>
-          <p:nvPr/>
-        </p:nvSpPr>
-        <p:spPr>
-          <a:xfrm>
-            <a:off x="4389120" y="3886200"/>
-            <a:ext cx="4114800" cy="0"/>
-          </a:xfrm>
-          <a:prstGeom prst="line">
-            <a:avLst/>
-          </a:prstGeom>
-          <a:noFill/>
-          <a:ln w="12700">
-            <a:solidFill>
-              <a:srgbClr val="E8E8E8"/>
-            </a:solidFill>
-            <a:prstDash val="solid"/>
-          </a:ln>
-        </p:spPr>
+              <a:t>API와 DB 상태 확인</a:t>
+            </a:r>
+            <a:endParaRPr lang="en-US" sz="1200" dirty="0"/>
+          </a:p>
+        </p:txBody>
       </p:sp>
       <p:sp>
         <p:nvSpPr>
@@ -2559,31 +2684,33 @@
         </p:nvSpPr>
         <p:spPr>
           <a:xfrm>
-            <a:off x="8915400" y="3721608"/>
-            <a:ext cx="2103120" cy="347472"/>
-          </a:xfrm>
-          <a:prstGeom prst="rect">
-            <a:avLst/>
-          </a:prstGeom>
-          <a:noFill/>
-          <a:ln/>
-        </p:spPr>
-        <p:txBody>
-          <a:bodyPr wrap="square" lIns="0" tIns="0" rIns="0" bIns="0" rtlCol="0" anchor="ctr"/>
-          <a:lstStyle/>
-          <a:p>
-            <a:pPr algn="r" indent="0" marL="0">
-              <a:buNone/>
-            </a:pPr>
-            <a:r>
-              <a:rPr lang="en-US" sz="1500" b="1" dirty="0">
-                <a:solidFill>
-                  <a:srgbClr val="00A86B"/>
-                </a:solidFill>
-              </a:rPr>
-              <a:t>3 PASS</a:t>
-            </a:r>
-            <a:endParaRPr lang="en-US" sz="1500" dirty="0"/>
+            <a:off x="6629400" y="3886200"/>
+            <a:ext cx="2560320" cy="685800"/>
+          </a:xfrm>
+          <a:prstGeom prst="rect">
+            <a:avLst/>
+          </a:prstGeom>
+          <a:noFill/>
+          <a:ln/>
+        </p:spPr>
+        <p:txBody>
+          <a:bodyPr wrap="square" lIns="0" tIns="0" rIns="0" bIns="0" rtlCol="0" anchor="ctr">
+            <a:normAutofit/>
+          </a:bodyPr>
+          <a:lstStyle/>
+          <a:p>
+            <a:pPr indent="0" marL="0">
+              <a:buNone/>
+            </a:pPr>
+            <a:r>
+              <a:rPr lang="en-US" sz="3400" b="1" dirty="0">
+                <a:solidFill>
+                  <a:srgbClr val="4568DC"/>
+                </a:solidFill>
+              </a:rPr>
+              <a:t>/metrics</a:t>
+            </a:r>
+            <a:endParaRPr lang="en-US" sz="3400" dirty="0"/>
           </a:p>
         </p:txBody>
       </p:sp>
@@ -2595,56 +2722,73 @@
         </p:nvSpPr>
         <p:spPr>
           <a:xfrm>
-            <a:off x="731520" y="4471416"/>
-            <a:ext cx="4206240" cy="347472"/>
-          </a:xfrm>
-          <a:prstGeom prst="rect">
-            <a:avLst/>
-          </a:prstGeom>
-          <a:noFill/>
-          <a:ln/>
-        </p:spPr>
-        <p:txBody>
-          <a:bodyPr wrap="square" lIns="0" tIns="0" rIns="0" bIns="0" rtlCol="0" anchor="ctr"/>
-          <a:lstStyle/>
-          <a:p>
-            <a:pPr indent="0" marL="0">
-              <a:buNone/>
-            </a:pPr>
-            <a:r>
-              <a:rPr lang="en-US" sz="1500" dirty="0">
+            <a:off x="6629400" y="4636008"/>
+            <a:ext cx="2560320" cy="457200"/>
+          </a:xfrm>
+          <a:prstGeom prst="rect">
+            <a:avLst/>
+          </a:prstGeom>
+          <a:noFill/>
+          <a:ln/>
+        </p:spPr>
+        <p:txBody>
+          <a:bodyPr wrap="square" lIns="0" tIns="0" rIns="0" bIns="0" rtlCol="0" anchor="ctr">
+            <a:normAutofit/>
+          </a:bodyPr>
+          <a:lstStyle/>
+          <a:p>
+            <a:pPr indent="0" marL="0">
+              <a:buNone/>
+            </a:pPr>
+            <a:r>
+              <a:rPr lang="en-US" sz="1200" dirty="0">
                 <a:solidFill>
                   <a:srgbClr val="6B7280"/>
                 </a:solidFill>
               </a:rPr>
-              <a:t>Dependency audit</a:t>
-            </a:r>
-            <a:endParaRPr lang="en-US" sz="1500" dirty="0"/>
-          </a:p>
-        </p:txBody>
-      </p:sp>
-      <p:sp>
-        <p:nvSpPr>
-          <p:cNvPr id="13" name="Shape 11"/>
-          <p:cNvSpPr/>
-          <p:nvPr/>
-        </p:nvSpPr>
-        <p:spPr>
-          <a:xfrm>
-            <a:off x="4389120" y="4636008"/>
-            <a:ext cx="4114800" cy="0"/>
-          </a:xfrm>
-          <a:prstGeom prst="line">
-            <a:avLst/>
-          </a:prstGeom>
-          <a:noFill/>
-          <a:ln w="12700">
-            <a:solidFill>
-              <a:srgbClr val="E8E8E8"/>
-            </a:solidFill>
-            <a:prstDash val="solid"/>
-          </a:ln>
-        </p:spPr>
+              <a:t>운영 지표와 실패 이력</a:t>
+            </a:r>
+            <a:endParaRPr lang="en-US" sz="1200" dirty="0"/>
+          </a:p>
+        </p:txBody>
+      </p:sp>
+      <p:sp>
+        <p:nvSpPr>
+          <p:cNvPr id="13" name="Text 11"/>
+          <p:cNvSpPr/>
+          <p:nvPr/>
+        </p:nvSpPr>
+        <p:spPr>
+          <a:xfrm>
+            <a:off x="9235440" y="3886200"/>
+            <a:ext cx="2560320" cy="685800"/>
+          </a:xfrm>
+          <a:prstGeom prst="rect">
+            <a:avLst/>
+          </a:prstGeom>
+          <a:noFill/>
+          <a:ln/>
+        </p:spPr>
+        <p:txBody>
+          <a:bodyPr wrap="square" lIns="0" tIns="0" rIns="0" bIns="0" rtlCol="0" anchor="ctr">
+            <a:normAutofit/>
+          </a:bodyPr>
+          <a:lstStyle/>
+          <a:p>
+            <a:pPr indent="0" marL="0">
+              <a:buNone/>
+            </a:pPr>
+            <a:r>
+              <a:rPr lang="en-US" sz="3400" b="1" dirty="0">
+                <a:solidFill>
+                  <a:srgbClr val="222222"/>
+                </a:solidFill>
+              </a:rPr>
+              <a:t>HMAC</a:t>
+            </a:r>
+            <a:endParaRPr lang="en-US" sz="3400" dirty="0"/>
+          </a:p>
+        </p:txBody>
       </p:sp>
       <p:sp>
         <p:nvSpPr>
@@ -2654,126 +2798,33 @@
         </p:nvSpPr>
         <p:spPr>
           <a:xfrm>
-            <a:off x="8915400" y="4471416"/>
-            <a:ext cx="2103120" cy="347472"/>
-          </a:xfrm>
-          <a:prstGeom prst="rect">
-            <a:avLst/>
-          </a:prstGeom>
-          <a:noFill/>
-          <a:ln/>
-        </p:spPr>
-        <p:txBody>
-          <a:bodyPr wrap="square" lIns="0" tIns="0" rIns="0" bIns="0" rtlCol="0" anchor="ctr"/>
-          <a:lstStyle/>
-          <a:p>
-            <a:pPr algn="r" indent="0" marL="0">
-              <a:buNone/>
-            </a:pPr>
-            <a:r>
-              <a:rPr lang="en-US" sz="1500" b="1" dirty="0">
-                <a:solidFill>
-                  <a:srgbClr val="00A86B"/>
-                </a:solidFill>
-              </a:rPr>
-              <a:t>0 issues</a:t>
-            </a:r>
-            <a:endParaRPr lang="en-US" sz="1500" dirty="0"/>
-          </a:p>
-        </p:txBody>
-      </p:sp>
-      <p:sp>
-        <p:nvSpPr>
-          <p:cNvPr id="15" name="Text 13"/>
-          <p:cNvSpPr/>
-          <p:nvPr/>
-        </p:nvSpPr>
-        <p:spPr>
-          <a:xfrm>
-            <a:off x="731520" y="5221224"/>
-            <a:ext cx="4206240" cy="347472"/>
-          </a:xfrm>
-          <a:prstGeom prst="rect">
-            <a:avLst/>
-          </a:prstGeom>
-          <a:noFill/>
-          <a:ln/>
-        </p:spPr>
-        <p:txBody>
-          <a:bodyPr wrap="square" lIns="0" tIns="0" rIns="0" bIns="0" rtlCol="0" anchor="ctr"/>
-          <a:lstStyle/>
-          <a:p>
-            <a:pPr indent="0" marL="0">
-              <a:buNone/>
-            </a:pPr>
-            <a:r>
-              <a:rPr lang="en-US" sz="1500" dirty="0">
+            <a:off x="9235440" y="4636008"/>
+            <a:ext cx="2560320" cy="457200"/>
+          </a:xfrm>
+          <a:prstGeom prst="rect">
+            <a:avLst/>
+          </a:prstGeom>
+          <a:noFill/>
+          <a:ln/>
+        </p:spPr>
+        <p:txBody>
+          <a:bodyPr wrap="square" lIns="0" tIns="0" rIns="0" bIns="0" rtlCol="0" anchor="ctr">
+            <a:normAutofit/>
+          </a:bodyPr>
+          <a:lstStyle/>
+          <a:p>
+            <a:pPr indent="0" marL="0">
+              <a:buNone/>
+            </a:pPr>
+            <a:r>
+              <a:rPr lang="en-US" sz="1200" dirty="0">
                 <a:solidFill>
                   <a:srgbClr val="6B7280"/>
                 </a:solidFill>
               </a:rPr>
-              <a:t>PPT / Git bundle</a:t>
-            </a:r>
-            <a:endParaRPr lang="en-US" sz="1500" dirty="0"/>
-          </a:p>
-        </p:txBody>
-      </p:sp>
-      <p:sp>
-        <p:nvSpPr>
-          <p:cNvPr id="16" name="Shape 14"/>
-          <p:cNvSpPr/>
-          <p:nvPr/>
-        </p:nvSpPr>
-        <p:spPr>
-          <a:xfrm>
-            <a:off x="4389120" y="5385816"/>
-            <a:ext cx="4114800" cy="0"/>
-          </a:xfrm>
-          <a:prstGeom prst="line">
-            <a:avLst/>
-          </a:prstGeom>
-          <a:noFill/>
-          <a:ln w="12700">
-            <a:solidFill>
-              <a:srgbClr val="E8E8E8"/>
-            </a:solidFill>
-            <a:prstDash val="solid"/>
-          </a:ln>
-        </p:spPr>
-      </p:sp>
-      <p:sp>
-        <p:nvSpPr>
-          <p:cNvPr id="17" name="Text 15"/>
-          <p:cNvSpPr/>
-          <p:nvPr/>
-        </p:nvSpPr>
-        <p:spPr>
-          <a:xfrm>
-            <a:off x="8915400" y="5221224"/>
-            <a:ext cx="2103120" cy="347472"/>
-          </a:xfrm>
-          <a:prstGeom prst="rect">
-            <a:avLst/>
-          </a:prstGeom>
-          <a:noFill/>
-          <a:ln/>
-        </p:spPr>
-        <p:txBody>
-          <a:bodyPr wrap="square" lIns="0" tIns="0" rIns="0" bIns="0" rtlCol="0" anchor="ctr"/>
-          <a:lstStyle/>
-          <a:p>
-            <a:pPr algn="r" indent="0" marL="0">
-              <a:buNone/>
-            </a:pPr>
-            <a:r>
-              <a:rPr lang="en-US" sz="1500" b="1" dirty="0">
-                <a:solidFill>
-                  <a:srgbClr val="00A86B"/>
-                </a:solidFill>
-              </a:rPr>
-              <a:t>VERIFIED</a:t>
-            </a:r>
-            <a:endParaRPr lang="en-US" sz="1500" dirty="0"/>
+              <a:t>Webhook 무결성 검증</a:t>
+            </a:r>
+            <a:endParaRPr lang="en-US" sz="1200" dirty="0"/>
           </a:p>
         </p:txBody>
       </p:sp>
@@ -2911,7 +2962,7 @@
                   <a:srgbClr val="FF5A5F"/>
                 </a:solidFill>
               </a:rPr>
-              <a:t>DEPLOYMENT</a:t>
+              <a:t>VALIDATION</a:t>
             </a:r>
             <a:endParaRPr lang="en-US" sz="1000" dirty="0"/>
           </a:p>
@@ -2926,7 +2977,7 @@
         <p:spPr>
           <a:xfrm>
             <a:off x="640080" y="1371600"/>
-            <a:ext cx="7315200" cy="1417320"/>
+            <a:ext cx="6400800" cy="1371600"/>
           </a:xfrm>
           <a:prstGeom prst="rect">
             <a:avLst/>
@@ -2949,7 +3000,7 @@
                   <a:srgbClr val="222222"/>
                 </a:solidFill>
               </a:rPr>
-              <a:t>준비 완료와 배포 완료는</a:t>
+              <a:t>기능은 만들었고,</a:t>
             </a:r>
             <a:endParaRPr lang="en-US" sz="3700" dirty="0"/>
           </a:p>
@@ -2963,7 +3014,7 @@
                   <a:srgbClr val="222222"/>
                 </a:solidFill>
               </a:rPr>
-              <a:t>같은 말이 아닙니다.</a:t>
+              <a:t>자동 검증으로 확인했습니다.</a:t>
             </a:r>
             <a:endParaRPr lang="en-US" sz="3700" dirty="0"/>
           </a:p>
@@ -2977,19 +3028,17 @@
         </p:nvSpPr>
         <p:spPr>
           <a:xfrm>
-            <a:off x="667512" y="2788920"/>
-            <a:ext cx="6858000" cy="731520"/>
-          </a:xfrm>
-          <a:prstGeom prst="rect">
-            <a:avLst/>
-          </a:prstGeom>
-          <a:noFill/>
-          <a:ln/>
-        </p:spPr>
-        <p:txBody>
-          <a:bodyPr wrap="square" lIns="0" tIns="0" rIns="0" bIns="0" rtlCol="0" anchor="ctr">
-            <a:normAutofit/>
-          </a:bodyPr>
+            <a:off x="731520" y="2971800"/>
+            <a:ext cx="4206240" cy="347472"/>
+          </a:xfrm>
+          <a:prstGeom prst="rect">
+            <a:avLst/>
+          </a:prstGeom>
+          <a:noFill/>
+          <a:ln/>
+        </p:spPr>
+        <p:txBody>
+          <a:bodyPr wrap="square" lIns="0" tIns="0" rIns="0" bIns="0" rtlCol="0" anchor="ctr"/>
           <a:lstStyle/>
           <a:p>
             <a:pPr indent="0" marL="0">
@@ -3001,7 +3050,7 @@
                   <a:srgbClr val="6B7280"/>
                 </a:solidFill>
               </a:rPr>
-              <a:t>현재 코드는 배포 가능한 상태지만 공개 URL과 운영 인프라는 아직 연결되지 않았습니다.</a:t>
+              <a:t>Frontend build</a:t>
             </a:r>
             <a:endParaRPr lang="en-US" sz="1500" dirty="0"/>
           </a:p>
@@ -3015,17 +3064,13 @@
         </p:nvSpPr>
         <p:spPr>
           <a:xfrm>
-            <a:off x="685800" y="3794760"/>
-            <a:ext cx="3337560" cy="1828800"/>
-          </a:xfrm>
-          <a:prstGeom prst="roundRect">
-            <a:avLst>
-              <a:gd name="adj" fmla="val 4000"/>
-            </a:avLst>
-          </a:prstGeom>
-          <a:solidFill>
-            <a:srgbClr val="FFFFFF"/>
-          </a:solidFill>
+            <a:off x="4389120" y="3136392"/>
+            <a:ext cx="4114800" cy="0"/>
+          </a:xfrm>
+          <a:prstGeom prst="line">
+            <a:avLst/>
+          </a:prstGeom>
+          <a:noFill/>
           <a:ln w="12700">
             <a:solidFill>
               <a:srgbClr val="E8E8E8"/>
@@ -3036,28 +3081,39 @@
       </p:sp>
       <p:sp>
         <p:nvSpPr>
-          <p:cNvPr id="8" name="Shape 6"/>
-          <p:cNvSpPr/>
-          <p:nvPr/>
-        </p:nvSpPr>
-        <p:spPr>
-          <a:xfrm>
-            <a:off x="960120" y="4069080"/>
-            <a:ext cx="228600" cy="228600"/>
-          </a:xfrm>
-          <a:prstGeom prst="ellipse">
-            <a:avLst/>
-          </a:prstGeom>
-          <a:solidFill>
-            <a:srgbClr val="00A86B"/>
-          </a:solidFill>
-          <a:ln w="12700">
-            <a:solidFill>
-              <a:srgbClr val="00A86B"/>
-            </a:solidFill>
-            <a:prstDash val="solid"/>
-          </a:ln>
-        </p:spPr>
+          <p:cNvPr id="8" name="Text 6"/>
+          <p:cNvSpPr/>
+          <p:nvPr/>
+        </p:nvSpPr>
+        <p:spPr>
+          <a:xfrm>
+            <a:off x="8915400" y="2971800"/>
+            <a:ext cx="2103120" cy="347472"/>
+          </a:xfrm>
+          <a:prstGeom prst="rect">
+            <a:avLst/>
+          </a:prstGeom>
+          <a:noFill/>
+          <a:ln/>
+        </p:spPr>
+        <p:txBody>
+          <a:bodyPr wrap="square" lIns="0" tIns="0" rIns="0" bIns="0" rtlCol="0" anchor="ctr"/>
+          <a:lstStyle/>
+          <a:p>
+            <a:pPr algn="r" indent="0" marL="0">
+              <a:buNone/>
+            </a:pPr>
+            <a:r>
+              <a:rPr lang="en-US" sz="1500" b="1" dirty="0">
+                <a:solidFill>
+                  <a:srgbClr val="00A86B"/>
+                </a:solidFill>
+              </a:rPr>
+              <a:t>PASS</a:t>
+            </a:r>
+            <a:endParaRPr lang="en-US" sz="1500" dirty="0"/>
+          </a:p>
+        </p:txBody>
       </p:sp>
       <p:sp>
         <p:nvSpPr>
@@ -3067,121 +3123,49 @@
         </p:nvSpPr>
         <p:spPr>
           <a:xfrm>
-            <a:off x="960120" y="4544568"/>
-            <a:ext cx="2788920" cy="411480"/>
-          </a:xfrm>
-          <a:prstGeom prst="rect">
-            <a:avLst/>
-          </a:prstGeom>
-          <a:noFill/>
-          <a:ln/>
-        </p:spPr>
-        <p:txBody>
-          <a:bodyPr wrap="square" lIns="0" tIns="0" rIns="0" bIns="0" rtlCol="0" anchor="ctr">
-            <a:normAutofit/>
-          </a:bodyPr>
-          <a:lstStyle/>
-          <a:p>
-            <a:pPr indent="0" marL="0">
-              <a:buNone/>
-            </a:pPr>
-            <a:r>
-              <a:rPr lang="en-US" sz="1700" b="1" dirty="0">
-                <a:solidFill>
-                  <a:srgbClr val="222222"/>
-                </a:solidFill>
-              </a:rPr>
-              <a:t>준비됨</a:t>
-            </a:r>
-            <a:endParaRPr lang="en-US" sz="1700" dirty="0"/>
-          </a:p>
-        </p:txBody>
-      </p:sp>
-      <p:sp>
-        <p:nvSpPr>
-          <p:cNvPr id="10" name="Text 8"/>
-          <p:cNvSpPr/>
-          <p:nvPr/>
-        </p:nvSpPr>
-        <p:spPr>
-          <a:xfrm>
-            <a:off x="960120" y="5120640"/>
-            <a:ext cx="2788920" cy="228600"/>
-          </a:xfrm>
-          <a:prstGeom prst="rect">
-            <a:avLst/>
-          </a:prstGeom>
-          <a:noFill/>
-          <a:ln/>
-        </p:spPr>
-        <p:txBody>
-          <a:bodyPr wrap="square" lIns="0" tIns="0" rIns="0" bIns="0" rtlCol="0" anchor="ctr">
-            <a:normAutofit/>
-          </a:bodyPr>
-          <a:lstStyle/>
-          <a:p>
-            <a:pPr indent="0" marL="0">
-              <a:buNone/>
-            </a:pPr>
-            <a:r>
-              <a:rPr lang="en-US" sz="1150" dirty="0">
+            <a:off x="731520" y="3721608"/>
+            <a:ext cx="4206240" cy="347472"/>
+          </a:xfrm>
+          <a:prstGeom prst="rect">
+            <a:avLst/>
+          </a:prstGeom>
+          <a:noFill/>
+          <a:ln/>
+        </p:spPr>
+        <p:txBody>
+          <a:bodyPr wrap="square" lIns="0" tIns="0" rIns="0" bIns="0" rtlCol="0" anchor="ctr"/>
+          <a:lstStyle/>
+          <a:p>
+            <a:pPr indent="0" marL="0">
+              <a:buNone/>
+            </a:pPr>
+            <a:r>
+              <a:rPr lang="en-US" sz="1500" dirty="0">
                 <a:solidFill>
                   <a:srgbClr val="6B7280"/>
                 </a:solidFill>
               </a:rPr>
-              <a:t>Dockerfile · Compose</a:t>
-            </a:r>
-            <a:endParaRPr lang="en-US" sz="1150" dirty="0"/>
-          </a:p>
-          <a:p>
-            <a:pPr indent="0" marL="0">
-              <a:buNone/>
-            </a:pPr>
-            <a:r>
-              <a:rPr lang="en-US" sz="1150" dirty="0">
-                <a:solidFill>
-                  <a:srgbClr val="6B7280"/>
-                </a:solidFill>
-              </a:rPr>
-              <a:t>환경변수 예제 · Runbook</a:t>
-            </a:r>
-            <a:endParaRPr lang="en-US" sz="1150" dirty="0"/>
-          </a:p>
-          <a:p>
-            <a:pPr indent="0" marL="0">
-              <a:buNone/>
-            </a:pPr>
-            <a:r>
-              <a:rPr lang="en-US" sz="1150" dirty="0">
-                <a:solidFill>
-                  <a:srgbClr val="6B7280"/>
-                </a:solidFill>
-              </a:rPr>
-              <a:t>Health · Metrics</a:t>
-            </a:r>
-            <a:endParaRPr lang="en-US" sz="1150" dirty="0"/>
-          </a:p>
-        </p:txBody>
-      </p:sp>
-      <p:sp>
-        <p:nvSpPr>
-          <p:cNvPr id="11" name="Shape 9"/>
-          <p:cNvSpPr/>
-          <p:nvPr/>
-        </p:nvSpPr>
-        <p:spPr>
-          <a:xfrm>
-            <a:off x="4407408" y="3794760"/>
-            <a:ext cx="3337560" cy="1828800"/>
-          </a:xfrm>
-          <a:prstGeom prst="roundRect">
-            <a:avLst>
-              <a:gd name="adj" fmla="val 4000"/>
-            </a:avLst>
-          </a:prstGeom>
-          <a:solidFill>
-            <a:srgbClr val="FFFFFF"/>
-          </a:solidFill>
+              <a:t>Backend tests</a:t>
+            </a:r>
+            <a:endParaRPr lang="en-US" sz="1500" dirty="0"/>
+          </a:p>
+        </p:txBody>
+      </p:sp>
+      <p:sp>
+        <p:nvSpPr>
+          <p:cNvPr id="10" name="Shape 8"/>
+          <p:cNvSpPr/>
+          <p:nvPr/>
+        </p:nvSpPr>
+        <p:spPr>
+          <a:xfrm>
+            <a:off x="4389120" y="3886200"/>
+            <a:ext cx="4114800" cy="0"/>
+          </a:xfrm>
+          <a:prstGeom prst="line">
+            <a:avLst/>
+          </a:prstGeom>
+          <a:noFill/>
           <a:ln w="12700">
             <a:solidFill>
               <a:srgbClr val="E8E8E8"/>
@@ -3192,152 +3176,91 @@
       </p:sp>
       <p:sp>
         <p:nvSpPr>
-          <p:cNvPr id="12" name="Shape 10"/>
-          <p:cNvSpPr/>
-          <p:nvPr/>
-        </p:nvSpPr>
-        <p:spPr>
-          <a:xfrm>
-            <a:off x="4681728" y="4069080"/>
-            <a:ext cx="228600" cy="228600"/>
-          </a:xfrm>
-          <a:prstGeom prst="ellipse">
-            <a:avLst/>
-          </a:prstGeom>
-          <a:solidFill>
-            <a:srgbClr val="FF5A5F"/>
-          </a:solidFill>
-          <a:ln w="12700">
-            <a:solidFill>
-              <a:srgbClr val="FF5A5F"/>
-            </a:solidFill>
-            <a:prstDash val="solid"/>
-          </a:ln>
-        </p:spPr>
-      </p:sp>
-      <p:sp>
-        <p:nvSpPr>
-          <p:cNvPr id="13" name="Text 11"/>
-          <p:cNvSpPr/>
-          <p:nvPr/>
-        </p:nvSpPr>
-        <p:spPr>
-          <a:xfrm>
-            <a:off x="4681728" y="4544568"/>
-            <a:ext cx="2788920" cy="411480"/>
-          </a:xfrm>
-          <a:prstGeom prst="rect">
-            <a:avLst/>
-          </a:prstGeom>
-          <a:noFill/>
-          <a:ln/>
-        </p:spPr>
-        <p:txBody>
-          <a:bodyPr wrap="square" lIns="0" tIns="0" rIns="0" bIns="0" rtlCol="0" anchor="ctr">
-            <a:normAutofit/>
-          </a:bodyPr>
-          <a:lstStyle/>
-          <a:p>
-            <a:pPr indent="0" marL="0">
-              <a:buNone/>
-            </a:pPr>
-            <a:r>
-              <a:rPr lang="en-US" sz="1700" b="1" dirty="0">
-                <a:solidFill>
-                  <a:srgbClr val="222222"/>
-                </a:solidFill>
-              </a:rPr>
-              <a:t>현재</a:t>
-            </a:r>
-            <a:endParaRPr lang="en-US" sz="1700" dirty="0"/>
-          </a:p>
-        </p:txBody>
-      </p:sp>
-      <p:sp>
-        <p:nvSpPr>
-          <p:cNvPr id="14" name="Text 12"/>
-          <p:cNvSpPr/>
-          <p:nvPr/>
-        </p:nvSpPr>
-        <p:spPr>
-          <a:xfrm>
-            <a:off x="4681728" y="5120640"/>
-            <a:ext cx="2788920" cy="228600"/>
-          </a:xfrm>
-          <a:prstGeom prst="rect">
-            <a:avLst/>
-          </a:prstGeom>
-          <a:noFill/>
-          <a:ln/>
-        </p:spPr>
-        <p:txBody>
-          <a:bodyPr wrap="square" lIns="0" tIns="0" rIns="0" bIns="0" rtlCol="0" anchor="ctr">
-            <a:normAutofit/>
-          </a:bodyPr>
-          <a:lstStyle/>
-          <a:p>
-            <a:pPr indent="0" marL="0">
-              <a:buNone/>
-            </a:pPr>
-            <a:r>
-              <a:rPr lang="en-US" sz="1150" dirty="0">
+          <p:cNvPr id="11" name="Text 9"/>
+          <p:cNvSpPr/>
+          <p:nvPr/>
+        </p:nvSpPr>
+        <p:spPr>
+          <a:xfrm>
+            <a:off x="8915400" y="3721608"/>
+            <a:ext cx="2103120" cy="347472"/>
+          </a:xfrm>
+          <a:prstGeom prst="rect">
+            <a:avLst/>
+          </a:prstGeom>
+          <a:noFill/>
+          <a:ln/>
+        </p:spPr>
+        <p:txBody>
+          <a:bodyPr wrap="square" lIns="0" tIns="0" rIns="0" bIns="0" rtlCol="0" anchor="ctr"/>
+          <a:lstStyle/>
+          <a:p>
+            <a:pPr algn="r" indent="0" marL="0">
+              <a:buNone/>
+            </a:pPr>
+            <a:r>
+              <a:rPr lang="en-US" sz="1500" b="1" dirty="0">
+                <a:solidFill>
+                  <a:srgbClr val="00A86B"/>
+                </a:solidFill>
+              </a:rPr>
+              <a:t>3 PASS</a:t>
+            </a:r>
+            <a:endParaRPr lang="en-US" sz="1500" dirty="0"/>
+          </a:p>
+        </p:txBody>
+      </p:sp>
+      <p:sp>
+        <p:nvSpPr>
+          <p:cNvPr id="12" name="Text 10"/>
+          <p:cNvSpPr/>
+          <p:nvPr/>
+        </p:nvSpPr>
+        <p:spPr>
+          <a:xfrm>
+            <a:off x="731520" y="4471416"/>
+            <a:ext cx="4206240" cy="347472"/>
+          </a:xfrm>
+          <a:prstGeom prst="rect">
+            <a:avLst/>
+          </a:prstGeom>
+          <a:noFill/>
+          <a:ln/>
+        </p:spPr>
+        <p:txBody>
+          <a:bodyPr wrap="square" lIns="0" tIns="0" rIns="0" bIns="0" rtlCol="0" anchor="ctr"/>
+          <a:lstStyle/>
+          <a:p>
+            <a:pPr indent="0" marL="0">
+              <a:buNone/>
+            </a:pPr>
+            <a:r>
+              <a:rPr lang="en-US" sz="1500" dirty="0">
                 <a:solidFill>
                   <a:srgbClr val="6B7280"/>
                 </a:solidFill>
               </a:rPr>
-              <a:t>공개 URL 없음</a:t>
-            </a:r>
-            <a:endParaRPr lang="en-US" sz="1150" dirty="0"/>
-          </a:p>
-          <a:p>
-            <a:pPr indent="0" marL="0">
-              <a:buNone/>
-            </a:pPr>
-            <a:r>
-              <a:rPr lang="en-US" sz="1150" dirty="0">
-                <a:solidFill>
-                  <a:srgbClr val="6B7280"/>
-                </a:solidFill>
-              </a:rPr>
-              <a:t>운영 DB 없음</a:t>
-            </a:r>
-            <a:endParaRPr lang="en-US" sz="1150" dirty="0"/>
-          </a:p>
-          <a:p>
-            <a:pPr indent="0" marL="0">
-              <a:buNone/>
-            </a:pPr>
-            <a:r>
-              <a:rPr lang="en-US" sz="1150" dirty="0">
-                <a:solidFill>
-                  <a:srgbClr val="6B7280"/>
-                </a:solidFill>
-              </a:rPr>
-              <a:t>실결제 운영 키 미연결</a:t>
-            </a:r>
-            <a:endParaRPr lang="en-US" sz="1150" dirty="0"/>
-          </a:p>
-        </p:txBody>
-      </p:sp>
-      <p:sp>
-        <p:nvSpPr>
-          <p:cNvPr id="15" name="Shape 13"/>
-          <p:cNvSpPr/>
-          <p:nvPr/>
-        </p:nvSpPr>
-        <p:spPr>
-          <a:xfrm>
-            <a:off x="8138160" y="3794760"/>
-            <a:ext cx="3337560" cy="1828800"/>
-          </a:xfrm>
-          <a:prstGeom prst="roundRect">
-            <a:avLst>
-              <a:gd name="adj" fmla="val 4000"/>
-            </a:avLst>
-          </a:prstGeom>
-          <a:solidFill>
-            <a:srgbClr val="FFFFFF"/>
-          </a:solidFill>
+              <a:t>Dependency audit</a:t>
+            </a:r>
+            <a:endParaRPr lang="en-US" sz="1500" dirty="0"/>
+          </a:p>
+        </p:txBody>
+      </p:sp>
+      <p:sp>
+        <p:nvSpPr>
+          <p:cNvPr id="13" name="Shape 11"/>
+          <p:cNvSpPr/>
+          <p:nvPr/>
+        </p:nvSpPr>
+        <p:spPr>
+          <a:xfrm>
+            <a:off x="4389120" y="4636008"/>
+            <a:ext cx="4114800" cy="0"/>
+          </a:xfrm>
+          <a:prstGeom prst="line">
+            <a:avLst/>
+          </a:prstGeom>
+          <a:noFill/>
           <a:ln w="12700">
             <a:solidFill>
               <a:srgbClr val="E8E8E8"/>
@@ -3348,24 +3271,94 @@
       </p:sp>
       <p:sp>
         <p:nvSpPr>
+          <p:cNvPr id="14" name="Text 12"/>
+          <p:cNvSpPr/>
+          <p:nvPr/>
+        </p:nvSpPr>
+        <p:spPr>
+          <a:xfrm>
+            <a:off x="8915400" y="4471416"/>
+            <a:ext cx="2103120" cy="347472"/>
+          </a:xfrm>
+          <a:prstGeom prst="rect">
+            <a:avLst/>
+          </a:prstGeom>
+          <a:noFill/>
+          <a:ln/>
+        </p:spPr>
+        <p:txBody>
+          <a:bodyPr wrap="square" lIns="0" tIns="0" rIns="0" bIns="0" rtlCol="0" anchor="ctr"/>
+          <a:lstStyle/>
+          <a:p>
+            <a:pPr algn="r" indent="0" marL="0">
+              <a:buNone/>
+            </a:pPr>
+            <a:r>
+              <a:rPr lang="en-US" sz="1500" b="1" dirty="0">
+                <a:solidFill>
+                  <a:srgbClr val="00A86B"/>
+                </a:solidFill>
+              </a:rPr>
+              <a:t>0 issues</a:t>
+            </a:r>
+            <a:endParaRPr lang="en-US" sz="1500" dirty="0"/>
+          </a:p>
+        </p:txBody>
+      </p:sp>
+      <p:sp>
+        <p:nvSpPr>
+          <p:cNvPr id="15" name="Text 13"/>
+          <p:cNvSpPr/>
+          <p:nvPr/>
+        </p:nvSpPr>
+        <p:spPr>
+          <a:xfrm>
+            <a:off x="731520" y="5221224"/>
+            <a:ext cx="4206240" cy="347472"/>
+          </a:xfrm>
+          <a:prstGeom prst="rect">
+            <a:avLst/>
+          </a:prstGeom>
+          <a:noFill/>
+          <a:ln/>
+        </p:spPr>
+        <p:txBody>
+          <a:bodyPr wrap="square" lIns="0" tIns="0" rIns="0" bIns="0" rtlCol="0" anchor="ctr"/>
+          <a:lstStyle/>
+          <a:p>
+            <a:pPr indent="0" marL="0">
+              <a:buNone/>
+            </a:pPr>
+            <a:r>
+              <a:rPr lang="en-US" sz="1500" dirty="0">
+                <a:solidFill>
+                  <a:srgbClr val="6B7280"/>
+                </a:solidFill>
+              </a:rPr>
+              <a:t>PPT / Git bundle</a:t>
+            </a:r>
+            <a:endParaRPr lang="en-US" sz="1500" dirty="0"/>
+          </a:p>
+        </p:txBody>
+      </p:sp>
+      <p:sp>
+        <p:nvSpPr>
           <p:cNvPr id="16" name="Shape 14"/>
           <p:cNvSpPr/>
           <p:nvPr/>
         </p:nvSpPr>
         <p:spPr>
           <a:xfrm>
-            <a:off x="8412480" y="4069080"/>
-            <a:ext cx="228600" cy="228600"/>
-          </a:xfrm>
-          <a:prstGeom prst="ellipse">
-            <a:avLst/>
-          </a:prstGeom>
-          <a:solidFill>
-            <a:srgbClr val="4568DC"/>
-          </a:solidFill>
+            <a:off x="4389120" y="5385816"/>
+            <a:ext cx="4114800" cy="0"/>
+          </a:xfrm>
+          <a:prstGeom prst="line">
+            <a:avLst/>
+          </a:prstGeom>
+          <a:noFill/>
           <a:ln w="12700">
             <a:solidFill>
-              <a:srgbClr val="4568DC"/>
+              <a:srgbClr val="E8E8E8"/>
             </a:solidFill>
             <a:prstDash val="solid"/>
           </a:ln>
@@ -3379,99 +3372,31 @@
         </p:nvSpPr>
         <p:spPr>
           <a:xfrm>
-            <a:off x="8412480" y="4544568"/>
-            <a:ext cx="2788920" cy="411480"/>
-          </a:xfrm>
-          <a:prstGeom prst="rect">
-            <a:avLst/>
-          </a:prstGeom>
-          <a:noFill/>
-          <a:ln/>
-        </p:spPr>
-        <p:txBody>
-          <a:bodyPr wrap="square" lIns="0" tIns="0" rIns="0" bIns="0" rtlCol="0" anchor="ctr">
-            <a:normAutofit/>
-          </a:bodyPr>
-          <a:lstStyle/>
-          <a:p>
-            <a:pPr indent="0" marL="0">
-              <a:buNone/>
-            </a:pPr>
-            <a:r>
-              <a:rPr lang="en-US" sz="1700" b="1" dirty="0">
-                <a:solidFill>
-                  <a:srgbClr val="222222"/>
-                </a:solidFill>
-              </a:rPr>
-              <a:t>배포 순서</a:t>
-            </a:r>
-            <a:endParaRPr lang="en-US" sz="1700" dirty="0"/>
-          </a:p>
-        </p:txBody>
-      </p:sp>
-      <p:sp>
-        <p:nvSpPr>
-          <p:cNvPr id="18" name="Text 16"/>
-          <p:cNvSpPr/>
-          <p:nvPr/>
-        </p:nvSpPr>
-        <p:spPr>
-          <a:xfrm>
-            <a:off x="8412480" y="5120640"/>
-            <a:ext cx="2788920" cy="228600"/>
-          </a:xfrm>
-          <a:prstGeom prst="rect">
-            <a:avLst/>
-          </a:prstGeom>
-          <a:noFill/>
-          <a:ln/>
-        </p:spPr>
-        <p:txBody>
-          <a:bodyPr wrap="square" lIns="0" tIns="0" rIns="0" bIns="0" rtlCol="0" anchor="ctr">
-            <a:normAutofit/>
-          </a:bodyPr>
-          <a:lstStyle/>
-          <a:p>
-            <a:pPr indent="0" marL="0">
-              <a:buNone/>
-            </a:pPr>
-            <a:r>
-              <a:rPr lang="en-US" sz="1150" dirty="0">
-                <a:solidFill>
-                  <a:srgbClr val="6B7280"/>
-                </a:solidFill>
-              </a:rPr>
-              <a:t>관리형 MySQL</a:t>
-            </a:r>
-            <a:endParaRPr lang="en-US" sz="1150" dirty="0"/>
-          </a:p>
-          <a:p>
-            <a:pPr indent="0" marL="0">
-              <a:buNone/>
-            </a:pPr>
-            <a:r>
-              <a:rPr lang="en-US" sz="1150" dirty="0">
-                <a:solidFill>
-                  <a:srgbClr val="6B7280"/>
-                </a:solidFill>
-              </a:rPr>
-              <a:t>API · Frontend · TLS</a:t>
-            </a:r>
-            <a:endParaRPr lang="en-US" sz="1150" dirty="0"/>
-          </a:p>
-          <a:p>
-            <a:pPr indent="0" marL="0">
-              <a:buNone/>
-            </a:pPr>
-            <a:r>
-              <a:rPr lang="en-US" sz="1150" dirty="0">
-                <a:solidFill>
-                  <a:srgbClr val="6B7280"/>
-                </a:solidFill>
-              </a:rPr>
-              <a:t>Secret · Toss 도메인</a:t>
-            </a:r>
-            <a:endParaRPr lang="en-US" sz="1150" dirty="0"/>
+            <a:off x="8915400" y="5221224"/>
+            <a:ext cx="2103120" cy="347472"/>
+          </a:xfrm>
+          <a:prstGeom prst="rect">
+            <a:avLst/>
+          </a:prstGeom>
+          <a:noFill/>
+          <a:ln/>
+        </p:spPr>
+        <p:txBody>
+          <a:bodyPr wrap="square" lIns="0" tIns="0" rIns="0" bIns="0" rtlCol="0" anchor="ctr"/>
+          <a:lstStyle/>
+          <a:p>
+            <a:pPr algn="r" indent="0" marL="0">
+              <a:buNone/>
+            </a:pPr>
+            <a:r>
+              <a:rPr lang="en-US" sz="1500" b="1" dirty="0">
+                <a:solidFill>
+                  <a:srgbClr val="00A86B"/>
+                </a:solidFill>
+              </a:rPr>
+              <a:t>VERIFIED</a:t>
+            </a:r>
+            <a:endParaRPr lang="en-US" sz="1500" dirty="0"/>
           </a:p>
         </p:txBody>
       </p:sp>
@@ -3609,7 +3534,7 @@
                   <a:srgbClr val="FF5A5F"/>
                 </a:solidFill>
               </a:rPr>
-              <a:t>ROADMAP</a:t>
+              <a:t>DEPLOYMENT</a:t>
             </a:r>
             <a:endParaRPr lang="en-US" sz="1000" dirty="0"/>
           </a:p>
@@ -3624,7 +3549,7 @@
         <p:spPr>
           <a:xfrm>
             <a:off x="640080" y="1371600"/>
-            <a:ext cx="7040880" cy="1417320"/>
+            <a:ext cx="7315200" cy="1417320"/>
           </a:xfrm>
           <a:prstGeom prst="rect">
             <a:avLst/>
@@ -3647,7 +3572,7 @@
                   <a:srgbClr val="222222"/>
                 </a:solidFill>
               </a:rPr>
-              <a:t>다음 목표는 기능 추가보다</a:t>
+              <a:t>준비 완료와 배포 완료는</a:t>
             </a:r>
             <a:endParaRPr lang="en-US" sz="3700" dirty="0"/>
           </a:p>
@@ -3661,7 +3586,7 @@
                   <a:srgbClr val="222222"/>
                 </a:solidFill>
               </a:rPr>
-              <a:t>실제 운영의 완성입니다.</a:t>
+              <a:t>같은 말이 아닙니다.</a:t>
             </a:r>
             <a:endParaRPr lang="en-US" sz="3700" dirty="0"/>
           </a:p>
@@ -3675,80 +3600,8 @@
         </p:nvSpPr>
         <p:spPr>
           <a:xfrm>
-            <a:off x="685800" y="3291840"/>
-            <a:ext cx="457200" cy="274320"/>
-          </a:xfrm>
-          <a:prstGeom prst="rect">
-            <a:avLst/>
-          </a:prstGeom>
-          <a:noFill/>
-          <a:ln/>
-        </p:spPr>
-        <p:txBody>
-          <a:bodyPr wrap="square" lIns="0" tIns="0" rIns="0" bIns="0" rtlCol="0" anchor="ctr"/>
-          <a:lstStyle/>
-          <a:p>
-            <a:pPr indent="0" marL="0">
-              <a:buNone/>
-            </a:pPr>
-            <a:r>
-              <a:rPr lang="en-US" sz="1100" b="1" dirty="0">
-                <a:solidFill>
-                  <a:srgbClr val="FF5A5F"/>
-                </a:solidFill>
-              </a:rPr>
-              <a:t>01</a:t>
-            </a:r>
-            <a:endParaRPr lang="en-US" sz="1100" dirty="0"/>
-          </a:p>
-        </p:txBody>
-      </p:sp>
-      <p:sp>
-        <p:nvSpPr>
-          <p:cNvPr id="7" name="Text 5"/>
-          <p:cNvSpPr/>
-          <p:nvPr/>
-        </p:nvSpPr>
-        <p:spPr>
-          <a:xfrm>
-            <a:off x="685800" y="3794760"/>
-            <a:ext cx="2331720" cy="411480"/>
-          </a:xfrm>
-          <a:prstGeom prst="rect">
-            <a:avLst/>
-          </a:prstGeom>
-          <a:noFill/>
-          <a:ln/>
-        </p:spPr>
-        <p:txBody>
-          <a:bodyPr wrap="square" lIns="0" tIns="0" rIns="0" bIns="0" rtlCol="0" anchor="ctr"/>
-          <a:lstStyle/>
-          <a:p>
-            <a:pPr indent="0" marL="0">
-              <a:buNone/>
-            </a:pPr>
-            <a:r>
-              <a:rPr lang="en-US" sz="1800" b="1" dirty="0">
-                <a:solidFill>
-                  <a:srgbClr val="222222"/>
-                </a:solidFill>
-              </a:rPr>
-              <a:t>PUBLIC</a:t>
-            </a:r>
-            <a:endParaRPr lang="en-US" sz="1800" dirty="0"/>
-          </a:p>
-        </p:txBody>
-      </p:sp>
-      <p:sp>
-        <p:nvSpPr>
-          <p:cNvPr id="8" name="Text 6"/>
-          <p:cNvSpPr/>
-          <p:nvPr/>
-        </p:nvSpPr>
-        <p:spPr>
-          <a:xfrm>
-            <a:off x="685800" y="4434840"/>
-            <a:ext cx="2331720" cy="685800"/>
+            <a:off x="667512" y="2788920"/>
+            <a:ext cx="6858000" cy="731520"/>
           </a:xfrm>
           <a:prstGeom prst="rect">
             <a:avLst/>
@@ -3766,16 +3619,68 @@
               <a:buNone/>
             </a:pPr>
             <a:r>
-              <a:rPr lang="en-US" sz="1150" dirty="0">
+              <a:rPr lang="en-US" sz="1500" dirty="0">
                 <a:solidFill>
                   <a:srgbClr val="6B7280"/>
                 </a:solidFill>
               </a:rPr>
-              <a:t>공개 배포와 결제 E2E</a:t>
-            </a:r>
-            <a:endParaRPr lang="en-US" sz="1150" dirty="0"/>
-          </a:p>
-        </p:txBody>
+              <a:t>현재 코드는 배포 가능한 상태지만 공개 URL과 운영 인프라는 아직 연결되지 않았습니다.</a:t>
+            </a:r>
+            <a:endParaRPr lang="en-US" sz="1500" dirty="0"/>
+          </a:p>
+        </p:txBody>
+      </p:sp>
+      <p:sp>
+        <p:nvSpPr>
+          <p:cNvPr id="7" name="Shape 5"/>
+          <p:cNvSpPr/>
+          <p:nvPr/>
+        </p:nvSpPr>
+        <p:spPr>
+          <a:xfrm>
+            <a:off x="685800" y="3794760"/>
+            <a:ext cx="3337560" cy="1828800"/>
+          </a:xfrm>
+          <a:prstGeom prst="roundRect">
+            <a:avLst>
+              <a:gd name="adj" fmla="val 4000"/>
+            </a:avLst>
+          </a:prstGeom>
+          <a:solidFill>
+            <a:srgbClr val="FFFFFF"/>
+          </a:solidFill>
+          <a:ln w="12700">
+            <a:solidFill>
+              <a:srgbClr val="E8E8E8"/>
+            </a:solidFill>
+            <a:prstDash val="solid"/>
+          </a:ln>
+        </p:spPr>
+      </p:sp>
+      <p:sp>
+        <p:nvSpPr>
+          <p:cNvPr id="8" name="Shape 6"/>
+          <p:cNvSpPr/>
+          <p:nvPr/>
+        </p:nvSpPr>
+        <p:spPr>
+          <a:xfrm>
+            <a:off x="960120" y="4069080"/>
+            <a:ext cx="228600" cy="228600"/>
+          </a:xfrm>
+          <a:prstGeom prst="ellipse">
+            <a:avLst/>
+          </a:prstGeom>
+          <a:solidFill>
+            <a:srgbClr val="00A86B"/>
+          </a:solidFill>
+          <a:ln w="12700">
+            <a:solidFill>
+              <a:srgbClr val="00A86B"/>
+            </a:solidFill>
+            <a:prstDash val="solid"/>
+          </a:ln>
+        </p:spPr>
       </p:sp>
       <p:sp>
         <p:nvSpPr>
@@ -3785,80 +3690,8 @@
         </p:nvSpPr>
         <p:spPr>
           <a:xfrm>
-            <a:off x="3502152" y="3291840"/>
-            <a:ext cx="457200" cy="274320"/>
-          </a:xfrm>
-          <a:prstGeom prst="rect">
-            <a:avLst/>
-          </a:prstGeom>
-          <a:noFill/>
-          <a:ln/>
-        </p:spPr>
-        <p:txBody>
-          <a:bodyPr wrap="square" lIns="0" tIns="0" rIns="0" bIns="0" rtlCol="0" anchor="ctr"/>
-          <a:lstStyle/>
-          <a:p>
-            <a:pPr indent="0" marL="0">
-              <a:buNone/>
-            </a:pPr>
-            <a:r>
-              <a:rPr lang="en-US" sz="1100" b="1" dirty="0">
-                <a:solidFill>
-                  <a:srgbClr val="FF5A5F"/>
-                </a:solidFill>
-              </a:rPr>
-              <a:t>02</a:t>
-            </a:r>
-            <a:endParaRPr lang="en-US" sz="1100" dirty="0"/>
-          </a:p>
-        </p:txBody>
-      </p:sp>
-      <p:sp>
-        <p:nvSpPr>
-          <p:cNvPr id="10" name="Text 8"/>
-          <p:cNvSpPr/>
-          <p:nvPr/>
-        </p:nvSpPr>
-        <p:spPr>
-          <a:xfrm>
-            <a:off x="3502152" y="3794760"/>
-            <a:ext cx="2331720" cy="411480"/>
-          </a:xfrm>
-          <a:prstGeom prst="rect">
-            <a:avLst/>
-          </a:prstGeom>
-          <a:noFill/>
-          <a:ln/>
-        </p:spPr>
-        <p:txBody>
-          <a:bodyPr wrap="square" lIns="0" tIns="0" rIns="0" bIns="0" rtlCol="0" anchor="ctr"/>
-          <a:lstStyle/>
-          <a:p>
-            <a:pPr indent="0" marL="0">
-              <a:buNone/>
-            </a:pPr>
-            <a:r>
-              <a:rPr lang="en-US" sz="1800" b="1" dirty="0">
-                <a:solidFill>
-                  <a:srgbClr val="222222"/>
-                </a:solidFill>
-              </a:rPr>
-              <a:t>RELIABLE</a:t>
-            </a:r>
-            <a:endParaRPr lang="en-US" sz="1800" dirty="0"/>
-          </a:p>
-        </p:txBody>
-      </p:sp>
-      <p:sp>
-        <p:nvSpPr>
-          <p:cNvPr id="11" name="Text 9"/>
-          <p:cNvSpPr/>
-          <p:nvPr/>
-        </p:nvSpPr>
-        <p:spPr>
-          <a:xfrm>
-            <a:off x="3502152" y="4434840"/>
-            <a:ext cx="2331720" cy="685800"/>
+            <a:off x="960120" y="4544568"/>
+            <a:ext cx="2788920" cy="411480"/>
           </a:xfrm>
           <a:prstGeom prst="rect">
             <a:avLst/>
@@ -3876,99 +3709,27 @@
               <a:buNone/>
             </a:pPr>
             <a:r>
-              <a:rPr lang="en-US" sz="1150" dirty="0">
-                <a:solidFill>
-                  <a:srgbClr val="6B7280"/>
-                </a:solidFill>
-              </a:rPr>
-              <a:t>CI/CD, 백업, 알림 재시도</a:t>
-            </a:r>
-            <a:endParaRPr lang="en-US" sz="1150" dirty="0"/>
-          </a:p>
-        </p:txBody>
-      </p:sp>
-      <p:sp>
-        <p:nvSpPr>
-          <p:cNvPr id="12" name="Text 10"/>
-          <p:cNvSpPr/>
-          <p:nvPr/>
-        </p:nvSpPr>
-        <p:spPr>
-          <a:xfrm>
-            <a:off x="6318504" y="3291840"/>
-            <a:ext cx="457200" cy="274320"/>
-          </a:xfrm>
-          <a:prstGeom prst="rect">
-            <a:avLst/>
-          </a:prstGeom>
-          <a:noFill/>
-          <a:ln/>
-        </p:spPr>
-        <p:txBody>
-          <a:bodyPr wrap="square" lIns="0" tIns="0" rIns="0" bIns="0" rtlCol="0" anchor="ctr"/>
-          <a:lstStyle/>
-          <a:p>
-            <a:pPr indent="0" marL="0">
-              <a:buNone/>
-            </a:pPr>
-            <a:r>
-              <a:rPr lang="en-US" sz="1100" b="1" dirty="0">
-                <a:solidFill>
-                  <a:srgbClr val="FF5A5F"/>
-                </a:solidFill>
-              </a:rPr>
-              <a:t>03</a:t>
-            </a:r>
-            <a:endParaRPr lang="en-US" sz="1100" dirty="0"/>
-          </a:p>
-        </p:txBody>
-      </p:sp>
-      <p:sp>
-        <p:nvSpPr>
-          <p:cNvPr id="13" name="Text 11"/>
-          <p:cNvSpPr/>
-          <p:nvPr/>
-        </p:nvSpPr>
-        <p:spPr>
-          <a:xfrm>
-            <a:off x="6318504" y="3794760"/>
-            <a:ext cx="2331720" cy="411480"/>
-          </a:xfrm>
-          <a:prstGeom prst="rect">
-            <a:avLst/>
-          </a:prstGeom>
-          <a:noFill/>
-          <a:ln/>
-        </p:spPr>
-        <p:txBody>
-          <a:bodyPr wrap="square" lIns="0" tIns="0" rIns="0" bIns="0" rtlCol="0" anchor="ctr"/>
-          <a:lstStyle/>
-          <a:p>
-            <a:pPr indent="0" marL="0">
-              <a:buNone/>
-            </a:pPr>
-            <a:r>
-              <a:rPr lang="en-US" sz="1800" b="1" dirty="0">
+              <a:rPr lang="en-US" sz="1700" b="1" dirty="0">
                 <a:solidFill>
                   <a:srgbClr val="222222"/>
                 </a:solidFill>
               </a:rPr>
-              <a:t>PERSONAL</a:t>
-            </a:r>
-            <a:endParaRPr lang="en-US" sz="1800" dirty="0"/>
-          </a:p>
-        </p:txBody>
-      </p:sp>
-      <p:sp>
-        <p:nvSpPr>
-          <p:cNvPr id="14" name="Text 12"/>
-          <p:cNvSpPr/>
-          <p:nvPr/>
-        </p:nvSpPr>
-        <p:spPr>
-          <a:xfrm>
-            <a:off x="6318504" y="4434840"/>
-            <a:ext cx="2331720" cy="685800"/>
+              <a:t>준비됨</a:t>
+            </a:r>
+            <a:endParaRPr lang="en-US" sz="1700" dirty="0"/>
+          </a:p>
+        </p:txBody>
+      </p:sp>
+      <p:sp>
+        <p:nvSpPr>
+          <p:cNvPr id="10" name="Text 8"/>
+          <p:cNvSpPr/>
+          <p:nvPr/>
+        </p:nvSpPr>
+        <p:spPr>
+          <a:xfrm>
+            <a:off x="960120" y="5120640"/>
+            <a:ext cx="2788920" cy="228600"/>
           </a:xfrm>
           <a:prstGeom prst="rect">
             <a:avLst/>
@@ -3991,94 +3752,102 @@
                   <a:srgbClr val="6B7280"/>
                 </a:solidFill>
               </a:rPr>
-              <a:t>추천, 퀴즈, 수료증</a:t>
+              <a:t>Dockerfile · Compose</a:t>
             </a:r>
             <a:endParaRPr lang="en-US" sz="1150" dirty="0"/>
           </a:p>
-        </p:txBody>
-      </p:sp>
-      <p:sp>
-        <p:nvSpPr>
-          <p:cNvPr id="15" name="Text 13"/>
-          <p:cNvSpPr/>
-          <p:nvPr/>
-        </p:nvSpPr>
-        <p:spPr>
-          <a:xfrm>
-            <a:off x="9134856" y="3291840"/>
-            <a:ext cx="457200" cy="274320"/>
-          </a:xfrm>
-          <a:prstGeom prst="rect">
-            <a:avLst/>
-          </a:prstGeom>
-          <a:noFill/>
-          <a:ln/>
-        </p:spPr>
-        <p:txBody>
-          <a:bodyPr wrap="square" lIns="0" tIns="0" rIns="0" bIns="0" rtlCol="0" anchor="ctr"/>
-          <a:lstStyle/>
-          <a:p>
-            <a:pPr indent="0" marL="0">
-              <a:buNone/>
-            </a:pPr>
-            <a:r>
-              <a:rPr lang="en-US" sz="1100" b="1" dirty="0">
-                <a:solidFill>
-                  <a:srgbClr val="FF5A5F"/>
-                </a:solidFill>
-              </a:rPr>
-              <a:t>04</a:t>
-            </a:r>
-            <a:endParaRPr lang="en-US" sz="1100" dirty="0"/>
-          </a:p>
-        </p:txBody>
-      </p:sp>
-      <p:sp>
-        <p:nvSpPr>
-          <p:cNvPr id="16" name="Text 14"/>
-          <p:cNvSpPr/>
-          <p:nvPr/>
-        </p:nvSpPr>
-        <p:spPr>
-          <a:xfrm>
-            <a:off x="9134856" y="3794760"/>
-            <a:ext cx="2331720" cy="411480"/>
-          </a:xfrm>
-          <a:prstGeom prst="rect">
-            <a:avLst/>
-          </a:prstGeom>
-          <a:noFill/>
-          <a:ln/>
-        </p:spPr>
-        <p:txBody>
-          <a:bodyPr wrap="square" lIns="0" tIns="0" rIns="0" bIns="0" rtlCol="0" anchor="ctr"/>
-          <a:lstStyle/>
-          <a:p>
-            <a:pPr indent="0" marL="0">
-              <a:buNone/>
-            </a:pPr>
-            <a:r>
-              <a:rPr lang="en-US" sz="1800" b="1" dirty="0">
-                <a:solidFill>
-                  <a:srgbClr val="222222"/>
-                </a:solidFill>
-              </a:rPr>
-              <a:t>SCALE</a:t>
-            </a:r>
-            <a:endParaRPr lang="en-US" sz="1800" dirty="0"/>
-          </a:p>
-        </p:txBody>
-      </p:sp>
-      <p:sp>
-        <p:nvSpPr>
-          <p:cNvPr id="17" name="Text 15"/>
-          <p:cNvSpPr/>
-          <p:nvPr/>
-        </p:nvSpPr>
-        <p:spPr>
-          <a:xfrm>
-            <a:off x="9134856" y="4434840"/>
-            <a:ext cx="2331720" cy="685800"/>
+          <a:p>
+            <a:pPr indent="0" marL="0">
+              <a:buNone/>
+            </a:pPr>
+            <a:r>
+              <a:rPr lang="en-US" sz="1150" dirty="0">
+                <a:solidFill>
+                  <a:srgbClr val="6B7280"/>
+                </a:solidFill>
+              </a:rPr>
+              <a:t>환경변수 예제 · Runbook</a:t>
+            </a:r>
+            <a:endParaRPr lang="en-US" sz="1150" dirty="0"/>
+          </a:p>
+          <a:p>
+            <a:pPr indent="0" marL="0">
+              <a:buNone/>
+            </a:pPr>
+            <a:r>
+              <a:rPr lang="en-US" sz="1150" dirty="0">
+                <a:solidFill>
+                  <a:srgbClr val="6B7280"/>
+                </a:solidFill>
+              </a:rPr>
+              <a:t>Health · Metrics</a:t>
+            </a:r>
+            <a:endParaRPr lang="en-US" sz="1150" dirty="0"/>
+          </a:p>
+        </p:txBody>
+      </p:sp>
+      <p:sp>
+        <p:nvSpPr>
+          <p:cNvPr id="11" name="Shape 9"/>
+          <p:cNvSpPr/>
+          <p:nvPr/>
+        </p:nvSpPr>
+        <p:spPr>
+          <a:xfrm>
+            <a:off x="4407408" y="3794760"/>
+            <a:ext cx="3337560" cy="1828800"/>
+          </a:xfrm>
+          <a:prstGeom prst="roundRect">
+            <a:avLst>
+              <a:gd name="adj" fmla="val 4000"/>
+            </a:avLst>
+          </a:prstGeom>
+          <a:solidFill>
+            <a:srgbClr val="FFFFFF"/>
+          </a:solidFill>
+          <a:ln w="12700">
+            <a:solidFill>
+              <a:srgbClr val="E8E8E8"/>
+            </a:solidFill>
+            <a:prstDash val="solid"/>
+          </a:ln>
+        </p:spPr>
+      </p:sp>
+      <p:sp>
+        <p:nvSpPr>
+          <p:cNvPr id="12" name="Shape 10"/>
+          <p:cNvSpPr/>
+          <p:nvPr/>
+        </p:nvSpPr>
+        <p:spPr>
+          <a:xfrm>
+            <a:off x="4681728" y="4069080"/>
+            <a:ext cx="228600" cy="228600"/>
+          </a:xfrm>
+          <a:prstGeom prst="ellipse">
+            <a:avLst/>
+          </a:prstGeom>
+          <a:solidFill>
+            <a:srgbClr val="FF5A5F"/>
+          </a:solidFill>
+          <a:ln w="12700">
+            <a:solidFill>
+              <a:srgbClr val="FF5A5F"/>
+            </a:solidFill>
+            <a:prstDash val="solid"/>
+          </a:ln>
+        </p:spPr>
+      </p:sp>
+      <p:sp>
+        <p:nvSpPr>
+          <p:cNvPr id="13" name="Text 11"/>
+          <p:cNvSpPr/>
+          <p:nvPr/>
+        </p:nvSpPr>
+        <p:spPr>
+          <a:xfrm>
+            <a:off x="4681728" y="4544568"/>
+            <a:ext cx="2788920" cy="411480"/>
           </a:xfrm>
           <a:prstGeom prst="rect">
             <a:avLst/>
@@ -4096,12 +3865,234 @@
               <a:buNone/>
             </a:pPr>
             <a:r>
+              <a:rPr lang="en-US" sz="1700" b="1" dirty="0">
+                <a:solidFill>
+                  <a:srgbClr val="222222"/>
+                </a:solidFill>
+              </a:rPr>
+              <a:t>현재</a:t>
+            </a:r>
+            <a:endParaRPr lang="en-US" sz="1700" dirty="0"/>
+          </a:p>
+        </p:txBody>
+      </p:sp>
+      <p:sp>
+        <p:nvSpPr>
+          <p:cNvPr id="14" name="Text 12"/>
+          <p:cNvSpPr/>
+          <p:nvPr/>
+        </p:nvSpPr>
+        <p:spPr>
+          <a:xfrm>
+            <a:off x="4681728" y="5120640"/>
+            <a:ext cx="2788920" cy="228600"/>
+          </a:xfrm>
+          <a:prstGeom prst="rect">
+            <a:avLst/>
+          </a:prstGeom>
+          <a:noFill/>
+          <a:ln/>
+        </p:spPr>
+        <p:txBody>
+          <a:bodyPr wrap="square" lIns="0" tIns="0" rIns="0" bIns="0" rtlCol="0" anchor="ctr">
+            <a:normAutofit/>
+          </a:bodyPr>
+          <a:lstStyle/>
+          <a:p>
+            <a:pPr indent="0" marL="0">
+              <a:buNone/>
+            </a:pPr>
+            <a:r>
               <a:rPr lang="en-US" sz="1150" dirty="0">
                 <a:solidFill>
                   <a:srgbClr val="6B7280"/>
                 </a:solidFill>
               </a:rPr>
-              <a:t>쿠폰, 부분환불, 정산 고도화</a:t>
+              <a:t>공개 URL 없음</a:t>
+            </a:r>
+            <a:endParaRPr lang="en-US" sz="1150" dirty="0"/>
+          </a:p>
+          <a:p>
+            <a:pPr indent="0" marL="0">
+              <a:buNone/>
+            </a:pPr>
+            <a:r>
+              <a:rPr lang="en-US" sz="1150" dirty="0">
+                <a:solidFill>
+                  <a:srgbClr val="6B7280"/>
+                </a:solidFill>
+              </a:rPr>
+              <a:t>운영 DB 없음</a:t>
+            </a:r>
+            <a:endParaRPr lang="en-US" sz="1150" dirty="0"/>
+          </a:p>
+          <a:p>
+            <a:pPr indent="0" marL="0">
+              <a:buNone/>
+            </a:pPr>
+            <a:r>
+              <a:rPr lang="en-US" sz="1150" dirty="0">
+                <a:solidFill>
+                  <a:srgbClr val="6B7280"/>
+                </a:solidFill>
+              </a:rPr>
+              <a:t>실결제 운영 키 미연결</a:t>
+            </a:r>
+            <a:endParaRPr lang="en-US" sz="1150" dirty="0"/>
+          </a:p>
+        </p:txBody>
+      </p:sp>
+      <p:sp>
+        <p:nvSpPr>
+          <p:cNvPr id="15" name="Shape 13"/>
+          <p:cNvSpPr/>
+          <p:nvPr/>
+        </p:nvSpPr>
+        <p:spPr>
+          <a:xfrm>
+            <a:off x="8138160" y="3794760"/>
+            <a:ext cx="3337560" cy="1828800"/>
+          </a:xfrm>
+          <a:prstGeom prst="roundRect">
+            <a:avLst>
+              <a:gd name="adj" fmla="val 4000"/>
+            </a:avLst>
+          </a:prstGeom>
+          <a:solidFill>
+            <a:srgbClr val="FFFFFF"/>
+          </a:solidFill>
+          <a:ln w="12700">
+            <a:solidFill>
+              <a:srgbClr val="E8E8E8"/>
+            </a:solidFill>
+            <a:prstDash val="solid"/>
+          </a:ln>
+        </p:spPr>
+      </p:sp>
+      <p:sp>
+        <p:nvSpPr>
+          <p:cNvPr id="16" name="Shape 14"/>
+          <p:cNvSpPr/>
+          <p:nvPr/>
+        </p:nvSpPr>
+        <p:spPr>
+          <a:xfrm>
+            <a:off x="8412480" y="4069080"/>
+            <a:ext cx="228600" cy="228600"/>
+          </a:xfrm>
+          <a:prstGeom prst="ellipse">
+            <a:avLst/>
+          </a:prstGeom>
+          <a:solidFill>
+            <a:srgbClr val="4568DC"/>
+          </a:solidFill>
+          <a:ln w="12700">
+            <a:solidFill>
+              <a:srgbClr val="4568DC"/>
+            </a:solidFill>
+            <a:prstDash val="solid"/>
+          </a:ln>
+        </p:spPr>
+      </p:sp>
+      <p:sp>
+        <p:nvSpPr>
+          <p:cNvPr id="17" name="Text 15"/>
+          <p:cNvSpPr/>
+          <p:nvPr/>
+        </p:nvSpPr>
+        <p:spPr>
+          <a:xfrm>
+            <a:off x="8412480" y="4544568"/>
+            <a:ext cx="2788920" cy="411480"/>
+          </a:xfrm>
+          <a:prstGeom prst="rect">
+            <a:avLst/>
+          </a:prstGeom>
+          <a:noFill/>
+          <a:ln/>
+        </p:spPr>
+        <p:txBody>
+          <a:bodyPr wrap="square" lIns="0" tIns="0" rIns="0" bIns="0" rtlCol="0" anchor="ctr">
+            <a:normAutofit/>
+          </a:bodyPr>
+          <a:lstStyle/>
+          <a:p>
+            <a:pPr indent="0" marL="0">
+              <a:buNone/>
+            </a:pPr>
+            <a:r>
+              <a:rPr lang="en-US" sz="1700" b="1" dirty="0">
+                <a:solidFill>
+                  <a:srgbClr val="222222"/>
+                </a:solidFill>
+              </a:rPr>
+              <a:t>배포 순서</a:t>
+            </a:r>
+            <a:endParaRPr lang="en-US" sz="1700" dirty="0"/>
+          </a:p>
+        </p:txBody>
+      </p:sp>
+      <p:sp>
+        <p:nvSpPr>
+          <p:cNvPr id="18" name="Text 16"/>
+          <p:cNvSpPr/>
+          <p:nvPr/>
+        </p:nvSpPr>
+        <p:spPr>
+          <a:xfrm>
+            <a:off x="8412480" y="5120640"/>
+            <a:ext cx="2788920" cy="228600"/>
+          </a:xfrm>
+          <a:prstGeom prst="rect">
+            <a:avLst/>
+          </a:prstGeom>
+          <a:noFill/>
+          <a:ln/>
+        </p:spPr>
+        <p:txBody>
+          <a:bodyPr wrap="square" lIns="0" tIns="0" rIns="0" bIns="0" rtlCol="0" anchor="ctr">
+            <a:normAutofit/>
+          </a:bodyPr>
+          <a:lstStyle/>
+          <a:p>
+            <a:pPr indent="0" marL="0">
+              <a:buNone/>
+            </a:pPr>
+            <a:r>
+              <a:rPr lang="en-US" sz="1150" dirty="0">
+                <a:solidFill>
+                  <a:srgbClr val="6B7280"/>
+                </a:solidFill>
+              </a:rPr>
+              <a:t>관리형 MySQL</a:t>
+            </a:r>
+            <a:endParaRPr lang="en-US" sz="1150" dirty="0"/>
+          </a:p>
+          <a:p>
+            <a:pPr indent="0" marL="0">
+              <a:buNone/>
+            </a:pPr>
+            <a:r>
+              <a:rPr lang="en-US" sz="1150" dirty="0">
+                <a:solidFill>
+                  <a:srgbClr val="6B7280"/>
+                </a:solidFill>
+              </a:rPr>
+              <a:t>API · Frontend · TLS</a:t>
+            </a:r>
+            <a:endParaRPr lang="en-US" sz="1150" dirty="0"/>
+          </a:p>
+          <a:p>
+            <a:pPr indent="0" marL="0">
+              <a:buNone/>
+            </a:pPr>
+            <a:r>
+              <a:rPr lang="en-US" sz="1150" dirty="0">
+                <a:solidFill>
+                  <a:srgbClr val="6B7280"/>
+                </a:solidFill>
+              </a:rPr>
+              <a:t>Secret · Toss 도메인</a:t>
             </a:r>
             <a:endParaRPr lang="en-US" sz="1150" dirty="0"/>
           </a:p>
@@ -4118,6 +4109,638 @@
 <file path=ppt/slides/slide13.xml><?xml version="1.0" encoding="utf-8"?>
 <p:sld xmlns:a="http://schemas.openxmlformats.org/drawingml/2006/main" xmlns:r="http://schemas.openxmlformats.org/officeDocument/2006/relationships" xmlns:p="http://schemas.openxmlformats.org/presentationml/2006/main">
   <p:cSld name="Slide 13">
+    <p:bg>
+      <p:bgPr>
+        <a:solidFill>
+          <a:srgbClr val="FFFFFF"/>
+        </a:solidFill>
+      </p:bgPr>
+    </p:bg>
+    <p:spTree>
+      <p:nvGrpSpPr>
+        <p:cNvPr id="1" name=""/>
+        <p:cNvGrpSpPr/>
+        <p:nvPr/>
+      </p:nvGrpSpPr>
+      <p:grpSpPr>
+        <a:xfrm>
+          <a:off x="0" y="0"/>
+          <a:ext cx="0" cy="0"/>
+          <a:chOff x="0" y="0"/>
+          <a:chExt cx="0" cy="0"/>
+        </a:xfrm>
+      </p:grpSpPr>
+      <p:sp>
+        <p:nvSpPr>
+          <p:cNvPr id="2" name="Text 0"/>
+          <p:cNvSpPr/>
+          <p:nvPr/>
+        </p:nvSpPr>
+        <p:spPr>
+          <a:xfrm>
+            <a:off x="530352" y="347472"/>
+            <a:ext cx="1920240" cy="219456"/>
+          </a:xfrm>
+          <a:prstGeom prst="rect">
+            <a:avLst/>
+          </a:prstGeom>
+          <a:noFill/>
+          <a:ln/>
+        </p:spPr>
+        <p:txBody>
+          <a:bodyPr wrap="square" lIns="0" tIns="0" rIns="0" bIns="0" rtlCol="0" anchor="ctr"/>
+          <a:lstStyle/>
+          <a:p>
+            <a:pPr indent="0" marL="0">
+              <a:buNone/>
+            </a:pPr>
+            <a:r>
+              <a:rPr lang="en-US" sz="1000" b="1" spc="220" kern="0" dirty="0">
+                <a:solidFill>
+                  <a:srgbClr val="FF5A5F"/>
+                </a:solidFill>
+              </a:rPr>
+              <a:t>DEVFOCUS</a:t>
+            </a:r>
+            <a:endParaRPr lang="en-US" sz="1000" dirty="0"/>
+          </a:p>
+        </p:txBody>
+      </p:sp>
+      <p:sp>
+        <p:nvSpPr>
+          <p:cNvPr id="3" name="Text 1"/>
+          <p:cNvSpPr/>
+          <p:nvPr/>
+        </p:nvSpPr>
+        <p:spPr>
+          <a:xfrm>
+            <a:off x="11155680" y="347472"/>
+            <a:ext cx="502920" cy="219456"/>
+          </a:xfrm>
+          <a:prstGeom prst="rect">
+            <a:avLst/>
+          </a:prstGeom>
+          <a:noFill/>
+          <a:ln/>
+        </p:spPr>
+        <p:txBody>
+          <a:bodyPr wrap="square" lIns="0" tIns="0" rIns="0" bIns="0" rtlCol="0" anchor="ctr"/>
+          <a:lstStyle/>
+          <a:p>
+            <a:pPr algn="r" indent="0" marL="0">
+              <a:buNone/>
+            </a:pPr>
+            <a:r>
+              <a:rPr lang="en-US" sz="900" dirty="0">
+                <a:solidFill>
+                  <a:srgbClr val="6B7280"/>
+                </a:solidFill>
+              </a:rPr>
+              <a:t>13</a:t>
+            </a:r>
+            <a:endParaRPr lang="en-US" sz="900" dirty="0"/>
+          </a:p>
+        </p:txBody>
+      </p:sp>
+      <p:sp>
+        <p:nvSpPr>
+          <p:cNvPr id="4" name="Text 2"/>
+          <p:cNvSpPr/>
+          <p:nvPr/>
+        </p:nvSpPr>
+        <p:spPr>
+          <a:xfrm>
+            <a:off x="658368" y="960120"/>
+            <a:ext cx="3657600" cy="228600"/>
+          </a:xfrm>
+          <a:prstGeom prst="rect">
+            <a:avLst/>
+          </a:prstGeom>
+          <a:noFill/>
+          <a:ln/>
+        </p:spPr>
+        <p:txBody>
+          <a:bodyPr wrap="square" lIns="0" tIns="0" rIns="0" bIns="0" rtlCol="0" anchor="ctr"/>
+          <a:lstStyle/>
+          <a:p>
+            <a:pPr indent="0" marL="0">
+              <a:buNone/>
+            </a:pPr>
+            <a:r>
+              <a:rPr lang="en-US" sz="1000" b="1" spc="240" kern="0" dirty="0">
+                <a:solidFill>
+                  <a:srgbClr val="FF5A5F"/>
+                </a:solidFill>
+              </a:rPr>
+              <a:t>ROADMAP</a:t>
+            </a:r>
+            <a:endParaRPr lang="en-US" sz="1000" dirty="0"/>
+          </a:p>
+        </p:txBody>
+      </p:sp>
+      <p:sp>
+        <p:nvSpPr>
+          <p:cNvPr id="5" name="Text 3"/>
+          <p:cNvSpPr/>
+          <p:nvPr/>
+        </p:nvSpPr>
+        <p:spPr>
+          <a:xfrm>
+            <a:off x="640080" y="1371600"/>
+            <a:ext cx="7040880" cy="1417320"/>
+          </a:xfrm>
+          <a:prstGeom prst="rect">
+            <a:avLst/>
+          </a:prstGeom>
+          <a:noFill/>
+          <a:ln/>
+        </p:spPr>
+        <p:txBody>
+          <a:bodyPr wrap="square" lIns="0" tIns="0" rIns="0" bIns="0" rtlCol="0" anchor="ctr">
+            <a:normAutofit/>
+          </a:bodyPr>
+          <a:lstStyle/>
+          <a:p>
+            <a:pPr indent="0" marL="0">
+              <a:buNone/>
+            </a:pPr>
+            <a:r>
+              <a:rPr lang="en-US" sz="3700" b="1" dirty="0">
+                <a:solidFill>
+                  <a:srgbClr val="222222"/>
+                </a:solidFill>
+              </a:rPr>
+              <a:t>다음 목표는 기능 추가보다</a:t>
+            </a:r>
+            <a:endParaRPr lang="en-US" sz="3700" dirty="0"/>
+          </a:p>
+          <a:p>
+            <a:pPr indent="0" marL="0">
+              <a:buNone/>
+            </a:pPr>
+            <a:r>
+              <a:rPr lang="en-US" sz="3700" b="1" dirty="0">
+                <a:solidFill>
+                  <a:srgbClr val="222222"/>
+                </a:solidFill>
+              </a:rPr>
+              <a:t>실제 운영의 완성입니다.</a:t>
+            </a:r>
+            <a:endParaRPr lang="en-US" sz="3700" dirty="0"/>
+          </a:p>
+        </p:txBody>
+      </p:sp>
+      <p:sp>
+        <p:nvSpPr>
+          <p:cNvPr id="6" name="Text 4"/>
+          <p:cNvSpPr/>
+          <p:nvPr/>
+        </p:nvSpPr>
+        <p:spPr>
+          <a:xfrm>
+            <a:off x="685800" y="3291840"/>
+            <a:ext cx="457200" cy="274320"/>
+          </a:xfrm>
+          <a:prstGeom prst="rect">
+            <a:avLst/>
+          </a:prstGeom>
+          <a:noFill/>
+          <a:ln/>
+        </p:spPr>
+        <p:txBody>
+          <a:bodyPr wrap="square" lIns="0" tIns="0" rIns="0" bIns="0" rtlCol="0" anchor="ctr"/>
+          <a:lstStyle/>
+          <a:p>
+            <a:pPr indent="0" marL="0">
+              <a:buNone/>
+            </a:pPr>
+            <a:r>
+              <a:rPr lang="en-US" sz="1100" b="1" dirty="0">
+                <a:solidFill>
+                  <a:srgbClr val="FF5A5F"/>
+                </a:solidFill>
+              </a:rPr>
+              <a:t>01</a:t>
+            </a:r>
+            <a:endParaRPr lang="en-US" sz="1100" dirty="0"/>
+          </a:p>
+        </p:txBody>
+      </p:sp>
+      <p:sp>
+        <p:nvSpPr>
+          <p:cNvPr id="7" name="Text 5"/>
+          <p:cNvSpPr/>
+          <p:nvPr/>
+        </p:nvSpPr>
+        <p:spPr>
+          <a:xfrm>
+            <a:off x="685800" y="3794760"/>
+            <a:ext cx="2331720" cy="411480"/>
+          </a:xfrm>
+          <a:prstGeom prst="rect">
+            <a:avLst/>
+          </a:prstGeom>
+          <a:noFill/>
+          <a:ln/>
+        </p:spPr>
+        <p:txBody>
+          <a:bodyPr wrap="square" lIns="0" tIns="0" rIns="0" bIns="0" rtlCol="0" anchor="ctr"/>
+          <a:lstStyle/>
+          <a:p>
+            <a:pPr indent="0" marL="0">
+              <a:buNone/>
+            </a:pPr>
+            <a:r>
+              <a:rPr lang="en-US" sz="1800" b="1" dirty="0">
+                <a:solidFill>
+                  <a:srgbClr val="222222"/>
+                </a:solidFill>
+              </a:rPr>
+              <a:t>PUBLIC</a:t>
+            </a:r>
+            <a:endParaRPr lang="en-US" sz="1800" dirty="0"/>
+          </a:p>
+        </p:txBody>
+      </p:sp>
+      <p:sp>
+        <p:nvSpPr>
+          <p:cNvPr id="8" name="Text 6"/>
+          <p:cNvSpPr/>
+          <p:nvPr/>
+        </p:nvSpPr>
+        <p:spPr>
+          <a:xfrm>
+            <a:off x="685800" y="4434840"/>
+            <a:ext cx="2331720" cy="685800"/>
+          </a:xfrm>
+          <a:prstGeom prst="rect">
+            <a:avLst/>
+          </a:prstGeom>
+          <a:noFill/>
+          <a:ln/>
+        </p:spPr>
+        <p:txBody>
+          <a:bodyPr wrap="square" lIns="0" tIns="0" rIns="0" bIns="0" rtlCol="0" anchor="ctr">
+            <a:normAutofit/>
+          </a:bodyPr>
+          <a:lstStyle/>
+          <a:p>
+            <a:pPr indent="0" marL="0">
+              <a:buNone/>
+            </a:pPr>
+            <a:r>
+              <a:rPr lang="en-US" sz="1150" dirty="0">
+                <a:solidFill>
+                  <a:srgbClr val="6B7280"/>
+                </a:solidFill>
+              </a:rPr>
+              <a:t>공개 배포와 결제 E2E</a:t>
+            </a:r>
+            <a:endParaRPr lang="en-US" sz="1150" dirty="0"/>
+          </a:p>
+        </p:txBody>
+      </p:sp>
+      <p:sp>
+        <p:nvSpPr>
+          <p:cNvPr id="9" name="Text 7"/>
+          <p:cNvSpPr/>
+          <p:nvPr/>
+        </p:nvSpPr>
+        <p:spPr>
+          <a:xfrm>
+            <a:off x="3502152" y="3291840"/>
+            <a:ext cx="457200" cy="274320"/>
+          </a:xfrm>
+          <a:prstGeom prst="rect">
+            <a:avLst/>
+          </a:prstGeom>
+          <a:noFill/>
+          <a:ln/>
+        </p:spPr>
+        <p:txBody>
+          <a:bodyPr wrap="square" lIns="0" tIns="0" rIns="0" bIns="0" rtlCol="0" anchor="ctr"/>
+          <a:lstStyle/>
+          <a:p>
+            <a:pPr indent="0" marL="0">
+              <a:buNone/>
+            </a:pPr>
+            <a:r>
+              <a:rPr lang="en-US" sz="1100" b="1" dirty="0">
+                <a:solidFill>
+                  <a:srgbClr val="FF5A5F"/>
+                </a:solidFill>
+              </a:rPr>
+              <a:t>02</a:t>
+            </a:r>
+            <a:endParaRPr lang="en-US" sz="1100" dirty="0"/>
+          </a:p>
+        </p:txBody>
+      </p:sp>
+      <p:sp>
+        <p:nvSpPr>
+          <p:cNvPr id="10" name="Text 8"/>
+          <p:cNvSpPr/>
+          <p:nvPr/>
+        </p:nvSpPr>
+        <p:spPr>
+          <a:xfrm>
+            <a:off x="3502152" y="3794760"/>
+            <a:ext cx="2331720" cy="411480"/>
+          </a:xfrm>
+          <a:prstGeom prst="rect">
+            <a:avLst/>
+          </a:prstGeom>
+          <a:noFill/>
+          <a:ln/>
+        </p:spPr>
+        <p:txBody>
+          <a:bodyPr wrap="square" lIns="0" tIns="0" rIns="0" bIns="0" rtlCol="0" anchor="ctr"/>
+          <a:lstStyle/>
+          <a:p>
+            <a:pPr indent="0" marL="0">
+              <a:buNone/>
+            </a:pPr>
+            <a:r>
+              <a:rPr lang="en-US" sz="1800" b="1" dirty="0">
+                <a:solidFill>
+                  <a:srgbClr val="222222"/>
+                </a:solidFill>
+              </a:rPr>
+              <a:t>RELIABLE</a:t>
+            </a:r>
+            <a:endParaRPr lang="en-US" sz="1800" dirty="0"/>
+          </a:p>
+        </p:txBody>
+      </p:sp>
+      <p:sp>
+        <p:nvSpPr>
+          <p:cNvPr id="11" name="Text 9"/>
+          <p:cNvSpPr/>
+          <p:nvPr/>
+        </p:nvSpPr>
+        <p:spPr>
+          <a:xfrm>
+            <a:off x="3502152" y="4434840"/>
+            <a:ext cx="2331720" cy="685800"/>
+          </a:xfrm>
+          <a:prstGeom prst="rect">
+            <a:avLst/>
+          </a:prstGeom>
+          <a:noFill/>
+          <a:ln/>
+        </p:spPr>
+        <p:txBody>
+          <a:bodyPr wrap="square" lIns="0" tIns="0" rIns="0" bIns="0" rtlCol="0" anchor="ctr">
+            <a:normAutofit/>
+          </a:bodyPr>
+          <a:lstStyle/>
+          <a:p>
+            <a:pPr indent="0" marL="0">
+              <a:buNone/>
+            </a:pPr>
+            <a:r>
+              <a:rPr lang="en-US" sz="1150" dirty="0">
+                <a:solidFill>
+                  <a:srgbClr val="6B7280"/>
+                </a:solidFill>
+              </a:rPr>
+              <a:t>CI/CD, 백업, 알림 재시도</a:t>
+            </a:r>
+            <a:endParaRPr lang="en-US" sz="1150" dirty="0"/>
+          </a:p>
+        </p:txBody>
+      </p:sp>
+      <p:sp>
+        <p:nvSpPr>
+          <p:cNvPr id="12" name="Text 10"/>
+          <p:cNvSpPr/>
+          <p:nvPr/>
+        </p:nvSpPr>
+        <p:spPr>
+          <a:xfrm>
+            <a:off x="6318504" y="3291840"/>
+            <a:ext cx="457200" cy="274320"/>
+          </a:xfrm>
+          <a:prstGeom prst="rect">
+            <a:avLst/>
+          </a:prstGeom>
+          <a:noFill/>
+          <a:ln/>
+        </p:spPr>
+        <p:txBody>
+          <a:bodyPr wrap="square" lIns="0" tIns="0" rIns="0" bIns="0" rtlCol="0" anchor="ctr"/>
+          <a:lstStyle/>
+          <a:p>
+            <a:pPr indent="0" marL="0">
+              <a:buNone/>
+            </a:pPr>
+            <a:r>
+              <a:rPr lang="en-US" sz="1100" b="1" dirty="0">
+                <a:solidFill>
+                  <a:srgbClr val="FF5A5F"/>
+                </a:solidFill>
+              </a:rPr>
+              <a:t>03</a:t>
+            </a:r>
+            <a:endParaRPr lang="en-US" sz="1100" dirty="0"/>
+          </a:p>
+        </p:txBody>
+      </p:sp>
+      <p:sp>
+        <p:nvSpPr>
+          <p:cNvPr id="13" name="Text 11"/>
+          <p:cNvSpPr/>
+          <p:nvPr/>
+        </p:nvSpPr>
+        <p:spPr>
+          <a:xfrm>
+            <a:off x="6318504" y="3794760"/>
+            <a:ext cx="2331720" cy="411480"/>
+          </a:xfrm>
+          <a:prstGeom prst="rect">
+            <a:avLst/>
+          </a:prstGeom>
+          <a:noFill/>
+          <a:ln/>
+        </p:spPr>
+        <p:txBody>
+          <a:bodyPr wrap="square" lIns="0" tIns="0" rIns="0" bIns="0" rtlCol="0" anchor="ctr"/>
+          <a:lstStyle/>
+          <a:p>
+            <a:pPr indent="0" marL="0">
+              <a:buNone/>
+            </a:pPr>
+            <a:r>
+              <a:rPr lang="en-US" sz="1800" b="1" dirty="0">
+                <a:solidFill>
+                  <a:srgbClr val="222222"/>
+                </a:solidFill>
+              </a:rPr>
+              <a:t>PERSONAL</a:t>
+            </a:r>
+            <a:endParaRPr lang="en-US" sz="1800" dirty="0"/>
+          </a:p>
+        </p:txBody>
+      </p:sp>
+      <p:sp>
+        <p:nvSpPr>
+          <p:cNvPr id="14" name="Text 12"/>
+          <p:cNvSpPr/>
+          <p:nvPr/>
+        </p:nvSpPr>
+        <p:spPr>
+          <a:xfrm>
+            <a:off x="6318504" y="4434840"/>
+            <a:ext cx="2331720" cy="685800"/>
+          </a:xfrm>
+          <a:prstGeom prst="rect">
+            <a:avLst/>
+          </a:prstGeom>
+          <a:noFill/>
+          <a:ln/>
+        </p:spPr>
+        <p:txBody>
+          <a:bodyPr wrap="square" lIns="0" tIns="0" rIns="0" bIns="0" rtlCol="0" anchor="ctr">
+            <a:normAutofit/>
+          </a:bodyPr>
+          <a:lstStyle/>
+          <a:p>
+            <a:pPr indent="0" marL="0">
+              <a:buNone/>
+            </a:pPr>
+            <a:r>
+              <a:rPr lang="en-US" sz="1150" dirty="0">
+                <a:solidFill>
+                  <a:srgbClr val="6B7280"/>
+                </a:solidFill>
+              </a:rPr>
+              <a:t>추천, 퀴즈, 수료증</a:t>
+            </a:r>
+            <a:endParaRPr lang="en-US" sz="1150" dirty="0"/>
+          </a:p>
+        </p:txBody>
+      </p:sp>
+      <p:sp>
+        <p:nvSpPr>
+          <p:cNvPr id="15" name="Text 13"/>
+          <p:cNvSpPr/>
+          <p:nvPr/>
+        </p:nvSpPr>
+        <p:spPr>
+          <a:xfrm>
+            <a:off x="9134856" y="3291840"/>
+            <a:ext cx="457200" cy="274320"/>
+          </a:xfrm>
+          <a:prstGeom prst="rect">
+            <a:avLst/>
+          </a:prstGeom>
+          <a:noFill/>
+          <a:ln/>
+        </p:spPr>
+        <p:txBody>
+          <a:bodyPr wrap="square" lIns="0" tIns="0" rIns="0" bIns="0" rtlCol="0" anchor="ctr"/>
+          <a:lstStyle/>
+          <a:p>
+            <a:pPr indent="0" marL="0">
+              <a:buNone/>
+            </a:pPr>
+            <a:r>
+              <a:rPr lang="en-US" sz="1100" b="1" dirty="0">
+                <a:solidFill>
+                  <a:srgbClr val="FF5A5F"/>
+                </a:solidFill>
+              </a:rPr>
+              <a:t>04</a:t>
+            </a:r>
+            <a:endParaRPr lang="en-US" sz="1100" dirty="0"/>
+          </a:p>
+        </p:txBody>
+      </p:sp>
+      <p:sp>
+        <p:nvSpPr>
+          <p:cNvPr id="16" name="Text 14"/>
+          <p:cNvSpPr/>
+          <p:nvPr/>
+        </p:nvSpPr>
+        <p:spPr>
+          <a:xfrm>
+            <a:off x="9134856" y="3794760"/>
+            <a:ext cx="2331720" cy="411480"/>
+          </a:xfrm>
+          <a:prstGeom prst="rect">
+            <a:avLst/>
+          </a:prstGeom>
+          <a:noFill/>
+          <a:ln/>
+        </p:spPr>
+        <p:txBody>
+          <a:bodyPr wrap="square" lIns="0" tIns="0" rIns="0" bIns="0" rtlCol="0" anchor="ctr"/>
+          <a:lstStyle/>
+          <a:p>
+            <a:pPr indent="0" marL="0">
+              <a:buNone/>
+            </a:pPr>
+            <a:r>
+              <a:rPr lang="en-US" sz="1800" b="1" dirty="0">
+                <a:solidFill>
+                  <a:srgbClr val="222222"/>
+                </a:solidFill>
+              </a:rPr>
+              <a:t>SCALE</a:t>
+            </a:r>
+            <a:endParaRPr lang="en-US" sz="1800" dirty="0"/>
+          </a:p>
+        </p:txBody>
+      </p:sp>
+      <p:sp>
+        <p:nvSpPr>
+          <p:cNvPr id="17" name="Text 15"/>
+          <p:cNvSpPr/>
+          <p:nvPr/>
+        </p:nvSpPr>
+        <p:spPr>
+          <a:xfrm>
+            <a:off x="9134856" y="4434840"/>
+            <a:ext cx="2331720" cy="685800"/>
+          </a:xfrm>
+          <a:prstGeom prst="rect">
+            <a:avLst/>
+          </a:prstGeom>
+          <a:noFill/>
+          <a:ln/>
+        </p:spPr>
+        <p:txBody>
+          <a:bodyPr wrap="square" lIns="0" tIns="0" rIns="0" bIns="0" rtlCol="0" anchor="ctr">
+            <a:normAutofit/>
+          </a:bodyPr>
+          <a:lstStyle/>
+          <a:p>
+            <a:pPr indent="0" marL="0">
+              <a:buNone/>
+            </a:pPr>
+            <a:r>
+              <a:rPr lang="en-US" sz="1150" dirty="0">
+                <a:solidFill>
+                  <a:srgbClr val="6B7280"/>
+                </a:solidFill>
+              </a:rPr>
+              <a:t>쿠폰, 부분환불, 정산 고도화</a:t>
+            </a:r>
+            <a:endParaRPr lang="en-US" sz="1150" dirty="0"/>
+          </a:p>
+        </p:txBody>
+      </p:sp>
+    </p:spTree>
+  </p:cSld>
+  <p:clrMapOvr>
+    <a:masterClrMapping/>
+  </p:clrMapOvr>
+</p:sld>
+</file>
+
+<file path=ppt/slides/slide14.xml><?xml version="1.0" encoding="utf-8"?>
+<p:sld xmlns:a="http://schemas.openxmlformats.org/drawingml/2006/main" xmlns:r="http://schemas.openxmlformats.org/officeDocument/2006/relationships" xmlns:p="http://schemas.openxmlformats.org/presentationml/2006/main">
+  <p:cSld name="Slide 14">
     <p:bg>
       <p:bgPr>
         <a:solidFill>
@@ -4521,7 +5144,7 @@
                   <a:srgbClr val="FF5A5F"/>
                 </a:solidFill>
               </a:rPr>
-              <a:t>PROBLEM</a:t>
+              <a:t>OVERVIEW</a:t>
             </a:r>
             <a:endParaRPr lang="en-US" sz="1000" dirty="0"/>
           </a:p>
@@ -4536,7 +5159,7 @@
         <p:spPr>
           <a:xfrm>
             <a:off x="640080" y="1371600"/>
-            <a:ext cx="6949440" cy="1417320"/>
+            <a:ext cx="7040880" cy="1463040"/>
           </a:xfrm>
           <a:prstGeom prst="rect">
             <a:avLst/>
@@ -4559,7 +5182,7 @@
                   <a:srgbClr val="222222"/>
                 </a:solidFill>
               </a:rPr>
-              <a:t>학습은 여전히</a:t>
+              <a:t>이 프로젝트는</a:t>
             </a:r>
             <a:endParaRPr lang="en-US" sz="3700" dirty="0"/>
           </a:p>
@@ -4573,7 +5196,7 @@
                   <a:srgbClr val="222222"/>
                 </a:solidFill>
               </a:rPr>
-              <a:t>너무 많은 곳에 흩어져 있습니다.</a:t>
+              <a:t>무엇을 해결하나요?</a:t>
             </a:r>
             <a:endParaRPr lang="en-US" sz="3700" dirty="0"/>
           </a:p>
@@ -4611,7 +5234,7 @@
                   <a:srgbClr val="6B7280"/>
                 </a:solidFill>
               </a:rPr>
-              <a:t>강의는 한 곳에서 보고, 질문과 기록은 다른 곳에서 관리합니다.</a:t>
+              <a:t>DevFocus는 학생, 강사, 관리자 모두가 같은 데이터 위에서 움직이는 개발자 학습 플랫폼입니다.</a:t>
             </a:r>
             <a:endParaRPr lang="en-US" sz="1500" dirty="0"/>
           </a:p>
@@ -4619,14 +5242,66 @@
       </p:sp>
       <p:sp>
         <p:nvSpPr>
-          <p:cNvPr id="7" name="Text 5"/>
-          <p:cNvSpPr/>
-          <p:nvPr/>
-        </p:nvSpPr>
-        <p:spPr>
-          <a:xfrm>
-            <a:off x="685800" y="4069080"/>
-            <a:ext cx="2560320" cy="685800"/>
+          <p:cNvPr id="7" name="Shape 5"/>
+          <p:cNvSpPr/>
+          <p:nvPr/>
+        </p:nvSpPr>
+        <p:spPr>
+          <a:xfrm>
+            <a:off x="685800" y="2971800"/>
+            <a:ext cx="3337560" cy="2148840"/>
+          </a:xfrm>
+          <a:prstGeom prst="roundRect">
+            <a:avLst>
+              <a:gd name="adj" fmla="val 3404"/>
+            </a:avLst>
+          </a:prstGeom>
+          <a:solidFill>
+            <a:srgbClr val="FFFFFF"/>
+          </a:solidFill>
+          <a:ln w="12700">
+            <a:solidFill>
+              <a:srgbClr val="E8E8E8"/>
+            </a:solidFill>
+            <a:prstDash val="solid"/>
+          </a:ln>
+        </p:spPr>
+      </p:sp>
+      <p:sp>
+        <p:nvSpPr>
+          <p:cNvPr id="8" name="Shape 6"/>
+          <p:cNvSpPr/>
+          <p:nvPr/>
+        </p:nvSpPr>
+        <p:spPr>
+          <a:xfrm>
+            <a:off x="960120" y="3246120"/>
+            <a:ext cx="228600" cy="228600"/>
+          </a:xfrm>
+          <a:prstGeom prst="ellipse">
+            <a:avLst/>
+          </a:prstGeom>
+          <a:solidFill>
+            <a:srgbClr val="FF5A5F"/>
+          </a:solidFill>
+          <a:ln w="12700">
+            <a:solidFill>
+              <a:srgbClr val="FF5A5F"/>
+            </a:solidFill>
+            <a:prstDash val="solid"/>
+          </a:ln>
+        </p:spPr>
+      </p:sp>
+      <p:sp>
+        <p:nvSpPr>
+          <p:cNvPr id="9" name="Text 7"/>
+          <p:cNvSpPr/>
+          <p:nvPr/>
+        </p:nvSpPr>
+        <p:spPr>
+          <a:xfrm>
+            <a:off x="960120" y="3721608"/>
+            <a:ext cx="2788920" cy="411480"/>
           </a:xfrm>
           <a:prstGeom prst="rect">
             <a:avLst/>
@@ -4644,27 +5319,27 @@
               <a:buNone/>
             </a:pPr>
             <a:r>
-              <a:rPr lang="en-US" sz="3400" b="1" dirty="0">
-                <a:solidFill>
-                  <a:srgbClr val="FF5A5F"/>
-                </a:solidFill>
-              </a:rPr>
-              <a:t>5+</a:t>
-            </a:r>
-            <a:endParaRPr lang="en-US" sz="3400" dirty="0"/>
-          </a:p>
-        </p:txBody>
-      </p:sp>
-      <p:sp>
-        <p:nvSpPr>
-          <p:cNvPr id="8" name="Text 6"/>
-          <p:cNvSpPr/>
-          <p:nvPr/>
-        </p:nvSpPr>
-        <p:spPr>
-          <a:xfrm>
-            <a:off x="685800" y="4818888"/>
-            <a:ext cx="2560320" cy="457200"/>
+              <a:rPr lang="en-US" sz="1700" b="1" dirty="0">
+                <a:solidFill>
+                  <a:srgbClr val="222222"/>
+                </a:solidFill>
+              </a:rPr>
+              <a:t>학생</a:t>
+            </a:r>
+            <a:endParaRPr lang="en-US" sz="1700" dirty="0"/>
+          </a:p>
+        </p:txBody>
+      </p:sp>
+      <p:sp>
+        <p:nvSpPr>
+          <p:cNvPr id="10" name="Text 8"/>
+          <p:cNvSpPr/>
+          <p:nvPr/>
+        </p:nvSpPr>
+        <p:spPr>
+          <a:xfrm>
+            <a:off x="960120" y="4297680"/>
+            <a:ext cx="2788920" cy="548640"/>
           </a:xfrm>
           <a:prstGeom prst="rect">
             <a:avLst/>
@@ -4682,27 +5357,79 @@
               <a:buNone/>
             </a:pPr>
             <a:r>
-              <a:rPr lang="en-US" sz="1200" dirty="0">
+              <a:rPr lang="en-US" sz="1150" dirty="0">
                 <a:solidFill>
                   <a:srgbClr val="6B7280"/>
                 </a:solidFill>
               </a:rPr>
-              <a:t>학습자가 오가는 도구</a:t>
-            </a:r>
-            <a:endParaRPr lang="en-US" sz="1200" dirty="0"/>
-          </a:p>
-        </p:txBody>
-      </p:sp>
-      <p:sp>
-        <p:nvSpPr>
-          <p:cNvPr id="9" name="Text 7"/>
-          <p:cNvSpPr/>
-          <p:nvPr/>
-        </p:nvSpPr>
-        <p:spPr>
-          <a:xfrm>
-            <a:off x="3657600" y="4069080"/>
-            <a:ext cx="2560320" cy="685800"/>
+              <a:t>강의 탐색부터 결제, 학습, 진도 저장, 수강평까지 한 번에 연결합니다.</a:t>
+            </a:r>
+            <a:endParaRPr lang="en-US" sz="1150" dirty="0"/>
+          </a:p>
+        </p:txBody>
+      </p:sp>
+      <p:sp>
+        <p:nvSpPr>
+          <p:cNvPr id="11" name="Shape 9"/>
+          <p:cNvSpPr/>
+          <p:nvPr/>
+        </p:nvSpPr>
+        <p:spPr>
+          <a:xfrm>
+            <a:off x="4407408" y="2971800"/>
+            <a:ext cx="3337560" cy="2148840"/>
+          </a:xfrm>
+          <a:prstGeom prst="roundRect">
+            <a:avLst>
+              <a:gd name="adj" fmla="val 3404"/>
+            </a:avLst>
+          </a:prstGeom>
+          <a:solidFill>
+            <a:srgbClr val="FFFFFF"/>
+          </a:solidFill>
+          <a:ln w="12700">
+            <a:solidFill>
+              <a:srgbClr val="E8E8E8"/>
+            </a:solidFill>
+            <a:prstDash val="solid"/>
+          </a:ln>
+        </p:spPr>
+      </p:sp>
+      <p:sp>
+        <p:nvSpPr>
+          <p:cNvPr id="12" name="Shape 10"/>
+          <p:cNvSpPr/>
+          <p:nvPr/>
+        </p:nvSpPr>
+        <p:spPr>
+          <a:xfrm>
+            <a:off x="4681728" y="3246120"/>
+            <a:ext cx="228600" cy="228600"/>
+          </a:xfrm>
+          <a:prstGeom prst="ellipse">
+            <a:avLst/>
+          </a:prstGeom>
+          <a:solidFill>
+            <a:srgbClr val="4568DC"/>
+          </a:solidFill>
+          <a:ln w="12700">
+            <a:solidFill>
+              <a:srgbClr val="4568DC"/>
+            </a:solidFill>
+            <a:prstDash val="solid"/>
+          </a:ln>
+        </p:spPr>
+      </p:sp>
+      <p:sp>
+        <p:nvSpPr>
+          <p:cNvPr id="13" name="Text 11"/>
+          <p:cNvSpPr/>
+          <p:nvPr/>
+        </p:nvSpPr>
+        <p:spPr>
+          <a:xfrm>
+            <a:off x="4681728" y="3721608"/>
+            <a:ext cx="2788920" cy="411480"/>
           </a:xfrm>
           <a:prstGeom prst="rect">
             <a:avLst/>
@@ -4720,27 +5447,27 @@
               <a:buNone/>
             </a:pPr>
             <a:r>
-              <a:rPr lang="en-US" sz="3400" b="1" dirty="0">
+              <a:rPr lang="en-US" sz="1700" b="1" dirty="0">
                 <a:solidFill>
                   <a:srgbClr val="222222"/>
                 </a:solidFill>
               </a:rPr>
-              <a:t>0</a:t>
-            </a:r>
-            <a:endParaRPr lang="en-US" sz="3400" dirty="0"/>
-          </a:p>
-        </p:txBody>
-      </p:sp>
-      <p:sp>
-        <p:nvSpPr>
-          <p:cNvPr id="10" name="Text 8"/>
-          <p:cNvSpPr/>
-          <p:nvPr/>
-        </p:nvSpPr>
-        <p:spPr>
-          <a:xfrm>
-            <a:off x="3657600" y="4818888"/>
-            <a:ext cx="2560320" cy="457200"/>
+              <a:t>강사</a:t>
+            </a:r>
+            <a:endParaRPr lang="en-US" sz="1700" dirty="0"/>
+          </a:p>
+        </p:txBody>
+      </p:sp>
+      <p:sp>
+        <p:nvSpPr>
+          <p:cNvPr id="14" name="Text 12"/>
+          <p:cNvSpPr/>
+          <p:nvPr/>
+        </p:nvSpPr>
+        <p:spPr>
+          <a:xfrm>
+            <a:off x="4681728" y="4297680"/>
+            <a:ext cx="2788920" cy="548640"/>
           </a:xfrm>
           <a:prstGeom prst="rect">
             <a:avLst/>
@@ -4758,27 +5485,79 @@
               <a:buNone/>
             </a:pPr>
             <a:r>
-              <a:rPr lang="en-US" sz="1200" dirty="0">
+              <a:rPr lang="en-US" sz="1150" dirty="0">
                 <a:solidFill>
                   <a:srgbClr val="6B7280"/>
                 </a:solidFill>
               </a:rPr>
-              <a:t>연결된 학습 맥락</a:t>
-            </a:r>
-            <a:endParaRPr lang="en-US" sz="1200" dirty="0"/>
-          </a:p>
-        </p:txBody>
-      </p:sp>
-      <p:sp>
-        <p:nvSpPr>
-          <p:cNvPr id="11" name="Text 9"/>
-          <p:cNvSpPr/>
-          <p:nvPr/>
-        </p:nvSpPr>
-        <p:spPr>
-          <a:xfrm>
-            <a:off x="6629400" y="4069080"/>
-            <a:ext cx="2560320" cy="685800"/>
+              <a:t>강의와 레슨을 직접 관리하고, 수강생과 매출, 학습률을 확인합니다.</a:t>
+            </a:r>
+            <a:endParaRPr lang="en-US" sz="1150" dirty="0"/>
+          </a:p>
+        </p:txBody>
+      </p:sp>
+      <p:sp>
+        <p:nvSpPr>
+          <p:cNvPr id="15" name="Shape 13"/>
+          <p:cNvSpPr/>
+          <p:nvPr/>
+        </p:nvSpPr>
+        <p:spPr>
+          <a:xfrm>
+            <a:off x="8138160" y="2971800"/>
+            <a:ext cx="3337560" cy="2148840"/>
+          </a:xfrm>
+          <a:prstGeom prst="roundRect">
+            <a:avLst>
+              <a:gd name="adj" fmla="val 3404"/>
+            </a:avLst>
+          </a:prstGeom>
+          <a:solidFill>
+            <a:srgbClr val="FFFFFF"/>
+          </a:solidFill>
+          <a:ln w="12700">
+            <a:solidFill>
+              <a:srgbClr val="E8E8E8"/>
+            </a:solidFill>
+            <a:prstDash val="solid"/>
+          </a:ln>
+        </p:spPr>
+      </p:sp>
+      <p:sp>
+        <p:nvSpPr>
+          <p:cNvPr id="16" name="Shape 14"/>
+          <p:cNvSpPr/>
+          <p:nvPr/>
+        </p:nvSpPr>
+        <p:spPr>
+          <a:xfrm>
+            <a:off x="8412480" y="3246120"/>
+            <a:ext cx="228600" cy="228600"/>
+          </a:xfrm>
+          <a:prstGeom prst="ellipse">
+            <a:avLst/>
+          </a:prstGeom>
+          <a:solidFill>
+            <a:srgbClr val="00A86B"/>
+          </a:solidFill>
+          <a:ln w="12700">
+            <a:solidFill>
+              <a:srgbClr val="00A86B"/>
+            </a:solidFill>
+            <a:prstDash val="solid"/>
+          </a:ln>
+        </p:spPr>
+      </p:sp>
+      <p:sp>
+        <p:nvSpPr>
+          <p:cNvPr id="17" name="Text 15"/>
+          <p:cNvSpPr/>
+          <p:nvPr/>
+        </p:nvSpPr>
+        <p:spPr>
+          <a:xfrm>
+            <a:off x="8412480" y="3721608"/>
+            <a:ext cx="2788920" cy="411480"/>
           </a:xfrm>
           <a:prstGeom prst="rect">
             <a:avLst/>
@@ -4796,27 +5575,27 @@
               <a:buNone/>
             </a:pPr>
             <a:r>
-              <a:rPr lang="en-US" sz="3400" b="1" dirty="0">
-                <a:solidFill>
-                  <a:srgbClr val="4568DC"/>
-                </a:solidFill>
-              </a:rPr>
-              <a:t>높음</a:t>
-            </a:r>
-            <a:endParaRPr lang="en-US" sz="3400" dirty="0"/>
-          </a:p>
-        </p:txBody>
-      </p:sp>
-      <p:sp>
-        <p:nvSpPr>
-          <p:cNvPr id="12" name="Text 10"/>
-          <p:cNvSpPr/>
-          <p:nvPr/>
-        </p:nvSpPr>
-        <p:spPr>
-          <a:xfrm>
-            <a:off x="6629400" y="4818888"/>
-            <a:ext cx="2560320" cy="457200"/>
+              <a:rPr lang="en-US" sz="1700" b="1" dirty="0">
+                <a:solidFill>
+                  <a:srgbClr val="222222"/>
+                </a:solidFill>
+              </a:rPr>
+              <a:t>관리자</a:t>
+            </a:r>
+            <a:endParaRPr lang="en-US" sz="1700" dirty="0"/>
+          </a:p>
+        </p:txBody>
+      </p:sp>
+      <p:sp>
+        <p:nvSpPr>
+          <p:cNvPr id="18" name="Text 16"/>
+          <p:cNvSpPr/>
+          <p:nvPr/>
+        </p:nvSpPr>
+        <p:spPr>
+          <a:xfrm>
+            <a:off x="8412480" y="4297680"/>
+            <a:ext cx="2788920" cy="548640"/>
           </a:xfrm>
           <a:prstGeom prst="rect">
             <a:avLst/>
@@ -4834,157 +5613,14 @@
               <a:buNone/>
             </a:pPr>
             <a:r>
-              <a:rPr lang="en-US" sz="1200" dirty="0">
+              <a:rPr lang="en-US" sz="1150" dirty="0">
                 <a:solidFill>
                   <a:srgbClr val="6B7280"/>
                 </a:solidFill>
               </a:rPr>
-              <a:t>중도 이탈 가능성</a:t>
-            </a:r>
-            <a:endParaRPr lang="en-US" sz="1200" dirty="0"/>
-          </a:p>
-        </p:txBody>
-      </p:sp>
-      <p:sp>
-        <p:nvSpPr>
-          <p:cNvPr id="13" name="Shape 11"/>
-          <p:cNvSpPr/>
-          <p:nvPr/>
-        </p:nvSpPr>
-        <p:spPr>
-          <a:xfrm>
-            <a:off x="9372600" y="1097280"/>
-            <a:ext cx="1965960" cy="4480560"/>
-          </a:xfrm>
-          <a:prstGeom prst="roundRect">
-            <a:avLst>
-              <a:gd name="adj" fmla="val 3721"/>
-            </a:avLst>
-          </a:prstGeom>
-          <a:solidFill>
-            <a:srgbClr val="FFF0F0"/>
-          </a:solidFill>
-          <a:ln w="12700">
-            <a:solidFill>
-              <a:srgbClr val="FFF0F0"/>
-            </a:solidFill>
-            <a:prstDash val="solid"/>
-          </a:ln>
-        </p:spPr>
-      </p:sp>
-      <p:sp>
-        <p:nvSpPr>
-          <p:cNvPr id="14" name="Text 12"/>
-          <p:cNvSpPr/>
-          <p:nvPr/>
-        </p:nvSpPr>
-        <p:spPr>
-          <a:xfrm>
-            <a:off x="9829800" y="1600200"/>
-            <a:ext cx="1051560" cy="3566160"/>
-          </a:xfrm>
-          <a:prstGeom prst="rect">
-            <a:avLst/>
-          </a:prstGeom>
-          <a:noFill/>
-          <a:ln/>
-        </p:spPr>
-        <p:txBody>
-          <a:bodyPr wrap="square" lIns="0" tIns="0" rIns="0" bIns="0" rtlCol="0" anchor="ctr"/>
-          <a:lstStyle/>
-          <a:p>
-            <a:pPr algn="ctr" indent="0" marL="0">
-              <a:buNone/>
-            </a:pPr>
-            <a:r>
-              <a:rPr lang="en-US" sz="1700" b="1" dirty="0">
-                <a:solidFill>
-                  <a:srgbClr val="FF5A5F"/>
-                </a:solidFill>
-              </a:rPr>
-              <a:t>강의</a:t>
-            </a:r>
-            <a:endParaRPr lang="en-US" sz="1700" dirty="0"/>
-          </a:p>
-          <a:p>
-            <a:pPr algn="ctr" indent="0" marL="0">
-              <a:buNone/>
-            </a:pPr>
-            <a:endParaRPr lang="en-US" sz="1700" dirty="0"/>
-          </a:p>
-          <a:p>
-            <a:pPr algn="ctr" indent="0" marL="0">
-              <a:buNone/>
-            </a:pPr>
-            <a:r>
-              <a:rPr lang="en-US" sz="1700" b="1" dirty="0">
-                <a:solidFill>
-                  <a:srgbClr val="FF5A5F"/>
-                </a:solidFill>
-              </a:rPr>
-              <a:t>결제</a:t>
-            </a:r>
-            <a:endParaRPr lang="en-US" sz="1700" dirty="0"/>
-          </a:p>
-          <a:p>
-            <a:pPr algn="ctr" indent="0" marL="0">
-              <a:buNone/>
-            </a:pPr>
-            <a:endParaRPr lang="en-US" sz="1700" dirty="0"/>
-          </a:p>
-          <a:p>
-            <a:pPr algn="ctr" indent="0" marL="0">
-              <a:buNone/>
-            </a:pPr>
-            <a:r>
-              <a:rPr lang="en-US" sz="1700" b="1" dirty="0">
-                <a:solidFill>
-                  <a:srgbClr val="FF5A5F"/>
-                </a:solidFill>
-              </a:rPr>
-              <a:t>질문</a:t>
-            </a:r>
-            <a:endParaRPr lang="en-US" sz="1700" dirty="0"/>
-          </a:p>
-          <a:p>
-            <a:pPr algn="ctr" indent="0" marL="0">
-              <a:buNone/>
-            </a:pPr>
-            <a:endParaRPr lang="en-US" sz="1700" dirty="0"/>
-          </a:p>
-          <a:p>
-            <a:pPr algn="ctr" indent="0" marL="0">
-              <a:buNone/>
-            </a:pPr>
-            <a:r>
-              <a:rPr lang="en-US" sz="1700" b="1" dirty="0">
-                <a:solidFill>
-                  <a:srgbClr val="FF5A5F"/>
-                </a:solidFill>
-              </a:rPr>
-              <a:t>진도</a:t>
-            </a:r>
-            <a:endParaRPr lang="en-US" sz="1700" dirty="0"/>
-          </a:p>
-          <a:p>
-            <a:pPr algn="ctr" indent="0" marL="0">
-              <a:buNone/>
-            </a:pPr>
-            <a:endParaRPr lang="en-US" sz="1700" dirty="0"/>
-          </a:p>
-          <a:p>
-            <a:pPr algn="ctr" indent="0" marL="0">
-              <a:buNone/>
-            </a:pPr>
-            <a:r>
-              <a:rPr lang="en-US" sz="1700" b="1" dirty="0">
-                <a:solidFill>
-                  <a:srgbClr val="FF5A5F"/>
-                </a:solidFill>
-              </a:rPr>
-              <a:t>집중</a:t>
-            </a:r>
-            <a:endParaRPr lang="en-US" sz="1700" dirty="0"/>
+              <a:t>회원, 권한, 결제, 환불, Webhook, 배치, 로그를 운영 콘솔에서 봅니다.</a:t>
+            </a:r>
+            <a:endParaRPr lang="en-US" sz="1150" dirty="0"/>
           </a:p>
         </p:txBody>
       </p:sp>
@@ -5122,7 +5758,7 @@
                   <a:srgbClr val="FF5A5F"/>
                 </a:solidFill>
               </a:rPr>
-              <a:t>SOLUTION</a:t>
+              <a:t>PROBLEM</a:t>
             </a:r>
             <a:endParaRPr lang="en-US" sz="1000" dirty="0"/>
           </a:p>
@@ -5137,7 +5773,7 @@
         <p:spPr>
           <a:xfrm>
             <a:off x="640080" y="1371600"/>
-            <a:ext cx="6766560" cy="1417320"/>
+            <a:ext cx="6949440" cy="1417320"/>
           </a:xfrm>
           <a:prstGeom prst="rect">
             <a:avLst/>
@@ -5160,7 +5796,7 @@
                   <a:srgbClr val="222222"/>
                 </a:solidFill>
               </a:rPr>
-              <a:t>한 번의 로그인으로</a:t>
+              <a:t>학습은 여전히</a:t>
             </a:r>
             <a:endParaRPr lang="en-US" sz="3700" dirty="0"/>
           </a:p>
@@ -5174,7 +5810,7 @@
                   <a:srgbClr val="222222"/>
                 </a:solidFill>
               </a:rPr>
-              <a:t>배움이 끝까지 이어집니다.</a:t>
+              <a:t>너무 많은 곳에 흩어져 있습니다.</a:t>
             </a:r>
             <a:endParaRPr lang="en-US" sz="3700" dirty="0"/>
           </a:p>
@@ -5212,7 +5848,7 @@
                   <a:srgbClr val="6B7280"/>
                 </a:solidFill>
               </a:rPr>
-              <a:t>DevFocus는 학습 흐름과 운영 흐름을 하나의 서비스로 묶습니다.</a:t>
+              <a:t>강의는 한 곳에서 보고, 질문과 기록은 다른 곳에서 관리합니다.</a:t>
             </a:r>
             <a:endParaRPr lang="en-US" sz="1500" dirty="0"/>
           </a:p>
@@ -5220,26 +5856,254 @@
       </p:sp>
       <p:sp>
         <p:nvSpPr>
-          <p:cNvPr id="7" name="Shape 5"/>
+          <p:cNvPr id="7" name="Text 5"/>
           <p:cNvSpPr/>
           <p:nvPr/>
         </p:nvSpPr>
         <p:spPr>
           <a:xfrm>
             <a:off x="685800" y="4069080"/>
-            <a:ext cx="2423160" cy="1234440"/>
+            <a:ext cx="2560320" cy="685800"/>
+          </a:xfrm>
+          <a:prstGeom prst="rect">
+            <a:avLst/>
+          </a:prstGeom>
+          <a:noFill/>
+          <a:ln/>
+        </p:spPr>
+        <p:txBody>
+          <a:bodyPr wrap="square" lIns="0" tIns="0" rIns="0" bIns="0" rtlCol="0" anchor="ctr">
+            <a:normAutofit/>
+          </a:bodyPr>
+          <a:lstStyle/>
+          <a:p>
+            <a:pPr indent="0" marL="0">
+              <a:buNone/>
+            </a:pPr>
+            <a:r>
+              <a:rPr lang="en-US" sz="3400" b="1" dirty="0">
+                <a:solidFill>
+                  <a:srgbClr val="FF5A5F"/>
+                </a:solidFill>
+              </a:rPr>
+              <a:t>5+</a:t>
+            </a:r>
+            <a:endParaRPr lang="en-US" sz="3400" dirty="0"/>
+          </a:p>
+        </p:txBody>
+      </p:sp>
+      <p:sp>
+        <p:nvSpPr>
+          <p:cNvPr id="8" name="Text 6"/>
+          <p:cNvSpPr/>
+          <p:nvPr/>
+        </p:nvSpPr>
+        <p:spPr>
+          <a:xfrm>
+            <a:off x="685800" y="4818888"/>
+            <a:ext cx="2560320" cy="457200"/>
+          </a:xfrm>
+          <a:prstGeom prst="rect">
+            <a:avLst/>
+          </a:prstGeom>
+          <a:noFill/>
+          <a:ln/>
+        </p:spPr>
+        <p:txBody>
+          <a:bodyPr wrap="square" lIns="0" tIns="0" rIns="0" bIns="0" rtlCol="0" anchor="ctr">
+            <a:normAutofit/>
+          </a:bodyPr>
+          <a:lstStyle/>
+          <a:p>
+            <a:pPr indent="0" marL="0">
+              <a:buNone/>
+            </a:pPr>
+            <a:r>
+              <a:rPr lang="en-US" sz="1200" dirty="0">
+                <a:solidFill>
+                  <a:srgbClr val="6B7280"/>
+                </a:solidFill>
+              </a:rPr>
+              <a:t>학습자가 오가는 도구</a:t>
+            </a:r>
+            <a:endParaRPr lang="en-US" sz="1200" dirty="0"/>
+          </a:p>
+        </p:txBody>
+      </p:sp>
+      <p:sp>
+        <p:nvSpPr>
+          <p:cNvPr id="9" name="Text 7"/>
+          <p:cNvSpPr/>
+          <p:nvPr/>
+        </p:nvSpPr>
+        <p:spPr>
+          <a:xfrm>
+            <a:off x="3657600" y="4069080"/>
+            <a:ext cx="2560320" cy="685800"/>
+          </a:xfrm>
+          <a:prstGeom prst="rect">
+            <a:avLst/>
+          </a:prstGeom>
+          <a:noFill/>
+          <a:ln/>
+        </p:spPr>
+        <p:txBody>
+          <a:bodyPr wrap="square" lIns="0" tIns="0" rIns="0" bIns="0" rtlCol="0" anchor="ctr">
+            <a:normAutofit/>
+          </a:bodyPr>
+          <a:lstStyle/>
+          <a:p>
+            <a:pPr indent="0" marL="0">
+              <a:buNone/>
+            </a:pPr>
+            <a:r>
+              <a:rPr lang="en-US" sz="3400" b="1" dirty="0">
+                <a:solidFill>
+                  <a:srgbClr val="222222"/>
+                </a:solidFill>
+              </a:rPr>
+              <a:t>0</a:t>
+            </a:r>
+            <a:endParaRPr lang="en-US" sz="3400" dirty="0"/>
+          </a:p>
+        </p:txBody>
+      </p:sp>
+      <p:sp>
+        <p:nvSpPr>
+          <p:cNvPr id="10" name="Text 8"/>
+          <p:cNvSpPr/>
+          <p:nvPr/>
+        </p:nvSpPr>
+        <p:spPr>
+          <a:xfrm>
+            <a:off x="3657600" y="4818888"/>
+            <a:ext cx="2560320" cy="457200"/>
+          </a:xfrm>
+          <a:prstGeom prst="rect">
+            <a:avLst/>
+          </a:prstGeom>
+          <a:noFill/>
+          <a:ln/>
+        </p:spPr>
+        <p:txBody>
+          <a:bodyPr wrap="square" lIns="0" tIns="0" rIns="0" bIns="0" rtlCol="0" anchor="ctr">
+            <a:normAutofit/>
+          </a:bodyPr>
+          <a:lstStyle/>
+          <a:p>
+            <a:pPr indent="0" marL="0">
+              <a:buNone/>
+            </a:pPr>
+            <a:r>
+              <a:rPr lang="en-US" sz="1200" dirty="0">
+                <a:solidFill>
+                  <a:srgbClr val="6B7280"/>
+                </a:solidFill>
+              </a:rPr>
+              <a:t>연결된 학습 맥락</a:t>
+            </a:r>
+            <a:endParaRPr lang="en-US" sz="1200" dirty="0"/>
+          </a:p>
+        </p:txBody>
+      </p:sp>
+      <p:sp>
+        <p:nvSpPr>
+          <p:cNvPr id="11" name="Text 9"/>
+          <p:cNvSpPr/>
+          <p:nvPr/>
+        </p:nvSpPr>
+        <p:spPr>
+          <a:xfrm>
+            <a:off x="6629400" y="4069080"/>
+            <a:ext cx="2560320" cy="685800"/>
+          </a:xfrm>
+          <a:prstGeom prst="rect">
+            <a:avLst/>
+          </a:prstGeom>
+          <a:noFill/>
+          <a:ln/>
+        </p:spPr>
+        <p:txBody>
+          <a:bodyPr wrap="square" lIns="0" tIns="0" rIns="0" bIns="0" rtlCol="0" anchor="ctr">
+            <a:normAutofit/>
+          </a:bodyPr>
+          <a:lstStyle/>
+          <a:p>
+            <a:pPr indent="0" marL="0">
+              <a:buNone/>
+            </a:pPr>
+            <a:r>
+              <a:rPr lang="en-US" sz="3400" b="1" dirty="0">
+                <a:solidFill>
+                  <a:srgbClr val="4568DC"/>
+                </a:solidFill>
+              </a:rPr>
+              <a:t>높음</a:t>
+            </a:r>
+            <a:endParaRPr lang="en-US" sz="3400" dirty="0"/>
+          </a:p>
+        </p:txBody>
+      </p:sp>
+      <p:sp>
+        <p:nvSpPr>
+          <p:cNvPr id="12" name="Text 10"/>
+          <p:cNvSpPr/>
+          <p:nvPr/>
+        </p:nvSpPr>
+        <p:spPr>
+          <a:xfrm>
+            <a:off x="6629400" y="4818888"/>
+            <a:ext cx="2560320" cy="457200"/>
+          </a:xfrm>
+          <a:prstGeom prst="rect">
+            <a:avLst/>
+          </a:prstGeom>
+          <a:noFill/>
+          <a:ln/>
+        </p:spPr>
+        <p:txBody>
+          <a:bodyPr wrap="square" lIns="0" tIns="0" rIns="0" bIns="0" rtlCol="0" anchor="ctr">
+            <a:normAutofit/>
+          </a:bodyPr>
+          <a:lstStyle/>
+          <a:p>
+            <a:pPr indent="0" marL="0">
+              <a:buNone/>
+            </a:pPr>
+            <a:r>
+              <a:rPr lang="en-US" sz="1200" dirty="0">
+                <a:solidFill>
+                  <a:srgbClr val="6B7280"/>
+                </a:solidFill>
+              </a:rPr>
+              <a:t>중도 이탈 가능성</a:t>
+            </a:r>
+            <a:endParaRPr lang="en-US" sz="1200" dirty="0"/>
+          </a:p>
+        </p:txBody>
+      </p:sp>
+      <p:sp>
+        <p:nvSpPr>
+          <p:cNvPr id="13" name="Shape 11"/>
+          <p:cNvSpPr/>
+          <p:nvPr/>
+        </p:nvSpPr>
+        <p:spPr>
+          <a:xfrm>
+            <a:off x="9372600" y="1097280"/>
+            <a:ext cx="1965960" cy="4480560"/>
           </a:xfrm>
           <a:prstGeom prst="roundRect">
             <a:avLst>
-              <a:gd name="adj" fmla="val 5926"/>
+              <a:gd name="adj" fmla="val 3721"/>
             </a:avLst>
           </a:prstGeom>
           <a:solidFill>
-            <a:srgbClr val="FFF9F5"/>
+            <a:srgbClr val="FFF0F0"/>
           </a:solidFill>
           <a:ln w="12700">
             <a:solidFill>
-              <a:srgbClr val="F3E8DF"/>
+              <a:srgbClr val="FFF0F0"/>
             </a:solidFill>
             <a:prstDash val="solid"/>
           </a:ln>
@@ -5247,14 +6111,14 @@
       </p:sp>
       <p:sp>
         <p:nvSpPr>
-          <p:cNvPr id="8" name="Text 6"/>
-          <p:cNvSpPr/>
-          <p:nvPr/>
-        </p:nvSpPr>
-        <p:spPr>
-          <a:xfrm>
-            <a:off x="914400" y="4315968"/>
-            <a:ext cx="685800" cy="292608"/>
+          <p:cNvPr id="14" name="Text 12"/>
+          <p:cNvSpPr/>
+          <p:nvPr/>
+        </p:nvSpPr>
+        <p:spPr>
+          <a:xfrm>
+            <a:off x="9829800" y="1600200"/>
+            <a:ext cx="1051560" cy="3566160"/>
           </a:xfrm>
           <a:prstGeom prst="rect">
             <a:avLst/>
@@ -5266,359 +6130,98 @@
           <a:bodyPr wrap="square" lIns="0" tIns="0" rIns="0" bIns="0" rtlCol="0" anchor="ctr"/>
           <a:lstStyle/>
           <a:p>
-            <a:pPr indent="0" marL="0">
-              <a:buNone/>
-            </a:pPr>
-            <a:r>
-              <a:rPr lang="en-US" sz="1300" b="1" dirty="0">
+            <a:pPr algn="ctr" indent="0" marL="0">
+              <a:buNone/>
+            </a:pPr>
+            <a:r>
+              <a:rPr lang="en-US" sz="1700" b="1" dirty="0">
                 <a:solidFill>
                   <a:srgbClr val="FF5A5F"/>
                 </a:solidFill>
               </a:rPr>
-              <a:t>탐색</a:t>
-            </a:r>
-            <a:endParaRPr lang="en-US" sz="1300" dirty="0"/>
-          </a:p>
-        </p:txBody>
-      </p:sp>
-      <p:sp>
-        <p:nvSpPr>
-          <p:cNvPr id="9" name="Text 7"/>
-          <p:cNvSpPr/>
-          <p:nvPr/>
-        </p:nvSpPr>
-        <p:spPr>
-          <a:xfrm>
-            <a:off x="914400" y="4709160"/>
-            <a:ext cx="1965960" cy="320040"/>
-          </a:xfrm>
-          <a:prstGeom prst="rect">
-            <a:avLst/>
-          </a:prstGeom>
-          <a:noFill/>
-          <a:ln/>
-        </p:spPr>
-        <p:txBody>
-          <a:bodyPr wrap="square" lIns="0" tIns="0" rIns="0" bIns="0" rtlCol="0" anchor="ctr">
-            <a:normAutofit/>
-          </a:bodyPr>
-          <a:lstStyle/>
-          <a:p>
-            <a:pPr indent="0" marL="0">
-              <a:buNone/>
-            </a:pPr>
-            <a:r>
-              <a:rPr lang="en-US" sz="1100" dirty="0">
-                <a:solidFill>
-                  <a:srgbClr val="6B7280"/>
-                </a:solidFill>
-              </a:rPr>
-              <a:t>나에게 맞는 강의</a:t>
-            </a:r>
-            <a:endParaRPr lang="en-US" sz="1100" dirty="0"/>
-          </a:p>
-        </p:txBody>
-      </p:sp>
-      <p:sp>
-        <p:nvSpPr>
-          <p:cNvPr id="10" name="Shape 8"/>
-          <p:cNvSpPr/>
-          <p:nvPr/>
-        </p:nvSpPr>
-        <p:spPr>
-          <a:xfrm>
-            <a:off x="3502152" y="4069080"/>
-            <a:ext cx="2423160" cy="1234440"/>
-          </a:xfrm>
-          <a:prstGeom prst="roundRect">
-            <a:avLst>
-              <a:gd name="adj" fmla="val 5926"/>
-            </a:avLst>
-          </a:prstGeom>
-          <a:solidFill>
-            <a:srgbClr val="FFF9F5"/>
-          </a:solidFill>
-          <a:ln w="12700">
-            <a:solidFill>
-              <a:srgbClr val="F3E8DF"/>
-            </a:solidFill>
-            <a:prstDash val="solid"/>
-          </a:ln>
-        </p:spPr>
-      </p:sp>
-      <p:sp>
-        <p:nvSpPr>
-          <p:cNvPr id="11" name="Text 9"/>
-          <p:cNvSpPr/>
-          <p:nvPr/>
-        </p:nvSpPr>
-        <p:spPr>
-          <a:xfrm>
-            <a:off x="3730752" y="4315968"/>
-            <a:ext cx="685800" cy="292608"/>
-          </a:xfrm>
-          <a:prstGeom prst="rect">
-            <a:avLst/>
-          </a:prstGeom>
-          <a:noFill/>
-          <a:ln/>
-        </p:spPr>
-        <p:txBody>
-          <a:bodyPr wrap="square" lIns="0" tIns="0" rIns="0" bIns="0" rtlCol="0" anchor="ctr"/>
-          <a:lstStyle/>
-          <a:p>
-            <a:pPr indent="0" marL="0">
-              <a:buNone/>
-            </a:pPr>
-            <a:r>
-              <a:rPr lang="en-US" sz="1300" b="1" dirty="0">
+              <a:t>강의</a:t>
+            </a:r>
+            <a:endParaRPr lang="en-US" sz="1700" dirty="0"/>
+          </a:p>
+          <a:p>
+            <a:pPr algn="ctr" indent="0" marL="0">
+              <a:buNone/>
+            </a:pPr>
+            <a:endParaRPr lang="en-US" sz="1700" dirty="0"/>
+          </a:p>
+          <a:p>
+            <a:pPr algn="ctr" indent="0" marL="0">
+              <a:buNone/>
+            </a:pPr>
+            <a:r>
+              <a:rPr lang="en-US" sz="1700" b="1" dirty="0">
                 <a:solidFill>
                   <a:srgbClr val="FF5A5F"/>
                 </a:solidFill>
               </a:rPr>
               <a:t>결제</a:t>
             </a:r>
-            <a:endParaRPr lang="en-US" sz="1300" dirty="0"/>
-          </a:p>
-        </p:txBody>
-      </p:sp>
-      <p:sp>
-        <p:nvSpPr>
-          <p:cNvPr id="12" name="Text 10"/>
-          <p:cNvSpPr/>
-          <p:nvPr/>
-        </p:nvSpPr>
-        <p:spPr>
-          <a:xfrm>
-            <a:off x="3730752" y="4709160"/>
-            <a:ext cx="1965960" cy="320040"/>
-          </a:xfrm>
-          <a:prstGeom prst="rect">
-            <a:avLst/>
-          </a:prstGeom>
-          <a:noFill/>
-          <a:ln/>
-        </p:spPr>
-        <p:txBody>
-          <a:bodyPr wrap="square" lIns="0" tIns="0" rIns="0" bIns="0" rtlCol="0" anchor="ctr">
-            <a:normAutofit/>
-          </a:bodyPr>
-          <a:lstStyle/>
-          <a:p>
-            <a:pPr indent="0" marL="0">
-              <a:buNone/>
-            </a:pPr>
-            <a:r>
-              <a:rPr lang="en-US" sz="1100" dirty="0">
-                <a:solidFill>
-                  <a:srgbClr val="6B7280"/>
-                </a:solidFill>
-              </a:rPr>
-              <a:t>검증된 주문 흐름</a:t>
-            </a:r>
-            <a:endParaRPr lang="en-US" sz="1100" dirty="0"/>
-          </a:p>
-        </p:txBody>
-      </p:sp>
-      <p:sp>
-        <p:nvSpPr>
-          <p:cNvPr id="13" name="Shape 11"/>
-          <p:cNvSpPr/>
-          <p:nvPr/>
-        </p:nvSpPr>
-        <p:spPr>
-          <a:xfrm>
-            <a:off x="6318504" y="4069080"/>
-            <a:ext cx="2423160" cy="1234440"/>
-          </a:xfrm>
-          <a:prstGeom prst="roundRect">
-            <a:avLst>
-              <a:gd name="adj" fmla="val 5926"/>
-            </a:avLst>
-          </a:prstGeom>
-          <a:solidFill>
-            <a:srgbClr val="FFF9F5"/>
-          </a:solidFill>
-          <a:ln w="12700">
-            <a:solidFill>
-              <a:srgbClr val="F3E8DF"/>
-            </a:solidFill>
-            <a:prstDash val="solid"/>
-          </a:ln>
-        </p:spPr>
-      </p:sp>
-      <p:sp>
-        <p:nvSpPr>
-          <p:cNvPr id="14" name="Text 12"/>
-          <p:cNvSpPr/>
-          <p:nvPr/>
-        </p:nvSpPr>
-        <p:spPr>
-          <a:xfrm>
-            <a:off x="6547104" y="4315968"/>
-            <a:ext cx="685800" cy="292608"/>
-          </a:xfrm>
-          <a:prstGeom prst="rect">
-            <a:avLst/>
-          </a:prstGeom>
-          <a:noFill/>
-          <a:ln/>
-        </p:spPr>
-        <p:txBody>
-          <a:bodyPr wrap="square" lIns="0" tIns="0" rIns="0" bIns="0" rtlCol="0" anchor="ctr"/>
-          <a:lstStyle/>
-          <a:p>
-            <a:pPr indent="0" marL="0">
-              <a:buNone/>
-            </a:pPr>
-            <a:r>
-              <a:rPr lang="en-US" sz="1300" b="1" dirty="0">
+            <a:endParaRPr lang="en-US" sz="1700" dirty="0"/>
+          </a:p>
+          <a:p>
+            <a:pPr algn="ctr" indent="0" marL="0">
+              <a:buNone/>
+            </a:pPr>
+            <a:endParaRPr lang="en-US" sz="1700" dirty="0"/>
+          </a:p>
+          <a:p>
+            <a:pPr algn="ctr" indent="0" marL="0">
+              <a:buNone/>
+            </a:pPr>
+            <a:r>
+              <a:rPr lang="en-US" sz="1700" b="1" dirty="0">
                 <a:solidFill>
                   <a:srgbClr val="FF5A5F"/>
                 </a:solidFill>
               </a:rPr>
-              <a:t>학습</a:t>
-            </a:r>
-            <a:endParaRPr lang="en-US" sz="1300" dirty="0"/>
-          </a:p>
-        </p:txBody>
-      </p:sp>
-      <p:sp>
-        <p:nvSpPr>
-          <p:cNvPr id="15" name="Text 13"/>
-          <p:cNvSpPr/>
-          <p:nvPr/>
-        </p:nvSpPr>
-        <p:spPr>
-          <a:xfrm>
-            <a:off x="6547104" y="4709160"/>
-            <a:ext cx="1965960" cy="320040"/>
-          </a:xfrm>
-          <a:prstGeom prst="rect">
-            <a:avLst/>
-          </a:prstGeom>
-          <a:noFill/>
-          <a:ln/>
-        </p:spPr>
-        <p:txBody>
-          <a:bodyPr wrap="square" lIns="0" tIns="0" rIns="0" bIns="0" rtlCol="0" anchor="ctr">
-            <a:normAutofit/>
-          </a:bodyPr>
-          <a:lstStyle/>
-          <a:p>
-            <a:pPr indent="0" marL="0">
-              <a:buNone/>
-            </a:pPr>
-            <a:r>
-              <a:rPr lang="en-US" sz="1100" dirty="0">
-                <a:solidFill>
-                  <a:srgbClr val="6B7280"/>
-                </a:solidFill>
-              </a:rPr>
-              <a:t>이어보기와 자동 저장</a:t>
-            </a:r>
-            <a:endParaRPr lang="en-US" sz="1100" dirty="0"/>
-          </a:p>
-        </p:txBody>
-      </p:sp>
-      <p:sp>
-        <p:nvSpPr>
-          <p:cNvPr id="16" name="Shape 14"/>
-          <p:cNvSpPr/>
-          <p:nvPr/>
-        </p:nvSpPr>
-        <p:spPr>
-          <a:xfrm>
-            <a:off x="9134856" y="4069080"/>
-            <a:ext cx="2423160" cy="1234440"/>
-          </a:xfrm>
-          <a:prstGeom prst="roundRect">
-            <a:avLst>
-              <a:gd name="adj" fmla="val 5926"/>
-            </a:avLst>
-          </a:prstGeom>
-          <a:solidFill>
-            <a:srgbClr val="FF5A5F"/>
-          </a:solidFill>
-          <a:ln w="12700">
-            <a:solidFill>
-              <a:srgbClr val="FF5A5F"/>
-            </a:solidFill>
-            <a:prstDash val="solid"/>
-          </a:ln>
-        </p:spPr>
-      </p:sp>
-      <p:sp>
-        <p:nvSpPr>
-          <p:cNvPr id="17" name="Text 15"/>
-          <p:cNvSpPr/>
-          <p:nvPr/>
-        </p:nvSpPr>
-        <p:spPr>
-          <a:xfrm>
-            <a:off x="9363456" y="4315968"/>
-            <a:ext cx="685800" cy="292608"/>
-          </a:xfrm>
-          <a:prstGeom prst="rect">
-            <a:avLst/>
-          </a:prstGeom>
-          <a:noFill/>
-          <a:ln/>
-        </p:spPr>
-        <p:txBody>
-          <a:bodyPr wrap="square" lIns="0" tIns="0" rIns="0" bIns="0" rtlCol="0" anchor="ctr"/>
-          <a:lstStyle/>
-          <a:p>
-            <a:pPr indent="0" marL="0">
-              <a:buNone/>
-            </a:pPr>
-            <a:r>
-              <a:rPr lang="en-US" sz="1300" b="1" dirty="0">
-                <a:solidFill>
-                  <a:srgbClr val="FFFFFF"/>
-                </a:solidFill>
-              </a:rPr>
-              <a:t>성장</a:t>
-            </a:r>
-            <a:endParaRPr lang="en-US" sz="1300" dirty="0"/>
-          </a:p>
-        </p:txBody>
-      </p:sp>
-      <p:sp>
-        <p:nvSpPr>
-          <p:cNvPr id="18" name="Text 16"/>
-          <p:cNvSpPr/>
-          <p:nvPr/>
-        </p:nvSpPr>
-        <p:spPr>
-          <a:xfrm>
-            <a:off x="9363456" y="4709160"/>
-            <a:ext cx="1965960" cy="320040"/>
-          </a:xfrm>
-          <a:prstGeom prst="rect">
-            <a:avLst/>
-          </a:prstGeom>
-          <a:noFill/>
-          <a:ln/>
-        </p:spPr>
-        <p:txBody>
-          <a:bodyPr wrap="square" lIns="0" tIns="0" rIns="0" bIns="0" rtlCol="0" anchor="ctr">
-            <a:normAutofit/>
-          </a:bodyPr>
-          <a:lstStyle/>
-          <a:p>
-            <a:pPr indent="0" marL="0">
-              <a:buNone/>
-            </a:pPr>
-            <a:r>
-              <a:rPr lang="en-US" sz="1100" dirty="0">
-                <a:solidFill>
-                  <a:srgbClr val="FFFFFF"/>
-                </a:solidFill>
-              </a:rPr>
-              <a:t>완강률과 학습 기록</a:t>
-            </a:r>
-            <a:endParaRPr lang="en-US" sz="1100" dirty="0"/>
+              <a:t>질문</a:t>
+            </a:r>
+            <a:endParaRPr lang="en-US" sz="1700" dirty="0"/>
+          </a:p>
+          <a:p>
+            <a:pPr algn="ctr" indent="0" marL="0">
+              <a:buNone/>
+            </a:pPr>
+            <a:endParaRPr lang="en-US" sz="1700" dirty="0"/>
+          </a:p>
+          <a:p>
+            <a:pPr algn="ctr" indent="0" marL="0">
+              <a:buNone/>
+            </a:pPr>
+            <a:r>
+              <a:rPr lang="en-US" sz="1700" b="1" dirty="0">
+                <a:solidFill>
+                  <a:srgbClr val="FF5A5F"/>
+                </a:solidFill>
+              </a:rPr>
+              <a:t>진도</a:t>
+            </a:r>
+            <a:endParaRPr lang="en-US" sz="1700" dirty="0"/>
+          </a:p>
+          <a:p>
+            <a:pPr algn="ctr" indent="0" marL="0">
+              <a:buNone/>
+            </a:pPr>
+            <a:endParaRPr lang="en-US" sz="1700" dirty="0"/>
+          </a:p>
+          <a:p>
+            <a:pPr algn="ctr" indent="0" marL="0">
+              <a:buNone/>
+            </a:pPr>
+            <a:r>
+              <a:rPr lang="en-US" sz="1700" b="1" dirty="0">
+                <a:solidFill>
+                  <a:srgbClr val="FF5A5F"/>
+                </a:solidFill>
+              </a:rPr>
+              <a:t>집중</a:t>
+            </a:r>
+            <a:endParaRPr lang="en-US" sz="1700" dirty="0"/>
           </a:p>
         </p:txBody>
       </p:sp>
@@ -5756,7 +6359,7 @@
                   <a:srgbClr val="FF5A5F"/>
                 </a:solidFill>
               </a:rPr>
-              <a:t>PRODUCT</a:t>
+              <a:t>SOLUTION</a:t>
             </a:r>
             <a:endParaRPr lang="en-US" sz="1000" dirty="0"/>
           </a:p>
@@ -5771,7 +6374,7 @@
         <p:spPr>
           <a:xfrm>
             <a:off x="640080" y="1371600"/>
-            <a:ext cx="5943600" cy="1371600"/>
+            <a:ext cx="6766560" cy="1417320"/>
           </a:xfrm>
           <a:prstGeom prst="rect">
             <a:avLst/>
@@ -5794,7 +6397,7 @@
                   <a:srgbClr val="222222"/>
                 </a:solidFill>
               </a:rPr>
-              <a:t>학생에게는 단순하게.</a:t>
+              <a:t>한 번의 로그인으로</a:t>
             </a:r>
             <a:endParaRPr lang="en-US" sz="3700" dirty="0"/>
           </a:p>
@@ -5808,7 +6411,7 @@
                   <a:srgbClr val="222222"/>
                 </a:solidFill>
               </a:rPr>
-              <a:t>기능은 충분하게.</a:t>
+              <a:t>배움이 끝까지 이어집니다.</a:t>
             </a:r>
             <a:endParaRPr lang="en-US" sz="3700" dirty="0"/>
           </a:p>
@@ -5816,26 +6419,64 @@
       </p:sp>
       <p:sp>
         <p:nvSpPr>
-          <p:cNvPr id="6" name="Shape 4"/>
-          <p:cNvSpPr/>
-          <p:nvPr/>
-        </p:nvSpPr>
-        <p:spPr>
-          <a:xfrm>
-            <a:off x="685800" y="2971800"/>
-            <a:ext cx="3337560" cy="2240280"/>
+          <p:cNvPr id="6" name="Text 4"/>
+          <p:cNvSpPr/>
+          <p:nvPr/>
+        </p:nvSpPr>
+        <p:spPr>
+          <a:xfrm>
+            <a:off x="667512" y="2788920"/>
+            <a:ext cx="6858000" cy="731520"/>
+          </a:xfrm>
+          <a:prstGeom prst="rect">
+            <a:avLst/>
+          </a:prstGeom>
+          <a:noFill/>
+          <a:ln/>
+        </p:spPr>
+        <p:txBody>
+          <a:bodyPr wrap="square" lIns="0" tIns="0" rIns="0" bIns="0" rtlCol="0" anchor="ctr">
+            <a:normAutofit/>
+          </a:bodyPr>
+          <a:lstStyle/>
+          <a:p>
+            <a:pPr indent="0" marL="0">
+              <a:buNone/>
+            </a:pPr>
+            <a:r>
+              <a:rPr lang="en-US" sz="1500" dirty="0">
+                <a:solidFill>
+                  <a:srgbClr val="6B7280"/>
+                </a:solidFill>
+              </a:rPr>
+              <a:t>DevFocus는 학습 흐름과 운영 흐름을 하나의 서비스로 묶습니다.</a:t>
+            </a:r>
+            <a:endParaRPr lang="en-US" sz="1500" dirty="0"/>
+          </a:p>
+        </p:txBody>
+      </p:sp>
+      <p:sp>
+        <p:nvSpPr>
+          <p:cNvPr id="7" name="Shape 5"/>
+          <p:cNvSpPr/>
+          <p:nvPr/>
+        </p:nvSpPr>
+        <p:spPr>
+          <a:xfrm>
+            <a:off x="685800" y="4069080"/>
+            <a:ext cx="2423160" cy="1234440"/>
           </a:xfrm>
           <a:prstGeom prst="roundRect">
             <a:avLst>
-              <a:gd name="adj" fmla="val 3265"/>
+              <a:gd name="adj" fmla="val 5926"/>
             </a:avLst>
           </a:prstGeom>
           <a:solidFill>
-            <a:srgbClr val="FFFFFF"/>
+            <a:srgbClr val="FFF9F5"/>
           </a:solidFill>
           <a:ln w="12700">
             <a:solidFill>
-              <a:srgbClr val="E8E8E8"/>
+              <a:srgbClr val="F3E8DF"/>
             </a:solidFill>
             <a:prstDash val="solid"/>
           </a:ln>
@@ -5843,17 +6484,295 @@
       </p:sp>
       <p:sp>
         <p:nvSpPr>
-          <p:cNvPr id="7" name="Shape 5"/>
-          <p:cNvSpPr/>
-          <p:nvPr/>
-        </p:nvSpPr>
-        <p:spPr>
-          <a:xfrm>
-            <a:off x="960120" y="3246120"/>
-            <a:ext cx="228600" cy="228600"/>
-          </a:xfrm>
-          <a:prstGeom prst="ellipse">
-            <a:avLst/>
+          <p:cNvPr id="8" name="Text 6"/>
+          <p:cNvSpPr/>
+          <p:nvPr/>
+        </p:nvSpPr>
+        <p:spPr>
+          <a:xfrm>
+            <a:off x="914400" y="4315968"/>
+            <a:ext cx="685800" cy="292608"/>
+          </a:xfrm>
+          <a:prstGeom prst="rect">
+            <a:avLst/>
+          </a:prstGeom>
+          <a:noFill/>
+          <a:ln/>
+        </p:spPr>
+        <p:txBody>
+          <a:bodyPr wrap="square" lIns="0" tIns="0" rIns="0" bIns="0" rtlCol="0" anchor="ctr"/>
+          <a:lstStyle/>
+          <a:p>
+            <a:pPr indent="0" marL="0">
+              <a:buNone/>
+            </a:pPr>
+            <a:r>
+              <a:rPr lang="en-US" sz="1300" b="1" dirty="0">
+                <a:solidFill>
+                  <a:srgbClr val="FF5A5F"/>
+                </a:solidFill>
+              </a:rPr>
+              <a:t>탐색</a:t>
+            </a:r>
+            <a:endParaRPr lang="en-US" sz="1300" dirty="0"/>
+          </a:p>
+        </p:txBody>
+      </p:sp>
+      <p:sp>
+        <p:nvSpPr>
+          <p:cNvPr id="9" name="Text 7"/>
+          <p:cNvSpPr/>
+          <p:nvPr/>
+        </p:nvSpPr>
+        <p:spPr>
+          <a:xfrm>
+            <a:off x="914400" y="4709160"/>
+            <a:ext cx="1965960" cy="320040"/>
+          </a:xfrm>
+          <a:prstGeom prst="rect">
+            <a:avLst/>
+          </a:prstGeom>
+          <a:noFill/>
+          <a:ln/>
+        </p:spPr>
+        <p:txBody>
+          <a:bodyPr wrap="square" lIns="0" tIns="0" rIns="0" bIns="0" rtlCol="0" anchor="ctr">
+            <a:normAutofit/>
+          </a:bodyPr>
+          <a:lstStyle/>
+          <a:p>
+            <a:pPr indent="0" marL="0">
+              <a:buNone/>
+            </a:pPr>
+            <a:r>
+              <a:rPr lang="en-US" sz="1100" dirty="0">
+                <a:solidFill>
+                  <a:srgbClr val="6B7280"/>
+                </a:solidFill>
+              </a:rPr>
+              <a:t>나에게 맞는 강의</a:t>
+            </a:r>
+            <a:endParaRPr lang="en-US" sz="1100" dirty="0"/>
+          </a:p>
+        </p:txBody>
+      </p:sp>
+      <p:sp>
+        <p:nvSpPr>
+          <p:cNvPr id="10" name="Shape 8"/>
+          <p:cNvSpPr/>
+          <p:nvPr/>
+        </p:nvSpPr>
+        <p:spPr>
+          <a:xfrm>
+            <a:off x="3502152" y="4069080"/>
+            <a:ext cx="2423160" cy="1234440"/>
+          </a:xfrm>
+          <a:prstGeom prst="roundRect">
+            <a:avLst>
+              <a:gd name="adj" fmla="val 5926"/>
+            </a:avLst>
+          </a:prstGeom>
+          <a:solidFill>
+            <a:srgbClr val="FFF9F5"/>
+          </a:solidFill>
+          <a:ln w="12700">
+            <a:solidFill>
+              <a:srgbClr val="F3E8DF"/>
+            </a:solidFill>
+            <a:prstDash val="solid"/>
+          </a:ln>
+        </p:spPr>
+      </p:sp>
+      <p:sp>
+        <p:nvSpPr>
+          <p:cNvPr id="11" name="Text 9"/>
+          <p:cNvSpPr/>
+          <p:nvPr/>
+        </p:nvSpPr>
+        <p:spPr>
+          <a:xfrm>
+            <a:off x="3730752" y="4315968"/>
+            <a:ext cx="685800" cy="292608"/>
+          </a:xfrm>
+          <a:prstGeom prst="rect">
+            <a:avLst/>
+          </a:prstGeom>
+          <a:noFill/>
+          <a:ln/>
+        </p:spPr>
+        <p:txBody>
+          <a:bodyPr wrap="square" lIns="0" tIns="0" rIns="0" bIns="0" rtlCol="0" anchor="ctr"/>
+          <a:lstStyle/>
+          <a:p>
+            <a:pPr indent="0" marL="0">
+              <a:buNone/>
+            </a:pPr>
+            <a:r>
+              <a:rPr lang="en-US" sz="1300" b="1" dirty="0">
+                <a:solidFill>
+                  <a:srgbClr val="FF5A5F"/>
+                </a:solidFill>
+              </a:rPr>
+              <a:t>결제</a:t>
+            </a:r>
+            <a:endParaRPr lang="en-US" sz="1300" dirty="0"/>
+          </a:p>
+        </p:txBody>
+      </p:sp>
+      <p:sp>
+        <p:nvSpPr>
+          <p:cNvPr id="12" name="Text 10"/>
+          <p:cNvSpPr/>
+          <p:nvPr/>
+        </p:nvSpPr>
+        <p:spPr>
+          <a:xfrm>
+            <a:off x="3730752" y="4709160"/>
+            <a:ext cx="1965960" cy="320040"/>
+          </a:xfrm>
+          <a:prstGeom prst="rect">
+            <a:avLst/>
+          </a:prstGeom>
+          <a:noFill/>
+          <a:ln/>
+        </p:spPr>
+        <p:txBody>
+          <a:bodyPr wrap="square" lIns="0" tIns="0" rIns="0" bIns="0" rtlCol="0" anchor="ctr">
+            <a:normAutofit/>
+          </a:bodyPr>
+          <a:lstStyle/>
+          <a:p>
+            <a:pPr indent="0" marL="0">
+              <a:buNone/>
+            </a:pPr>
+            <a:r>
+              <a:rPr lang="en-US" sz="1100" dirty="0">
+                <a:solidFill>
+                  <a:srgbClr val="6B7280"/>
+                </a:solidFill>
+              </a:rPr>
+              <a:t>검증된 주문 흐름</a:t>
+            </a:r>
+            <a:endParaRPr lang="en-US" sz="1100" dirty="0"/>
+          </a:p>
+        </p:txBody>
+      </p:sp>
+      <p:sp>
+        <p:nvSpPr>
+          <p:cNvPr id="13" name="Shape 11"/>
+          <p:cNvSpPr/>
+          <p:nvPr/>
+        </p:nvSpPr>
+        <p:spPr>
+          <a:xfrm>
+            <a:off x="6318504" y="4069080"/>
+            <a:ext cx="2423160" cy="1234440"/>
+          </a:xfrm>
+          <a:prstGeom prst="roundRect">
+            <a:avLst>
+              <a:gd name="adj" fmla="val 5926"/>
+            </a:avLst>
+          </a:prstGeom>
+          <a:solidFill>
+            <a:srgbClr val="FFF9F5"/>
+          </a:solidFill>
+          <a:ln w="12700">
+            <a:solidFill>
+              <a:srgbClr val="F3E8DF"/>
+            </a:solidFill>
+            <a:prstDash val="solid"/>
+          </a:ln>
+        </p:spPr>
+      </p:sp>
+      <p:sp>
+        <p:nvSpPr>
+          <p:cNvPr id="14" name="Text 12"/>
+          <p:cNvSpPr/>
+          <p:nvPr/>
+        </p:nvSpPr>
+        <p:spPr>
+          <a:xfrm>
+            <a:off x="6547104" y="4315968"/>
+            <a:ext cx="685800" cy="292608"/>
+          </a:xfrm>
+          <a:prstGeom prst="rect">
+            <a:avLst/>
+          </a:prstGeom>
+          <a:noFill/>
+          <a:ln/>
+        </p:spPr>
+        <p:txBody>
+          <a:bodyPr wrap="square" lIns="0" tIns="0" rIns="0" bIns="0" rtlCol="0" anchor="ctr"/>
+          <a:lstStyle/>
+          <a:p>
+            <a:pPr indent="0" marL="0">
+              <a:buNone/>
+            </a:pPr>
+            <a:r>
+              <a:rPr lang="en-US" sz="1300" b="1" dirty="0">
+                <a:solidFill>
+                  <a:srgbClr val="FF5A5F"/>
+                </a:solidFill>
+              </a:rPr>
+              <a:t>학습</a:t>
+            </a:r>
+            <a:endParaRPr lang="en-US" sz="1300" dirty="0"/>
+          </a:p>
+        </p:txBody>
+      </p:sp>
+      <p:sp>
+        <p:nvSpPr>
+          <p:cNvPr id="15" name="Text 13"/>
+          <p:cNvSpPr/>
+          <p:nvPr/>
+        </p:nvSpPr>
+        <p:spPr>
+          <a:xfrm>
+            <a:off x="6547104" y="4709160"/>
+            <a:ext cx="1965960" cy="320040"/>
+          </a:xfrm>
+          <a:prstGeom prst="rect">
+            <a:avLst/>
+          </a:prstGeom>
+          <a:noFill/>
+          <a:ln/>
+        </p:spPr>
+        <p:txBody>
+          <a:bodyPr wrap="square" lIns="0" tIns="0" rIns="0" bIns="0" rtlCol="0" anchor="ctr">
+            <a:normAutofit/>
+          </a:bodyPr>
+          <a:lstStyle/>
+          <a:p>
+            <a:pPr indent="0" marL="0">
+              <a:buNone/>
+            </a:pPr>
+            <a:r>
+              <a:rPr lang="en-US" sz="1100" dirty="0">
+                <a:solidFill>
+                  <a:srgbClr val="6B7280"/>
+                </a:solidFill>
+              </a:rPr>
+              <a:t>이어보기와 자동 저장</a:t>
+            </a:r>
+            <a:endParaRPr lang="en-US" sz="1100" dirty="0"/>
+          </a:p>
+        </p:txBody>
+      </p:sp>
+      <p:sp>
+        <p:nvSpPr>
+          <p:cNvPr id="16" name="Shape 14"/>
+          <p:cNvSpPr/>
+          <p:nvPr/>
+        </p:nvSpPr>
+        <p:spPr>
+          <a:xfrm>
+            <a:off x="9134856" y="4069080"/>
+            <a:ext cx="2423160" cy="1234440"/>
+          </a:xfrm>
+          <a:prstGeom prst="roundRect">
+            <a:avLst>
+              <a:gd name="adj" fmla="val 5926"/>
+            </a:avLst>
           </a:prstGeom>
           <a:solidFill>
             <a:srgbClr val="FF5A5F"/>
@@ -5868,14 +6787,50 @@
       </p:sp>
       <p:sp>
         <p:nvSpPr>
-          <p:cNvPr id="8" name="Text 6"/>
-          <p:cNvSpPr/>
-          <p:nvPr/>
-        </p:nvSpPr>
-        <p:spPr>
-          <a:xfrm>
-            <a:off x="960120" y="3721608"/>
-            <a:ext cx="2788920" cy="411480"/>
+          <p:cNvPr id="17" name="Text 15"/>
+          <p:cNvSpPr/>
+          <p:nvPr/>
+        </p:nvSpPr>
+        <p:spPr>
+          <a:xfrm>
+            <a:off x="9363456" y="4315968"/>
+            <a:ext cx="685800" cy="292608"/>
+          </a:xfrm>
+          <a:prstGeom prst="rect">
+            <a:avLst/>
+          </a:prstGeom>
+          <a:noFill/>
+          <a:ln/>
+        </p:spPr>
+        <p:txBody>
+          <a:bodyPr wrap="square" lIns="0" tIns="0" rIns="0" bIns="0" rtlCol="0" anchor="ctr"/>
+          <a:lstStyle/>
+          <a:p>
+            <a:pPr indent="0" marL="0">
+              <a:buNone/>
+            </a:pPr>
+            <a:r>
+              <a:rPr lang="en-US" sz="1300" b="1" dirty="0">
+                <a:solidFill>
+                  <a:srgbClr val="FFFFFF"/>
+                </a:solidFill>
+              </a:rPr>
+              <a:t>성장</a:t>
+            </a:r>
+            <a:endParaRPr lang="en-US" sz="1300" dirty="0"/>
+          </a:p>
+        </p:txBody>
+      </p:sp>
+      <p:sp>
+        <p:nvSpPr>
+          <p:cNvPr id="18" name="Text 16"/>
+          <p:cNvSpPr/>
+          <p:nvPr/>
+        </p:nvSpPr>
+        <p:spPr>
+          <a:xfrm>
+            <a:off x="9363456" y="4709160"/>
+            <a:ext cx="1965960" cy="320040"/>
           </a:xfrm>
           <a:prstGeom prst="rect">
             <a:avLst/>
@@ -5893,308 +6848,14 @@
               <a:buNone/>
             </a:pPr>
             <a:r>
-              <a:rPr lang="en-US" sz="1700" b="1" dirty="0">
-                <a:solidFill>
-                  <a:srgbClr val="222222"/>
-                </a:solidFill>
-              </a:rPr>
-              <a:t>이어보기</a:t>
-            </a:r>
-            <a:endParaRPr lang="en-US" sz="1700" dirty="0"/>
-          </a:p>
-        </p:txBody>
-      </p:sp>
-      <p:sp>
-        <p:nvSpPr>
-          <p:cNvPr id="9" name="Text 7"/>
-          <p:cNvSpPr/>
-          <p:nvPr/>
-        </p:nvSpPr>
-        <p:spPr>
-          <a:xfrm>
-            <a:off x="960120" y="4297680"/>
-            <a:ext cx="2788920" cy="640080"/>
-          </a:xfrm>
-          <a:prstGeom prst="rect">
-            <a:avLst/>
-          </a:prstGeom>
-          <a:noFill/>
-          <a:ln/>
-        </p:spPr>
-        <p:txBody>
-          <a:bodyPr wrap="square" lIns="0" tIns="0" rIns="0" bIns="0" rtlCol="0" anchor="ctr">
-            <a:normAutofit/>
-          </a:bodyPr>
-          <a:lstStyle/>
-          <a:p>
-            <a:pPr indent="0" marL="0">
-              <a:buNone/>
-            </a:pPr>
-            <a:r>
-              <a:rPr lang="en-US" sz="1150" dirty="0">
-                <a:solidFill>
-                  <a:srgbClr val="6B7280"/>
-                </a:solidFill>
-              </a:rPr>
-              <a:t>마지막 학습 위치를 기억하고 다음 레슨으로 자연스럽게 연결합니다.</a:t>
-            </a:r>
-            <a:endParaRPr lang="en-US" sz="1150" dirty="0"/>
-          </a:p>
-        </p:txBody>
-      </p:sp>
-      <p:sp>
-        <p:nvSpPr>
-          <p:cNvPr id="10" name="Shape 8"/>
-          <p:cNvSpPr/>
-          <p:nvPr/>
-        </p:nvSpPr>
-        <p:spPr>
-          <a:xfrm>
-            <a:off x="4407408" y="2971800"/>
-            <a:ext cx="3337560" cy="2240280"/>
-          </a:xfrm>
-          <a:prstGeom prst="roundRect">
-            <a:avLst>
-              <a:gd name="adj" fmla="val 3265"/>
-            </a:avLst>
-          </a:prstGeom>
-          <a:solidFill>
-            <a:srgbClr val="FFFFFF"/>
-          </a:solidFill>
-          <a:ln w="12700">
-            <a:solidFill>
-              <a:srgbClr val="E8E8E8"/>
-            </a:solidFill>
-            <a:prstDash val="solid"/>
-          </a:ln>
-        </p:spPr>
-      </p:sp>
-      <p:sp>
-        <p:nvSpPr>
-          <p:cNvPr id="11" name="Shape 9"/>
-          <p:cNvSpPr/>
-          <p:nvPr/>
-        </p:nvSpPr>
-        <p:spPr>
-          <a:xfrm>
-            <a:off x="4681728" y="3246120"/>
-            <a:ext cx="228600" cy="228600"/>
-          </a:xfrm>
-          <a:prstGeom prst="ellipse">
-            <a:avLst/>
-          </a:prstGeom>
-          <a:solidFill>
-            <a:srgbClr val="4568DC"/>
-          </a:solidFill>
-          <a:ln w="12700">
-            <a:solidFill>
-              <a:srgbClr val="4568DC"/>
-            </a:solidFill>
-            <a:prstDash val="solid"/>
-          </a:ln>
-        </p:spPr>
-      </p:sp>
-      <p:sp>
-        <p:nvSpPr>
-          <p:cNvPr id="12" name="Text 10"/>
-          <p:cNvSpPr/>
-          <p:nvPr/>
-        </p:nvSpPr>
-        <p:spPr>
-          <a:xfrm>
-            <a:off x="4681728" y="3721608"/>
-            <a:ext cx="2788920" cy="411480"/>
-          </a:xfrm>
-          <a:prstGeom prst="rect">
-            <a:avLst/>
-          </a:prstGeom>
-          <a:noFill/>
-          <a:ln/>
-        </p:spPr>
-        <p:txBody>
-          <a:bodyPr wrap="square" lIns="0" tIns="0" rIns="0" bIns="0" rtlCol="0" anchor="ctr">
-            <a:normAutofit/>
-          </a:bodyPr>
-          <a:lstStyle/>
-          <a:p>
-            <a:pPr indent="0" marL="0">
-              <a:buNone/>
-            </a:pPr>
-            <a:r>
-              <a:rPr lang="en-US" sz="1700" b="1" dirty="0">
-                <a:solidFill>
-                  <a:srgbClr val="222222"/>
-                </a:solidFill>
-              </a:rPr>
-              <a:t>자동 진도 저장</a:t>
-            </a:r>
-            <a:endParaRPr lang="en-US" sz="1700" dirty="0"/>
-          </a:p>
-        </p:txBody>
-      </p:sp>
-      <p:sp>
-        <p:nvSpPr>
-          <p:cNvPr id="13" name="Text 11"/>
-          <p:cNvSpPr/>
-          <p:nvPr/>
-        </p:nvSpPr>
-        <p:spPr>
-          <a:xfrm>
-            <a:off x="4681728" y="4297680"/>
-            <a:ext cx="2788920" cy="640080"/>
-          </a:xfrm>
-          <a:prstGeom prst="rect">
-            <a:avLst/>
-          </a:prstGeom>
-          <a:noFill/>
-          <a:ln/>
-        </p:spPr>
-        <p:txBody>
-          <a:bodyPr wrap="square" lIns="0" tIns="0" rIns="0" bIns="0" rtlCol="0" anchor="ctr">
-            <a:normAutofit/>
-          </a:bodyPr>
-          <a:lstStyle/>
-          <a:p>
-            <a:pPr indent="0" marL="0">
-              <a:buNone/>
-            </a:pPr>
-            <a:r>
-              <a:rPr lang="en-US" sz="1150" dirty="0">
-                <a:solidFill>
-                  <a:srgbClr val="6B7280"/>
-                </a:solidFill>
-              </a:rPr>
-              <a:t>30초 단위 저장과 90% 완강 기준으로 실제 학습 상태를 반영합니다.</a:t>
-            </a:r>
-            <a:endParaRPr lang="en-US" sz="1150" dirty="0"/>
-          </a:p>
-        </p:txBody>
-      </p:sp>
-      <p:sp>
-        <p:nvSpPr>
-          <p:cNvPr id="14" name="Shape 12"/>
-          <p:cNvSpPr/>
-          <p:nvPr/>
-        </p:nvSpPr>
-        <p:spPr>
-          <a:xfrm>
-            <a:off x="8138160" y="2971800"/>
-            <a:ext cx="3337560" cy="2240280"/>
-          </a:xfrm>
-          <a:prstGeom prst="roundRect">
-            <a:avLst>
-              <a:gd name="adj" fmla="val 3265"/>
-            </a:avLst>
-          </a:prstGeom>
-          <a:solidFill>
-            <a:srgbClr val="FFFFFF"/>
-          </a:solidFill>
-          <a:ln w="12700">
-            <a:solidFill>
-              <a:srgbClr val="E8E8E8"/>
-            </a:solidFill>
-            <a:prstDash val="solid"/>
-          </a:ln>
-        </p:spPr>
-      </p:sp>
-      <p:sp>
-        <p:nvSpPr>
-          <p:cNvPr id="15" name="Shape 13"/>
-          <p:cNvSpPr/>
-          <p:nvPr/>
-        </p:nvSpPr>
-        <p:spPr>
-          <a:xfrm>
-            <a:off x="8412480" y="3246120"/>
-            <a:ext cx="228600" cy="228600"/>
-          </a:xfrm>
-          <a:prstGeom prst="ellipse">
-            <a:avLst/>
-          </a:prstGeom>
-          <a:solidFill>
-            <a:srgbClr val="00A86B"/>
-          </a:solidFill>
-          <a:ln w="12700">
-            <a:solidFill>
-              <a:srgbClr val="00A86B"/>
-            </a:solidFill>
-            <a:prstDash val="solid"/>
-          </a:ln>
-        </p:spPr>
-      </p:sp>
-      <p:sp>
-        <p:nvSpPr>
-          <p:cNvPr id="16" name="Text 14"/>
-          <p:cNvSpPr/>
-          <p:nvPr/>
-        </p:nvSpPr>
-        <p:spPr>
-          <a:xfrm>
-            <a:off x="8412480" y="3721608"/>
-            <a:ext cx="2788920" cy="411480"/>
-          </a:xfrm>
-          <a:prstGeom prst="rect">
-            <a:avLst/>
-          </a:prstGeom>
-          <a:noFill/>
-          <a:ln/>
-        </p:spPr>
-        <p:txBody>
-          <a:bodyPr wrap="square" lIns="0" tIns="0" rIns="0" bIns="0" rtlCol="0" anchor="ctr">
-            <a:normAutofit/>
-          </a:bodyPr>
-          <a:lstStyle/>
-          <a:p>
-            <a:pPr indent="0" marL="0">
-              <a:buNone/>
-            </a:pPr>
-            <a:r>
-              <a:rPr lang="en-US" sz="1700" b="1" dirty="0">
-                <a:solidFill>
-                  <a:srgbClr val="222222"/>
-                </a:solidFill>
-              </a:rPr>
-              <a:t>집중과 질문</a:t>
-            </a:r>
-            <a:endParaRPr lang="en-US" sz="1700" dirty="0"/>
-          </a:p>
-        </p:txBody>
-      </p:sp>
-      <p:sp>
-        <p:nvSpPr>
-          <p:cNvPr id="17" name="Text 15"/>
-          <p:cNvSpPr/>
-          <p:nvPr/>
-        </p:nvSpPr>
-        <p:spPr>
-          <a:xfrm>
-            <a:off x="8412480" y="4297680"/>
-            <a:ext cx="2788920" cy="640080"/>
-          </a:xfrm>
-          <a:prstGeom prst="rect">
-            <a:avLst/>
-          </a:prstGeom>
-          <a:noFill/>
-          <a:ln/>
-        </p:spPr>
-        <p:txBody>
-          <a:bodyPr wrap="square" lIns="0" tIns="0" rIns="0" bIns="0" rtlCol="0" anchor="ctr">
-            <a:normAutofit/>
-          </a:bodyPr>
-          <a:lstStyle/>
-          <a:p>
-            <a:pPr indent="0" marL="0">
-              <a:buNone/>
-            </a:pPr>
-            <a:r>
-              <a:rPr lang="en-US" sz="1150" dirty="0">
-                <a:solidFill>
-                  <a:srgbClr val="6B7280"/>
-                </a:solidFill>
-              </a:rPr>
-              <a:t>집중 타이머, Q&amp;A, 코드 스니펫으로 학습 전후의 행동까지 지원합니다.</a:t>
-            </a:r>
-            <a:endParaRPr lang="en-US" sz="1150" dirty="0"/>
+              <a:rPr lang="en-US" sz="1100" dirty="0">
+                <a:solidFill>
+                  <a:srgbClr val="FFFFFF"/>
+                </a:solidFill>
+              </a:rPr>
+              <a:t>완강률과 학습 기록</a:t>
+            </a:r>
+            <a:endParaRPr lang="en-US" sz="1100" dirty="0"/>
           </a:p>
         </p:txBody>
       </p:sp>
@@ -6332,7 +6993,7 @@
                   <a:srgbClr val="FF5A5F"/>
                 </a:solidFill>
               </a:rPr>
-              <a:t>ONE PLATFORM, THREE ROLES</a:t>
+              <a:t>PRODUCT</a:t>
             </a:r>
             <a:endParaRPr lang="en-US" sz="1000" dirty="0"/>
           </a:p>
@@ -6347,7 +7008,7 @@
         <p:spPr>
           <a:xfrm>
             <a:off x="640080" y="1371600"/>
-            <a:ext cx="6949440" cy="1417320"/>
+            <a:ext cx="5943600" cy="1371600"/>
           </a:xfrm>
           <a:prstGeom prst="rect">
             <a:avLst/>
@@ -6370,7 +7031,7 @@
                   <a:srgbClr val="222222"/>
                 </a:solidFill>
               </a:rPr>
-              <a:t>학생, 강사, 관리자가</a:t>
+              <a:t>학생에게는 단순하게.</a:t>
             </a:r>
             <a:endParaRPr lang="en-US" sz="3700" dirty="0"/>
           </a:p>
@@ -6384,7 +7045,7 @@
                   <a:srgbClr val="222222"/>
                 </a:solidFill>
               </a:rPr>
-              <a:t>같은 데이터를 봅니다.</a:t>
+              <a:t>기능은 충분하게.</a:t>
             </a:r>
             <a:endParaRPr lang="en-US" sz="3700" dirty="0"/>
           </a:p>
@@ -6392,56 +7053,18 @@
       </p:sp>
       <p:sp>
         <p:nvSpPr>
-          <p:cNvPr id="6" name="Text 4"/>
-          <p:cNvSpPr/>
-          <p:nvPr/>
-        </p:nvSpPr>
-        <p:spPr>
-          <a:xfrm>
-            <a:off x="667512" y="2788920"/>
-            <a:ext cx="6858000" cy="731520"/>
-          </a:xfrm>
-          <a:prstGeom prst="rect">
-            <a:avLst/>
-          </a:prstGeom>
-          <a:noFill/>
-          <a:ln/>
-        </p:spPr>
-        <p:txBody>
-          <a:bodyPr wrap="square" lIns="0" tIns="0" rIns="0" bIns="0" rtlCol="0" anchor="ctr">
-            <a:normAutofit/>
-          </a:bodyPr>
-          <a:lstStyle/>
-          <a:p>
-            <a:pPr indent="0" marL="0">
-              <a:buNone/>
-            </a:pPr>
-            <a:r>
-              <a:rPr lang="en-US" sz="1500" dirty="0">
-                <a:solidFill>
-                  <a:srgbClr val="6B7280"/>
-                </a:solidFill>
-              </a:rPr>
-              <a:t>역할은 다르지만 서비스 상태와 학습 결과는 하나의 데이터 흐름으로 연결됩니다.</a:t>
-            </a:r>
-            <a:endParaRPr lang="en-US" sz="1500" dirty="0"/>
-          </a:p>
-        </p:txBody>
-      </p:sp>
-      <p:sp>
-        <p:nvSpPr>
-          <p:cNvPr id="7" name="Shape 5"/>
-          <p:cNvSpPr/>
-          <p:nvPr/>
-        </p:nvSpPr>
-        <p:spPr>
-          <a:xfrm>
-            <a:off x="685800" y="3794760"/>
-            <a:ext cx="3337560" cy="1828800"/>
+          <p:cNvPr id="6" name="Shape 4"/>
+          <p:cNvSpPr/>
+          <p:nvPr/>
+        </p:nvSpPr>
+        <p:spPr>
+          <a:xfrm>
+            <a:off x="685800" y="2971800"/>
+            <a:ext cx="3337560" cy="2240280"/>
           </a:xfrm>
           <a:prstGeom prst="roundRect">
             <a:avLst>
-              <a:gd name="adj" fmla="val 4000"/>
+              <a:gd name="adj" fmla="val 3265"/>
             </a:avLst>
           </a:prstGeom>
           <a:solidFill>
@@ -6457,13 +7080,13 @@
       </p:sp>
       <p:sp>
         <p:nvSpPr>
-          <p:cNvPr id="8" name="Shape 6"/>
-          <p:cNvSpPr/>
-          <p:nvPr/>
-        </p:nvSpPr>
-        <p:spPr>
-          <a:xfrm>
-            <a:off x="960120" y="4069080"/>
+          <p:cNvPr id="7" name="Shape 5"/>
+          <p:cNvSpPr/>
+          <p:nvPr/>
+        </p:nvSpPr>
+        <p:spPr>
+          <a:xfrm>
+            <a:off x="960120" y="3246120"/>
             <a:ext cx="228600" cy="228600"/>
           </a:xfrm>
           <a:prstGeom prst="ellipse">
@@ -6482,13 +7105,13 @@
       </p:sp>
       <p:sp>
         <p:nvSpPr>
-          <p:cNvPr id="9" name="Text 7"/>
-          <p:cNvSpPr/>
-          <p:nvPr/>
-        </p:nvSpPr>
-        <p:spPr>
-          <a:xfrm>
-            <a:off x="960120" y="4544568"/>
+          <p:cNvPr id="8" name="Text 6"/>
+          <p:cNvSpPr/>
+          <p:nvPr/>
+        </p:nvSpPr>
+        <p:spPr>
+          <a:xfrm>
+            <a:off x="960120" y="3721608"/>
             <a:ext cx="2788920" cy="411480"/>
           </a:xfrm>
           <a:prstGeom prst="rect">
@@ -6512,7 +7135,7 @@
                   <a:srgbClr val="222222"/>
                 </a:solidFill>
               </a:rPr>
-              <a:t>학생</a:t>
+              <a:t>이어보기</a:t>
             </a:r>
             <a:endParaRPr lang="en-US" sz="1700" dirty="0"/>
           </a:p>
@@ -6520,14 +7143,14 @@
       </p:sp>
       <p:sp>
         <p:nvSpPr>
-          <p:cNvPr id="10" name="Text 8"/>
-          <p:cNvSpPr/>
-          <p:nvPr/>
-        </p:nvSpPr>
-        <p:spPr>
-          <a:xfrm>
-            <a:off x="960120" y="5120640"/>
-            <a:ext cx="2788920" cy="228600"/>
+          <p:cNvPr id="9" name="Text 7"/>
+          <p:cNvSpPr/>
+          <p:nvPr/>
+        </p:nvSpPr>
+        <p:spPr>
+          <a:xfrm>
+            <a:off x="960120" y="4297680"/>
+            <a:ext cx="2788920" cy="640080"/>
           </a:xfrm>
           <a:prstGeom prst="rect">
             <a:avLst/>
@@ -6550,54 +7173,26 @@
                   <a:srgbClr val="6B7280"/>
                 </a:solidFill>
               </a:rPr>
-              <a:t>강의 탐색 · 결제</a:t>
+              <a:t>마지막 학습 위치를 기억하고 다음 레슨으로 자연스럽게 연결합니다.</a:t>
             </a:r>
             <a:endParaRPr lang="en-US" sz="1150" dirty="0"/>
           </a:p>
-          <a:p>
-            <a:pPr indent="0" marL="0">
-              <a:buNone/>
-            </a:pPr>
-            <a:r>
-              <a:rPr lang="en-US" sz="1150" dirty="0">
-                <a:solidFill>
-                  <a:srgbClr val="6B7280"/>
-                </a:solidFill>
-              </a:rPr>
-              <a:t>진도 · 수강평</a:t>
-            </a:r>
-            <a:endParaRPr lang="en-US" sz="1150" dirty="0"/>
-          </a:p>
-          <a:p>
-            <a:pPr indent="0" marL="0">
-              <a:buNone/>
-            </a:pPr>
-            <a:r>
-              <a:rPr lang="en-US" sz="1150" dirty="0">
-                <a:solidFill>
-                  <a:srgbClr val="6B7280"/>
-                </a:solidFill>
-              </a:rPr>
-              <a:t>집중 기록</a:t>
-            </a:r>
-            <a:endParaRPr lang="en-US" sz="1150" dirty="0"/>
-          </a:p>
-        </p:txBody>
-      </p:sp>
-      <p:sp>
-        <p:nvSpPr>
-          <p:cNvPr id="11" name="Shape 9"/>
-          <p:cNvSpPr/>
-          <p:nvPr/>
-        </p:nvSpPr>
-        <p:spPr>
-          <a:xfrm>
-            <a:off x="4407408" y="3794760"/>
-            <a:ext cx="3337560" cy="1828800"/>
+        </p:txBody>
+      </p:sp>
+      <p:sp>
+        <p:nvSpPr>
+          <p:cNvPr id="10" name="Shape 8"/>
+          <p:cNvSpPr/>
+          <p:nvPr/>
+        </p:nvSpPr>
+        <p:spPr>
+          <a:xfrm>
+            <a:off x="4407408" y="2971800"/>
+            <a:ext cx="3337560" cy="2240280"/>
           </a:xfrm>
           <a:prstGeom prst="roundRect">
             <a:avLst>
-              <a:gd name="adj" fmla="val 4000"/>
+              <a:gd name="adj" fmla="val 3265"/>
             </a:avLst>
           </a:prstGeom>
           <a:solidFill>
@@ -6613,13 +7208,13 @@
       </p:sp>
       <p:sp>
         <p:nvSpPr>
-          <p:cNvPr id="12" name="Shape 10"/>
-          <p:cNvSpPr/>
-          <p:nvPr/>
-        </p:nvSpPr>
-        <p:spPr>
-          <a:xfrm>
-            <a:off x="4681728" y="4069080"/>
+          <p:cNvPr id="11" name="Shape 9"/>
+          <p:cNvSpPr/>
+          <p:nvPr/>
+        </p:nvSpPr>
+        <p:spPr>
+          <a:xfrm>
+            <a:off x="4681728" y="3246120"/>
             <a:ext cx="228600" cy="228600"/>
           </a:xfrm>
           <a:prstGeom prst="ellipse">
@@ -6638,13 +7233,13 @@
       </p:sp>
       <p:sp>
         <p:nvSpPr>
-          <p:cNvPr id="13" name="Text 11"/>
-          <p:cNvSpPr/>
-          <p:nvPr/>
-        </p:nvSpPr>
-        <p:spPr>
-          <a:xfrm>
-            <a:off x="4681728" y="4544568"/>
+          <p:cNvPr id="12" name="Text 10"/>
+          <p:cNvSpPr/>
+          <p:nvPr/>
+        </p:nvSpPr>
+        <p:spPr>
+          <a:xfrm>
+            <a:off x="4681728" y="3721608"/>
             <a:ext cx="2788920" cy="411480"/>
           </a:xfrm>
           <a:prstGeom prst="rect">
@@ -6668,7 +7263,7 @@
                   <a:srgbClr val="222222"/>
                 </a:solidFill>
               </a:rPr>
-              <a:t>강사</a:t>
+              <a:t>자동 진도 저장</a:t>
             </a:r>
             <a:endParaRPr lang="en-US" sz="1700" dirty="0"/>
           </a:p>
@@ -6676,14 +7271,14 @@
       </p:sp>
       <p:sp>
         <p:nvSpPr>
-          <p:cNvPr id="14" name="Text 12"/>
-          <p:cNvSpPr/>
-          <p:nvPr/>
-        </p:nvSpPr>
-        <p:spPr>
-          <a:xfrm>
-            <a:off x="4681728" y="5120640"/>
-            <a:ext cx="2788920" cy="228600"/>
+          <p:cNvPr id="13" name="Text 11"/>
+          <p:cNvSpPr/>
+          <p:nvPr/>
+        </p:nvSpPr>
+        <p:spPr>
+          <a:xfrm>
+            <a:off x="4681728" y="4297680"/>
+            <a:ext cx="2788920" cy="640080"/>
           </a:xfrm>
           <a:prstGeom prst="rect">
             <a:avLst/>
@@ -6706,54 +7301,26 @@
                   <a:srgbClr val="6B7280"/>
                 </a:solidFill>
               </a:rPr>
-              <a:t>강의와 레슨 CRUD</a:t>
+              <a:t>30초 단위 저장과 90% 완강 기준으로 실제 학습 상태를 반영합니다.</a:t>
             </a:r>
             <a:endParaRPr lang="en-US" sz="1150" dirty="0"/>
           </a:p>
-          <a:p>
-            <a:pPr indent="0" marL="0">
-              <a:buNone/>
-            </a:pPr>
-            <a:r>
-              <a:rPr lang="en-US" sz="1150" dirty="0">
-                <a:solidFill>
-                  <a:srgbClr val="6B7280"/>
-                </a:solidFill>
-              </a:rPr>
-              <a:t>수강생 · 매출</a:t>
-            </a:r>
-            <a:endParaRPr lang="en-US" sz="1150" dirty="0"/>
-          </a:p>
-          <a:p>
-            <a:pPr indent="0" marL="0">
-              <a:buNone/>
-            </a:pPr>
-            <a:r>
-              <a:rPr lang="en-US" sz="1150" dirty="0">
-                <a:solidFill>
-                  <a:srgbClr val="6B7280"/>
-                </a:solidFill>
-              </a:rPr>
-              <a:t>학습률 · 정산</a:t>
-            </a:r>
-            <a:endParaRPr lang="en-US" sz="1150" dirty="0"/>
-          </a:p>
-        </p:txBody>
-      </p:sp>
-      <p:sp>
-        <p:nvSpPr>
-          <p:cNvPr id="15" name="Shape 13"/>
-          <p:cNvSpPr/>
-          <p:nvPr/>
-        </p:nvSpPr>
-        <p:spPr>
-          <a:xfrm>
-            <a:off x="8138160" y="3794760"/>
-            <a:ext cx="3337560" cy="1828800"/>
+        </p:txBody>
+      </p:sp>
+      <p:sp>
+        <p:nvSpPr>
+          <p:cNvPr id="14" name="Shape 12"/>
+          <p:cNvSpPr/>
+          <p:nvPr/>
+        </p:nvSpPr>
+        <p:spPr>
+          <a:xfrm>
+            <a:off x="8138160" y="2971800"/>
+            <a:ext cx="3337560" cy="2240280"/>
           </a:xfrm>
           <a:prstGeom prst="roundRect">
             <a:avLst>
-              <a:gd name="adj" fmla="val 4000"/>
+              <a:gd name="adj" fmla="val 3265"/>
             </a:avLst>
           </a:prstGeom>
           <a:solidFill>
@@ -6769,13 +7336,13 @@
       </p:sp>
       <p:sp>
         <p:nvSpPr>
-          <p:cNvPr id="16" name="Shape 14"/>
-          <p:cNvSpPr/>
-          <p:nvPr/>
-        </p:nvSpPr>
-        <p:spPr>
-          <a:xfrm>
-            <a:off x="8412480" y="4069080"/>
+          <p:cNvPr id="15" name="Shape 13"/>
+          <p:cNvSpPr/>
+          <p:nvPr/>
+        </p:nvSpPr>
+        <p:spPr>
+          <a:xfrm>
+            <a:off x="8412480" y="3246120"/>
             <a:ext cx="228600" cy="228600"/>
           </a:xfrm>
           <a:prstGeom prst="ellipse">
@@ -6794,13 +7361,13 @@
       </p:sp>
       <p:sp>
         <p:nvSpPr>
-          <p:cNvPr id="17" name="Text 15"/>
-          <p:cNvSpPr/>
-          <p:nvPr/>
-        </p:nvSpPr>
-        <p:spPr>
-          <a:xfrm>
-            <a:off x="8412480" y="4544568"/>
+          <p:cNvPr id="16" name="Text 14"/>
+          <p:cNvSpPr/>
+          <p:nvPr/>
+        </p:nvSpPr>
+        <p:spPr>
+          <a:xfrm>
+            <a:off x="8412480" y="3721608"/>
             <a:ext cx="2788920" cy="411480"/>
           </a:xfrm>
           <a:prstGeom prst="rect">
@@ -6824,7 +7391,7 @@
                   <a:srgbClr val="222222"/>
                 </a:solidFill>
               </a:rPr>
-              <a:t>관리자</a:t>
+              <a:t>집중과 질문</a:t>
             </a:r>
             <a:endParaRPr lang="en-US" sz="1700" dirty="0"/>
           </a:p>
@@ -6832,14 +7399,14 @@
       </p:sp>
       <p:sp>
         <p:nvSpPr>
-          <p:cNvPr id="18" name="Text 16"/>
-          <p:cNvSpPr/>
-          <p:nvPr/>
-        </p:nvSpPr>
-        <p:spPr>
-          <a:xfrm>
-            <a:off x="8412480" y="5120640"/>
-            <a:ext cx="2788920" cy="228600"/>
+          <p:cNvPr id="17" name="Text 15"/>
+          <p:cNvSpPr/>
+          <p:nvPr/>
+        </p:nvSpPr>
+        <p:spPr>
+          <a:xfrm>
+            <a:off x="8412480" y="4297680"/>
+            <a:ext cx="2788920" cy="640080"/>
           </a:xfrm>
           <a:prstGeom prst="rect">
             <a:avLst/>
@@ -6862,35 +7429,7 @@
                   <a:srgbClr val="6B7280"/>
                 </a:solidFill>
               </a:rPr>
-              <a:t>회원과 권한</a:t>
-            </a:r>
-            <a:endParaRPr lang="en-US" sz="1150" dirty="0"/>
-          </a:p>
-          <a:p>
-            <a:pPr indent="0" marL="0">
-              <a:buNone/>
-            </a:pPr>
-            <a:r>
-              <a:rPr lang="en-US" sz="1150" dirty="0">
-                <a:solidFill>
-                  <a:srgbClr val="6B7280"/>
-                </a:solidFill>
-              </a:rPr>
-              <a:t>결제 · 환불</a:t>
-            </a:r>
-            <a:endParaRPr lang="en-US" sz="1150" dirty="0"/>
-          </a:p>
-          <a:p>
-            <a:pPr indent="0" marL="0">
-              <a:buNone/>
-            </a:pPr>
-            <a:r>
-              <a:rPr lang="en-US" sz="1150" dirty="0">
-                <a:solidFill>
-                  <a:srgbClr val="6B7280"/>
-                </a:solidFill>
-              </a:rPr>
-              <a:t>로그 · 배치 · Webhook</a:t>
+              <a:t>집중 타이머, Q&amp;A, 코드 스니펫으로 학습 전후의 행동까지 지원합니다.</a:t>
             </a:r>
             <a:endParaRPr lang="en-US" sz="1150" dirty="0"/>
           </a:p>
@@ -7030,7 +7569,7 @@
                   <a:srgbClr val="FF5A5F"/>
                 </a:solidFill>
               </a:rPr>
-              <a:t>BUSINESS MODEL</a:t>
+              <a:t>ONE PLATFORM, THREE ROLES</a:t>
             </a:r>
             <a:endParaRPr lang="en-US" sz="1000" dirty="0"/>
           </a:p>
@@ -7045,7 +7584,7 @@
         <p:spPr>
           <a:xfrm>
             <a:off x="640080" y="1371600"/>
-            <a:ext cx="7406640" cy="1417320"/>
+            <a:ext cx="6949440" cy="1417320"/>
           </a:xfrm>
           <a:prstGeom prst="rect">
             <a:avLst/>
@@ -7068,7 +7607,7 @@
                   <a:srgbClr val="222222"/>
                 </a:solidFill>
               </a:rPr>
-              <a:t>좋은 강의가 판매될수록</a:t>
+              <a:t>학생, 강사, 관리자가</a:t>
             </a:r>
             <a:endParaRPr lang="en-US" sz="3700" dirty="0"/>
           </a:p>
@@ -7082,7 +7621,7 @@
                   <a:srgbClr val="222222"/>
                 </a:solidFill>
               </a:rPr>
-              <a:t>플랫폼도 함께 성장합니다.</a:t>
+              <a:t>같은 데이터를 봅니다.</a:t>
             </a:r>
             <a:endParaRPr lang="en-US" sz="3700" dirty="0"/>
           </a:p>
@@ -7120,7 +7659,7 @@
                   <a:srgbClr val="6B7280"/>
                 </a:solidFill>
               </a:rPr>
-              <a:t>강의 결제 수익을 기반으로 강사 정산과 플랫폼 수수료를 투명하게 계산합니다.</a:t>
+              <a:t>역할은 다르지만 서비스 상태와 학습 결과는 하나의 데이터 흐름으로 연결됩니다.</a:t>
             </a:r>
             <a:endParaRPr lang="en-US" sz="1500" dirty="0"/>
           </a:p>
@@ -7128,14 +7667,66 @@
       </p:sp>
       <p:sp>
         <p:nvSpPr>
-          <p:cNvPr id="7" name="Text 5"/>
-          <p:cNvSpPr/>
-          <p:nvPr/>
-        </p:nvSpPr>
-        <p:spPr>
-          <a:xfrm>
-            <a:off x="685800" y="4023360"/>
-            <a:ext cx="2560320" cy="685800"/>
+          <p:cNvPr id="7" name="Shape 5"/>
+          <p:cNvSpPr/>
+          <p:nvPr/>
+        </p:nvSpPr>
+        <p:spPr>
+          <a:xfrm>
+            <a:off x="685800" y="3794760"/>
+            <a:ext cx="3337560" cy="1828800"/>
+          </a:xfrm>
+          <a:prstGeom prst="roundRect">
+            <a:avLst>
+              <a:gd name="adj" fmla="val 4000"/>
+            </a:avLst>
+          </a:prstGeom>
+          <a:solidFill>
+            <a:srgbClr val="FFFFFF"/>
+          </a:solidFill>
+          <a:ln w="12700">
+            <a:solidFill>
+              <a:srgbClr val="E8E8E8"/>
+            </a:solidFill>
+            <a:prstDash val="solid"/>
+          </a:ln>
+        </p:spPr>
+      </p:sp>
+      <p:sp>
+        <p:nvSpPr>
+          <p:cNvPr id="8" name="Shape 6"/>
+          <p:cNvSpPr/>
+          <p:nvPr/>
+        </p:nvSpPr>
+        <p:spPr>
+          <a:xfrm>
+            <a:off x="960120" y="4069080"/>
+            <a:ext cx="228600" cy="228600"/>
+          </a:xfrm>
+          <a:prstGeom prst="ellipse">
+            <a:avLst/>
+          </a:prstGeom>
+          <a:solidFill>
+            <a:srgbClr val="FF5A5F"/>
+          </a:solidFill>
+          <a:ln w="12700">
+            <a:solidFill>
+              <a:srgbClr val="FF5A5F"/>
+            </a:solidFill>
+            <a:prstDash val="solid"/>
+          </a:ln>
+        </p:spPr>
+      </p:sp>
+      <p:sp>
+        <p:nvSpPr>
+          <p:cNvPr id="9" name="Text 7"/>
+          <p:cNvSpPr/>
+          <p:nvPr/>
+        </p:nvSpPr>
+        <p:spPr>
+          <a:xfrm>
+            <a:off x="960120" y="4544568"/>
+            <a:ext cx="2788920" cy="411480"/>
           </a:xfrm>
           <a:prstGeom prst="rect">
             <a:avLst/>
@@ -7153,27 +7744,27 @@
               <a:buNone/>
             </a:pPr>
             <a:r>
-              <a:rPr lang="en-US" sz="3400" b="1" dirty="0">
-                <a:solidFill>
-                  <a:srgbClr val="FF5A5F"/>
-                </a:solidFill>
-              </a:rPr>
-              <a:t>Toss</a:t>
-            </a:r>
-            <a:endParaRPr lang="en-US" sz="3400" dirty="0"/>
-          </a:p>
-        </p:txBody>
-      </p:sp>
-      <p:sp>
-        <p:nvSpPr>
-          <p:cNvPr id="8" name="Text 6"/>
-          <p:cNvSpPr/>
-          <p:nvPr/>
-        </p:nvSpPr>
-        <p:spPr>
-          <a:xfrm>
-            <a:off x="685800" y="4773168"/>
-            <a:ext cx="2560320" cy="457200"/>
+              <a:rPr lang="en-US" sz="1700" b="1" dirty="0">
+                <a:solidFill>
+                  <a:srgbClr val="222222"/>
+                </a:solidFill>
+              </a:rPr>
+              <a:t>학생</a:t>
+            </a:r>
+            <a:endParaRPr lang="en-US" sz="1700" dirty="0"/>
+          </a:p>
+        </p:txBody>
+      </p:sp>
+      <p:sp>
+        <p:nvSpPr>
+          <p:cNvPr id="10" name="Text 8"/>
+          <p:cNvSpPr/>
+          <p:nvPr/>
+        </p:nvSpPr>
+        <p:spPr>
+          <a:xfrm>
+            <a:off x="960120" y="5120640"/>
+            <a:ext cx="2788920" cy="228600"/>
           </a:xfrm>
           <a:prstGeom prst="rect">
             <a:avLst/>
@@ -7191,27 +7782,107 @@
               <a:buNone/>
             </a:pPr>
             <a:r>
-              <a:rPr lang="en-US" sz="1200" dirty="0">
+              <a:rPr lang="en-US" sz="1150" dirty="0">
                 <a:solidFill>
                   <a:srgbClr val="6B7280"/>
                 </a:solidFill>
               </a:rPr>
-              <a:t>실결제 승인·취소 API</a:t>
-            </a:r>
-            <a:endParaRPr lang="en-US" sz="1200" dirty="0"/>
-          </a:p>
-        </p:txBody>
-      </p:sp>
-      <p:sp>
-        <p:nvSpPr>
-          <p:cNvPr id="9" name="Text 7"/>
-          <p:cNvSpPr/>
-          <p:nvPr/>
-        </p:nvSpPr>
-        <p:spPr>
-          <a:xfrm>
-            <a:off x="3794760" y="4023360"/>
-            <a:ext cx="2560320" cy="685800"/>
+              <a:t>강의 탐색 · 결제</a:t>
+            </a:r>
+            <a:endParaRPr lang="en-US" sz="1150" dirty="0"/>
+          </a:p>
+          <a:p>
+            <a:pPr indent="0" marL="0">
+              <a:buNone/>
+            </a:pPr>
+            <a:r>
+              <a:rPr lang="en-US" sz="1150" dirty="0">
+                <a:solidFill>
+                  <a:srgbClr val="6B7280"/>
+                </a:solidFill>
+              </a:rPr>
+              <a:t>진도 · 수강평</a:t>
+            </a:r>
+            <a:endParaRPr lang="en-US" sz="1150" dirty="0"/>
+          </a:p>
+          <a:p>
+            <a:pPr indent="0" marL="0">
+              <a:buNone/>
+            </a:pPr>
+            <a:r>
+              <a:rPr lang="en-US" sz="1150" dirty="0">
+                <a:solidFill>
+                  <a:srgbClr val="6B7280"/>
+                </a:solidFill>
+              </a:rPr>
+              <a:t>집중 기록</a:t>
+            </a:r>
+            <a:endParaRPr lang="en-US" sz="1150" dirty="0"/>
+          </a:p>
+        </p:txBody>
+      </p:sp>
+      <p:sp>
+        <p:nvSpPr>
+          <p:cNvPr id="11" name="Shape 9"/>
+          <p:cNvSpPr/>
+          <p:nvPr/>
+        </p:nvSpPr>
+        <p:spPr>
+          <a:xfrm>
+            <a:off x="4407408" y="3794760"/>
+            <a:ext cx="3337560" cy="1828800"/>
+          </a:xfrm>
+          <a:prstGeom prst="roundRect">
+            <a:avLst>
+              <a:gd name="adj" fmla="val 4000"/>
+            </a:avLst>
+          </a:prstGeom>
+          <a:solidFill>
+            <a:srgbClr val="FFFFFF"/>
+          </a:solidFill>
+          <a:ln w="12700">
+            <a:solidFill>
+              <a:srgbClr val="E8E8E8"/>
+            </a:solidFill>
+            <a:prstDash val="solid"/>
+          </a:ln>
+        </p:spPr>
+      </p:sp>
+      <p:sp>
+        <p:nvSpPr>
+          <p:cNvPr id="12" name="Shape 10"/>
+          <p:cNvSpPr/>
+          <p:nvPr/>
+        </p:nvSpPr>
+        <p:spPr>
+          <a:xfrm>
+            <a:off x="4681728" y="4069080"/>
+            <a:ext cx="228600" cy="228600"/>
+          </a:xfrm>
+          <a:prstGeom prst="ellipse">
+            <a:avLst/>
+          </a:prstGeom>
+          <a:solidFill>
+            <a:srgbClr val="4568DC"/>
+          </a:solidFill>
+          <a:ln w="12700">
+            <a:solidFill>
+              <a:srgbClr val="4568DC"/>
+            </a:solidFill>
+            <a:prstDash val="solid"/>
+          </a:ln>
+        </p:spPr>
+      </p:sp>
+      <p:sp>
+        <p:nvSpPr>
+          <p:cNvPr id="13" name="Text 11"/>
+          <p:cNvSpPr/>
+          <p:nvPr/>
+        </p:nvSpPr>
+        <p:spPr>
+          <a:xfrm>
+            <a:off x="4681728" y="4544568"/>
+            <a:ext cx="2788920" cy="411480"/>
           </a:xfrm>
           <a:prstGeom prst="rect">
             <a:avLst/>
@@ -7229,27 +7900,27 @@
               <a:buNone/>
             </a:pPr>
             <a:r>
-              <a:rPr lang="en-US" sz="3400" b="1" dirty="0">
-                <a:solidFill>
-                  <a:srgbClr val="4568DC"/>
-                </a:solidFill>
-              </a:rPr>
-              <a:t>100%</a:t>
-            </a:r>
-            <a:endParaRPr lang="en-US" sz="3400" dirty="0"/>
-          </a:p>
-        </p:txBody>
-      </p:sp>
-      <p:sp>
-        <p:nvSpPr>
-          <p:cNvPr id="10" name="Text 8"/>
-          <p:cNvSpPr/>
-          <p:nvPr/>
-        </p:nvSpPr>
-        <p:spPr>
-          <a:xfrm>
-            <a:off x="3794760" y="4773168"/>
-            <a:ext cx="2560320" cy="457200"/>
+              <a:rPr lang="en-US" sz="1700" b="1" dirty="0">
+                <a:solidFill>
+                  <a:srgbClr val="222222"/>
+                </a:solidFill>
+              </a:rPr>
+              <a:t>강사</a:t>
+            </a:r>
+            <a:endParaRPr lang="en-US" sz="1700" dirty="0"/>
+          </a:p>
+        </p:txBody>
+      </p:sp>
+      <p:sp>
+        <p:nvSpPr>
+          <p:cNvPr id="14" name="Text 12"/>
+          <p:cNvSpPr/>
+          <p:nvPr/>
+        </p:nvSpPr>
+        <p:spPr>
+          <a:xfrm>
+            <a:off x="4681728" y="5120640"/>
+            <a:ext cx="2788920" cy="228600"/>
           </a:xfrm>
           <a:prstGeom prst="rect">
             <a:avLst/>
@@ -7267,27 +7938,107 @@
               <a:buNone/>
             </a:pPr>
             <a:r>
-              <a:rPr lang="en-US" sz="1200" dirty="0">
+              <a:rPr lang="en-US" sz="1150" dirty="0">
                 <a:solidFill>
                   <a:srgbClr val="6B7280"/>
                 </a:solidFill>
               </a:rPr>
-              <a:t>서버 기준 금액 재검증</a:t>
-            </a:r>
-            <a:endParaRPr lang="en-US" sz="1200" dirty="0"/>
-          </a:p>
-        </p:txBody>
-      </p:sp>
-      <p:sp>
-        <p:nvSpPr>
-          <p:cNvPr id="11" name="Text 9"/>
-          <p:cNvSpPr/>
-          <p:nvPr/>
-        </p:nvSpPr>
-        <p:spPr>
-          <a:xfrm>
-            <a:off x="6903720" y="4023360"/>
-            <a:ext cx="2560320" cy="685800"/>
+              <a:t>강의와 레슨 CRUD</a:t>
+            </a:r>
+            <a:endParaRPr lang="en-US" sz="1150" dirty="0"/>
+          </a:p>
+          <a:p>
+            <a:pPr indent="0" marL="0">
+              <a:buNone/>
+            </a:pPr>
+            <a:r>
+              <a:rPr lang="en-US" sz="1150" dirty="0">
+                <a:solidFill>
+                  <a:srgbClr val="6B7280"/>
+                </a:solidFill>
+              </a:rPr>
+              <a:t>수강생 · 매출</a:t>
+            </a:r>
+            <a:endParaRPr lang="en-US" sz="1150" dirty="0"/>
+          </a:p>
+          <a:p>
+            <a:pPr indent="0" marL="0">
+              <a:buNone/>
+            </a:pPr>
+            <a:r>
+              <a:rPr lang="en-US" sz="1150" dirty="0">
+                <a:solidFill>
+                  <a:srgbClr val="6B7280"/>
+                </a:solidFill>
+              </a:rPr>
+              <a:t>학습률 · 정산</a:t>
+            </a:r>
+            <a:endParaRPr lang="en-US" sz="1150" dirty="0"/>
+          </a:p>
+        </p:txBody>
+      </p:sp>
+      <p:sp>
+        <p:nvSpPr>
+          <p:cNvPr id="15" name="Shape 13"/>
+          <p:cNvSpPr/>
+          <p:nvPr/>
+        </p:nvSpPr>
+        <p:spPr>
+          <a:xfrm>
+            <a:off x="8138160" y="3794760"/>
+            <a:ext cx="3337560" cy="1828800"/>
+          </a:xfrm>
+          <a:prstGeom prst="roundRect">
+            <a:avLst>
+              <a:gd name="adj" fmla="val 4000"/>
+            </a:avLst>
+          </a:prstGeom>
+          <a:solidFill>
+            <a:srgbClr val="FFFFFF"/>
+          </a:solidFill>
+          <a:ln w="12700">
+            <a:solidFill>
+              <a:srgbClr val="E8E8E8"/>
+            </a:solidFill>
+            <a:prstDash val="solid"/>
+          </a:ln>
+        </p:spPr>
+      </p:sp>
+      <p:sp>
+        <p:nvSpPr>
+          <p:cNvPr id="16" name="Shape 14"/>
+          <p:cNvSpPr/>
+          <p:nvPr/>
+        </p:nvSpPr>
+        <p:spPr>
+          <a:xfrm>
+            <a:off x="8412480" y="4069080"/>
+            <a:ext cx="228600" cy="228600"/>
+          </a:xfrm>
+          <a:prstGeom prst="ellipse">
+            <a:avLst/>
+          </a:prstGeom>
+          <a:solidFill>
+            <a:srgbClr val="00A86B"/>
+          </a:solidFill>
+          <a:ln w="12700">
+            <a:solidFill>
+              <a:srgbClr val="00A86B"/>
+            </a:solidFill>
+            <a:prstDash val="solid"/>
+          </a:ln>
+        </p:spPr>
+      </p:sp>
+      <p:sp>
+        <p:nvSpPr>
+          <p:cNvPr id="17" name="Text 15"/>
+          <p:cNvSpPr/>
+          <p:nvPr/>
+        </p:nvSpPr>
+        <p:spPr>
+          <a:xfrm>
+            <a:off x="8412480" y="4544568"/>
+            <a:ext cx="2788920" cy="411480"/>
           </a:xfrm>
           <a:prstGeom prst="rect">
             <a:avLst/>
@@ -7305,27 +8056,27 @@
               <a:buNone/>
             </a:pPr>
             <a:r>
-              <a:rPr lang="en-US" sz="3400" b="1" dirty="0">
-                <a:solidFill>
-                  <a:srgbClr val="00A86B"/>
-                </a:solidFill>
-              </a:rPr>
-              <a:t>자동</a:t>
-            </a:r>
-            <a:endParaRPr lang="en-US" sz="3400" dirty="0"/>
-          </a:p>
-        </p:txBody>
-      </p:sp>
-      <p:sp>
-        <p:nvSpPr>
-          <p:cNvPr id="12" name="Text 10"/>
-          <p:cNvSpPr/>
-          <p:nvPr/>
-        </p:nvSpPr>
-        <p:spPr>
-          <a:xfrm>
-            <a:off x="6903720" y="4773168"/>
-            <a:ext cx="2560320" cy="457200"/>
+              <a:rPr lang="en-US" sz="1700" b="1" dirty="0">
+                <a:solidFill>
+                  <a:srgbClr val="222222"/>
+                </a:solidFill>
+              </a:rPr>
+              <a:t>관리자</a:t>
+            </a:r>
+            <a:endParaRPr lang="en-US" sz="1700" dirty="0"/>
+          </a:p>
+        </p:txBody>
+      </p:sp>
+      <p:sp>
+        <p:nvSpPr>
+          <p:cNvPr id="18" name="Text 16"/>
+          <p:cNvSpPr/>
+          <p:nvPr/>
+        </p:nvSpPr>
+        <p:spPr>
+          <a:xfrm>
+            <a:off x="8412480" y="5120640"/>
+            <a:ext cx="2788920" cy="228600"/>
           </a:xfrm>
           <a:prstGeom prst="rect">
             <a:avLst/>
@@ -7343,50 +8094,42 @@
               <a:buNone/>
             </a:pPr>
             <a:r>
-              <a:rPr lang="en-US" sz="1200" dirty="0">
+              <a:rPr lang="en-US" sz="1150" dirty="0">
                 <a:solidFill>
                   <a:srgbClr val="6B7280"/>
                 </a:solidFill>
               </a:rPr>
-              <a:t>월별 강사 정산 계산</a:t>
-            </a:r>
-            <a:endParaRPr lang="en-US" sz="1200" dirty="0"/>
-          </a:p>
-        </p:txBody>
-      </p:sp>
-      <p:sp>
-        <p:nvSpPr>
-          <p:cNvPr id="13" name="Text 11"/>
-          <p:cNvSpPr/>
-          <p:nvPr/>
-        </p:nvSpPr>
-        <p:spPr>
-          <a:xfrm>
-            <a:off x="685800" y="5669280"/>
-            <a:ext cx="10698480" cy="365760"/>
-          </a:xfrm>
-          <a:prstGeom prst="rect">
-            <a:avLst/>
-          </a:prstGeom>
-          <a:noFill/>
-          <a:ln/>
-        </p:spPr>
-        <p:txBody>
-          <a:bodyPr wrap="square" lIns="0" tIns="0" rIns="0" bIns="0" rtlCol="0" anchor="ctr"/>
-          <a:lstStyle/>
-          <a:p>
-            <a:pPr algn="ctr" indent="0" marL="0">
-              <a:buNone/>
-            </a:pPr>
-            <a:r>
-              <a:rPr lang="en-US" sz="1400" b="1" dirty="0">
-                <a:solidFill>
-                  <a:srgbClr val="222222"/>
-                </a:solidFill>
-              </a:rPr>
-              <a:t>주문 생성  →  결제위젯  →  서버 승인  →  수강 등록  →  정산</a:t>
-            </a:r>
-            <a:endParaRPr lang="en-US" sz="1400" dirty="0"/>
+              <a:t>회원과 권한</a:t>
+            </a:r>
+            <a:endParaRPr lang="en-US" sz="1150" dirty="0"/>
+          </a:p>
+          <a:p>
+            <a:pPr indent="0" marL="0">
+              <a:buNone/>
+            </a:pPr>
+            <a:r>
+              <a:rPr lang="en-US" sz="1150" dirty="0">
+                <a:solidFill>
+                  <a:srgbClr val="6B7280"/>
+                </a:solidFill>
+              </a:rPr>
+              <a:t>결제 · 환불</a:t>
+            </a:r>
+            <a:endParaRPr lang="en-US" sz="1150" dirty="0"/>
+          </a:p>
+          <a:p>
+            <a:pPr indent="0" marL="0">
+              <a:buNone/>
+            </a:pPr>
+            <a:r>
+              <a:rPr lang="en-US" sz="1150" dirty="0">
+                <a:solidFill>
+                  <a:srgbClr val="6B7280"/>
+                </a:solidFill>
+              </a:rPr>
+              <a:t>로그 · 배치 · Webhook</a:t>
+            </a:r>
+            <a:endParaRPr lang="en-US" sz="1150" dirty="0"/>
           </a:p>
         </p:txBody>
       </p:sp>
@@ -7524,7 +8267,7 @@
                   <a:srgbClr val="FF5A5F"/>
                 </a:solidFill>
               </a:rPr>
-              <a:t>BUILT IN THREE STAGES</a:t>
+              <a:t>BUSINESS MODEL</a:t>
             </a:r>
             <a:endParaRPr lang="en-US" sz="1000" dirty="0"/>
           </a:p>
@@ -7539,7 +8282,7 @@
         <p:spPr>
           <a:xfrm>
             <a:off x="640080" y="1371600"/>
-            <a:ext cx="6858000" cy="1417320"/>
+            <a:ext cx="7406640" cy="1417320"/>
           </a:xfrm>
           <a:prstGeom prst="rect">
             <a:avLst/>
@@ -7562,7 +8305,7 @@
                   <a:srgbClr val="222222"/>
                 </a:solidFill>
               </a:rPr>
-              <a:t>과제 요구사항을</a:t>
+              <a:t>좋은 강의가 판매될수록</a:t>
             </a:r>
             <a:endParaRPr lang="en-US" sz="3700" dirty="0"/>
           </a:p>
@@ -7576,7 +8319,7 @@
                   <a:srgbClr val="222222"/>
                 </a:solidFill>
               </a:rPr>
-              <a:t>운영 가능한 제품으로 확장했습니다.</a:t>
+              <a:t>플랫폼도 함께 성장합니다.</a:t>
             </a:r>
             <a:endParaRPr lang="en-US" sz="3700" dirty="0"/>
           </a:p>
@@ -7584,66 +8327,14 @@
       </p:sp>
       <p:sp>
         <p:nvSpPr>
-          <p:cNvPr id="6" name="Shape 4"/>
-          <p:cNvSpPr/>
-          <p:nvPr/>
-        </p:nvSpPr>
-        <p:spPr>
-          <a:xfrm>
-            <a:off x="685800" y="3063240"/>
-            <a:ext cx="3337560" cy="2331720"/>
-          </a:xfrm>
-          <a:prstGeom prst="roundRect">
-            <a:avLst>
-              <a:gd name="adj" fmla="val 3137"/>
-            </a:avLst>
-          </a:prstGeom>
-          <a:solidFill>
-            <a:srgbClr val="FFFFFF"/>
-          </a:solidFill>
-          <a:ln w="12700">
-            <a:solidFill>
-              <a:srgbClr val="E8E8E8"/>
-            </a:solidFill>
-            <a:prstDash val="solid"/>
-          </a:ln>
-        </p:spPr>
-      </p:sp>
-      <p:sp>
-        <p:nvSpPr>
-          <p:cNvPr id="7" name="Shape 5"/>
-          <p:cNvSpPr/>
-          <p:nvPr/>
-        </p:nvSpPr>
-        <p:spPr>
-          <a:xfrm>
-            <a:off x="960120" y="3337560"/>
-            <a:ext cx="228600" cy="228600"/>
-          </a:xfrm>
-          <a:prstGeom prst="ellipse">
-            <a:avLst/>
-          </a:prstGeom>
-          <a:solidFill>
-            <a:srgbClr val="FF5A5F"/>
-          </a:solidFill>
-          <a:ln w="12700">
-            <a:solidFill>
-              <a:srgbClr val="FF5A5F"/>
-            </a:solidFill>
-            <a:prstDash val="solid"/>
-          </a:ln>
-        </p:spPr>
-      </p:sp>
-      <p:sp>
-        <p:nvSpPr>
-          <p:cNvPr id="8" name="Text 6"/>
-          <p:cNvSpPr/>
-          <p:nvPr/>
-        </p:nvSpPr>
-        <p:spPr>
-          <a:xfrm>
-            <a:off x="960120" y="3813048"/>
-            <a:ext cx="2788920" cy="411480"/>
+          <p:cNvPr id="6" name="Text 4"/>
+          <p:cNvSpPr/>
+          <p:nvPr/>
+        </p:nvSpPr>
+        <p:spPr>
+          <a:xfrm>
+            <a:off x="667512" y="2788920"/>
+            <a:ext cx="6858000" cy="731520"/>
           </a:xfrm>
           <a:prstGeom prst="rect">
             <a:avLst/>
@@ -7661,27 +8352,27 @@
               <a:buNone/>
             </a:pPr>
             <a:r>
-              <a:rPr lang="en-US" sz="1700" b="1" dirty="0">
-                <a:solidFill>
-                  <a:srgbClr val="222222"/>
-                </a:solidFill>
-              </a:rPr>
-              <a:t>P1 · 서비스</a:t>
-            </a:r>
-            <a:endParaRPr lang="en-US" sz="1700" dirty="0"/>
-          </a:p>
-        </p:txBody>
-      </p:sp>
-      <p:sp>
-        <p:nvSpPr>
-          <p:cNvPr id="9" name="Text 7"/>
-          <p:cNvSpPr/>
-          <p:nvPr/>
-        </p:nvSpPr>
-        <p:spPr>
-          <a:xfrm>
-            <a:off x="960120" y="4389120"/>
-            <a:ext cx="2788920" cy="731520"/>
+              <a:rPr lang="en-US" sz="1500" dirty="0">
+                <a:solidFill>
+                  <a:srgbClr val="6B7280"/>
+                </a:solidFill>
+              </a:rPr>
+              <a:t>강의 결제 수익을 기반으로 강사 정산과 플랫폼 수수료를 투명하게 계산합니다.</a:t>
+            </a:r>
+            <a:endParaRPr lang="en-US" sz="1500" dirty="0"/>
+          </a:p>
+        </p:txBody>
+      </p:sp>
+      <p:sp>
+        <p:nvSpPr>
+          <p:cNvPr id="7" name="Text 5"/>
+          <p:cNvSpPr/>
+          <p:nvPr/>
+        </p:nvSpPr>
+        <p:spPr>
+          <a:xfrm>
+            <a:off x="685800" y="4023360"/>
+            <a:ext cx="2560320" cy="685800"/>
           </a:xfrm>
           <a:prstGeom prst="rect">
             <a:avLst/>
@@ -7699,107 +8390,27 @@
               <a:buNone/>
             </a:pPr>
             <a:r>
-              <a:rPr lang="en-US" sz="1150" dirty="0">
-                <a:solidFill>
-                  <a:srgbClr val="6B7280"/>
-                </a:solidFill>
-              </a:rPr>
-              <a:t>모바일 프론트엔드</a:t>
-            </a:r>
-            <a:endParaRPr lang="en-US" sz="1150" dirty="0"/>
-          </a:p>
-          <a:p>
-            <a:pPr indent="0" marL="0">
-              <a:buNone/>
-            </a:pPr>
-            <a:r>
-              <a:rPr lang="en-US" sz="1150" dirty="0">
-                <a:solidFill>
-                  <a:srgbClr val="6B7280"/>
-                </a:solidFill>
-              </a:rPr>
-              <a:t>백엔드 API와 CRUD</a:t>
-            </a:r>
-            <a:endParaRPr lang="en-US" sz="1150" dirty="0"/>
-          </a:p>
-          <a:p>
-            <a:pPr indent="0" marL="0">
-              <a:buNone/>
-            </a:pPr>
-            <a:r>
-              <a:rPr lang="en-US" sz="1150" dirty="0">
-                <a:solidFill>
-                  <a:srgbClr val="6B7280"/>
-                </a:solidFill>
-              </a:rPr>
-              <a:t>MySQL 영구 저장</a:t>
-            </a:r>
-            <a:endParaRPr lang="en-US" sz="1150" dirty="0"/>
-          </a:p>
-        </p:txBody>
-      </p:sp>
-      <p:sp>
-        <p:nvSpPr>
-          <p:cNvPr id="10" name="Shape 8"/>
-          <p:cNvSpPr/>
-          <p:nvPr/>
-        </p:nvSpPr>
-        <p:spPr>
-          <a:xfrm>
-            <a:off x="4407408" y="3063240"/>
-            <a:ext cx="3337560" cy="2331720"/>
-          </a:xfrm>
-          <a:prstGeom prst="roundRect">
-            <a:avLst>
-              <a:gd name="adj" fmla="val 3137"/>
-            </a:avLst>
-          </a:prstGeom>
-          <a:solidFill>
-            <a:srgbClr val="FFFFFF"/>
-          </a:solidFill>
-          <a:ln w="12700">
-            <a:solidFill>
-              <a:srgbClr val="E8E8E8"/>
-            </a:solidFill>
-            <a:prstDash val="solid"/>
-          </a:ln>
-        </p:spPr>
-      </p:sp>
-      <p:sp>
-        <p:nvSpPr>
-          <p:cNvPr id="11" name="Shape 9"/>
-          <p:cNvSpPr/>
-          <p:nvPr/>
-        </p:nvSpPr>
-        <p:spPr>
-          <a:xfrm>
-            <a:off x="4681728" y="3337560"/>
-            <a:ext cx="228600" cy="228600"/>
-          </a:xfrm>
-          <a:prstGeom prst="ellipse">
-            <a:avLst/>
-          </a:prstGeom>
-          <a:solidFill>
-            <a:srgbClr val="4568DC"/>
-          </a:solidFill>
-          <a:ln w="12700">
-            <a:solidFill>
-              <a:srgbClr val="4568DC"/>
-            </a:solidFill>
-            <a:prstDash val="solid"/>
-          </a:ln>
-        </p:spPr>
-      </p:sp>
-      <p:sp>
-        <p:nvSpPr>
-          <p:cNvPr id="12" name="Text 10"/>
-          <p:cNvSpPr/>
-          <p:nvPr/>
-        </p:nvSpPr>
-        <p:spPr>
-          <a:xfrm>
-            <a:off x="4681728" y="3813048"/>
-            <a:ext cx="2788920" cy="411480"/>
+              <a:rPr lang="en-US" sz="3400" b="1" dirty="0">
+                <a:solidFill>
+                  <a:srgbClr val="FF5A5F"/>
+                </a:solidFill>
+              </a:rPr>
+              <a:t>Toss</a:t>
+            </a:r>
+            <a:endParaRPr lang="en-US" sz="3400" dirty="0"/>
+          </a:p>
+        </p:txBody>
+      </p:sp>
+      <p:sp>
+        <p:nvSpPr>
+          <p:cNvPr id="8" name="Text 6"/>
+          <p:cNvSpPr/>
+          <p:nvPr/>
+        </p:nvSpPr>
+        <p:spPr>
+          <a:xfrm>
+            <a:off x="685800" y="4773168"/>
+            <a:ext cx="2560320" cy="457200"/>
           </a:xfrm>
           <a:prstGeom prst="rect">
             <a:avLst/>
@@ -7817,27 +8428,27 @@
               <a:buNone/>
             </a:pPr>
             <a:r>
-              <a:rPr lang="en-US" sz="1700" b="1" dirty="0">
-                <a:solidFill>
-                  <a:srgbClr val="222222"/>
-                </a:solidFill>
-              </a:rPr>
-              <a:t>P2 · 신뢰</a:t>
-            </a:r>
-            <a:endParaRPr lang="en-US" sz="1700" dirty="0"/>
-          </a:p>
-        </p:txBody>
-      </p:sp>
-      <p:sp>
-        <p:nvSpPr>
-          <p:cNvPr id="13" name="Text 11"/>
-          <p:cNvSpPr/>
-          <p:nvPr/>
-        </p:nvSpPr>
-        <p:spPr>
-          <a:xfrm>
-            <a:off x="4681728" y="4389120"/>
-            <a:ext cx="2788920" cy="731520"/>
+              <a:rPr lang="en-US" sz="1200" dirty="0">
+                <a:solidFill>
+                  <a:srgbClr val="6B7280"/>
+                </a:solidFill>
+              </a:rPr>
+              <a:t>실결제 승인·취소 API</a:t>
+            </a:r>
+            <a:endParaRPr lang="en-US" sz="1200" dirty="0"/>
+          </a:p>
+        </p:txBody>
+      </p:sp>
+      <p:sp>
+        <p:nvSpPr>
+          <p:cNvPr id="9" name="Text 7"/>
+          <p:cNvSpPr/>
+          <p:nvPr/>
+        </p:nvSpPr>
+        <p:spPr>
+          <a:xfrm>
+            <a:off x="3794760" y="4023360"/>
+            <a:ext cx="2560320" cy="685800"/>
           </a:xfrm>
           <a:prstGeom prst="rect">
             <a:avLst/>
@@ -7855,107 +8466,27 @@
               <a:buNone/>
             </a:pPr>
             <a:r>
-              <a:rPr lang="en-US" sz="1150" dirty="0">
-                <a:solidFill>
-                  <a:srgbClr val="6B7280"/>
-                </a:solidFill>
-              </a:rPr>
-              <a:t>JWT 인증</a:t>
-            </a:r>
-            <a:endParaRPr lang="en-US" sz="1150" dirty="0"/>
-          </a:p>
-          <a:p>
-            <a:pPr indent="0" marL="0">
-              <a:buNone/>
-            </a:pPr>
-            <a:r>
-              <a:rPr lang="en-US" sz="1150" dirty="0">
-                <a:solidFill>
-                  <a:srgbClr val="6B7280"/>
-                </a:solidFill>
-              </a:rPr>
-              <a:t>역할 기반 권한</a:t>
-            </a:r>
-            <a:endParaRPr lang="en-US" sz="1150" dirty="0"/>
-          </a:p>
-          <a:p>
-            <a:pPr indent="0" marL="0">
-              <a:buNone/>
-            </a:pPr>
-            <a:r>
-              <a:rPr lang="en-US" sz="1150" dirty="0">
-                <a:solidFill>
-                  <a:srgbClr val="6B7280"/>
-                </a:solidFill>
-              </a:rPr>
-              <a:t>리소스 소유권 검증</a:t>
-            </a:r>
-            <a:endParaRPr lang="en-US" sz="1150" dirty="0"/>
-          </a:p>
-        </p:txBody>
-      </p:sp>
-      <p:sp>
-        <p:nvSpPr>
-          <p:cNvPr id="14" name="Shape 12"/>
-          <p:cNvSpPr/>
-          <p:nvPr/>
-        </p:nvSpPr>
-        <p:spPr>
-          <a:xfrm>
-            <a:off x="8138160" y="3063240"/>
-            <a:ext cx="3337560" cy="2331720"/>
-          </a:xfrm>
-          <a:prstGeom prst="roundRect">
-            <a:avLst>
-              <a:gd name="adj" fmla="val 3137"/>
-            </a:avLst>
-          </a:prstGeom>
-          <a:solidFill>
-            <a:srgbClr val="FFFFFF"/>
-          </a:solidFill>
-          <a:ln w="12700">
-            <a:solidFill>
-              <a:srgbClr val="E8E8E8"/>
-            </a:solidFill>
-            <a:prstDash val="solid"/>
-          </a:ln>
-        </p:spPr>
-      </p:sp>
-      <p:sp>
-        <p:nvSpPr>
-          <p:cNvPr id="15" name="Shape 13"/>
-          <p:cNvSpPr/>
-          <p:nvPr/>
-        </p:nvSpPr>
-        <p:spPr>
-          <a:xfrm>
-            <a:off x="8412480" y="3337560"/>
-            <a:ext cx="228600" cy="228600"/>
-          </a:xfrm>
-          <a:prstGeom prst="ellipse">
-            <a:avLst/>
-          </a:prstGeom>
-          <a:solidFill>
-            <a:srgbClr val="00A86B"/>
-          </a:solidFill>
-          <a:ln w="12700">
-            <a:solidFill>
-              <a:srgbClr val="00A86B"/>
-            </a:solidFill>
-            <a:prstDash val="solid"/>
-          </a:ln>
-        </p:spPr>
-      </p:sp>
-      <p:sp>
-        <p:nvSpPr>
-          <p:cNvPr id="16" name="Text 14"/>
-          <p:cNvSpPr/>
-          <p:nvPr/>
-        </p:nvSpPr>
-        <p:spPr>
-          <a:xfrm>
-            <a:off x="8412480" y="3813048"/>
-            <a:ext cx="2788920" cy="411480"/>
+              <a:rPr lang="en-US" sz="3400" b="1" dirty="0">
+                <a:solidFill>
+                  <a:srgbClr val="4568DC"/>
+                </a:solidFill>
+              </a:rPr>
+              <a:t>100%</a:t>
+            </a:r>
+            <a:endParaRPr lang="en-US" sz="3400" dirty="0"/>
+          </a:p>
+        </p:txBody>
+      </p:sp>
+      <p:sp>
+        <p:nvSpPr>
+          <p:cNvPr id="10" name="Text 8"/>
+          <p:cNvSpPr/>
+          <p:nvPr/>
+        </p:nvSpPr>
+        <p:spPr>
+          <a:xfrm>
+            <a:off x="3794760" y="4773168"/>
+            <a:ext cx="2560320" cy="457200"/>
           </a:xfrm>
           <a:prstGeom prst="rect">
             <a:avLst/>
@@ -7973,27 +8504,27 @@
               <a:buNone/>
             </a:pPr>
             <a:r>
-              <a:rPr lang="en-US" sz="1700" b="1" dirty="0">
-                <a:solidFill>
-                  <a:srgbClr val="222222"/>
-                </a:solidFill>
-              </a:rPr>
-              <a:t>P3 · 운영</a:t>
-            </a:r>
-            <a:endParaRPr lang="en-US" sz="1700" dirty="0"/>
-          </a:p>
-        </p:txBody>
-      </p:sp>
-      <p:sp>
-        <p:nvSpPr>
-          <p:cNvPr id="17" name="Text 15"/>
-          <p:cNvSpPr/>
-          <p:nvPr/>
-        </p:nvSpPr>
-        <p:spPr>
-          <a:xfrm>
-            <a:off x="8412480" y="4389120"/>
-            <a:ext cx="2788920" cy="731520"/>
+              <a:rPr lang="en-US" sz="1200" dirty="0">
+                <a:solidFill>
+                  <a:srgbClr val="6B7280"/>
+                </a:solidFill>
+              </a:rPr>
+              <a:t>서버 기준 금액 재검증</a:t>
+            </a:r>
+            <a:endParaRPr lang="en-US" sz="1200" dirty="0"/>
+          </a:p>
+        </p:txBody>
+      </p:sp>
+      <p:sp>
+        <p:nvSpPr>
+          <p:cNvPr id="11" name="Text 9"/>
+          <p:cNvSpPr/>
+          <p:nvPr/>
+        </p:nvSpPr>
+        <p:spPr>
+          <a:xfrm>
+            <a:off x="6903720" y="4023360"/>
+            <a:ext cx="2560320" cy="685800"/>
           </a:xfrm>
           <a:prstGeom prst="rect">
             <a:avLst/>
@@ -8011,42 +8542,88 @@
               <a:buNone/>
             </a:pPr>
             <a:r>
-              <a:rPr lang="en-US" sz="1150" dirty="0">
+              <a:rPr lang="en-US" sz="3400" b="1" dirty="0">
+                <a:solidFill>
+                  <a:srgbClr val="00A86B"/>
+                </a:solidFill>
+              </a:rPr>
+              <a:t>자동</a:t>
+            </a:r>
+            <a:endParaRPr lang="en-US" sz="3400" dirty="0"/>
+          </a:p>
+        </p:txBody>
+      </p:sp>
+      <p:sp>
+        <p:nvSpPr>
+          <p:cNvPr id="12" name="Text 10"/>
+          <p:cNvSpPr/>
+          <p:nvPr/>
+        </p:nvSpPr>
+        <p:spPr>
+          <a:xfrm>
+            <a:off x="6903720" y="4773168"/>
+            <a:ext cx="2560320" cy="457200"/>
+          </a:xfrm>
+          <a:prstGeom prst="rect">
+            <a:avLst/>
+          </a:prstGeom>
+          <a:noFill/>
+          <a:ln/>
+        </p:spPr>
+        <p:txBody>
+          <a:bodyPr wrap="square" lIns="0" tIns="0" rIns="0" bIns="0" rtlCol="0" anchor="ctr">
+            <a:normAutofit/>
+          </a:bodyPr>
+          <a:lstStyle/>
+          <a:p>
+            <a:pPr indent="0" marL="0">
+              <a:buNone/>
+            </a:pPr>
+            <a:r>
+              <a:rPr lang="en-US" sz="1200" dirty="0">
                 <a:solidFill>
                   <a:srgbClr val="6B7280"/>
                 </a:solidFill>
               </a:rPr>
-              <a:t>알림 · Scheduler · Webhook</a:t>
-            </a:r>
-            <a:endParaRPr lang="en-US" sz="1150" dirty="0"/>
-          </a:p>
-          <a:p>
-            <a:pPr indent="0" marL="0">
-              <a:buNone/>
-            </a:pPr>
-            <a:r>
-              <a:rPr lang="en-US" sz="1150" dirty="0">
-                <a:solidFill>
-                  <a:srgbClr val="6B7280"/>
-                </a:solidFill>
-              </a:rPr>
-              <a:t>로그 · Health · Metrics</a:t>
-            </a:r>
-            <a:endParaRPr lang="en-US" sz="1150" dirty="0"/>
-          </a:p>
-          <a:p>
-            <a:pPr indent="0" marL="0">
-              <a:buNone/>
-            </a:pPr>
-            <a:r>
-              <a:rPr lang="en-US" sz="1150" dirty="0">
-                <a:solidFill>
-                  <a:srgbClr val="6B7280"/>
-                </a:solidFill>
-              </a:rPr>
-              <a:t>보안 · 성능 · 결제</a:t>
-            </a:r>
-            <a:endParaRPr lang="en-US" sz="1150" dirty="0"/>
+              <a:t>월별 강사 정산 계산</a:t>
+            </a:r>
+            <a:endParaRPr lang="en-US" sz="1200" dirty="0"/>
+          </a:p>
+        </p:txBody>
+      </p:sp>
+      <p:sp>
+        <p:nvSpPr>
+          <p:cNvPr id="13" name="Text 11"/>
+          <p:cNvSpPr/>
+          <p:nvPr/>
+        </p:nvSpPr>
+        <p:spPr>
+          <a:xfrm>
+            <a:off x="685800" y="5669280"/>
+            <a:ext cx="10698480" cy="365760"/>
+          </a:xfrm>
+          <a:prstGeom prst="rect">
+            <a:avLst/>
+          </a:prstGeom>
+          <a:noFill/>
+          <a:ln/>
+        </p:spPr>
+        <p:txBody>
+          <a:bodyPr wrap="square" lIns="0" tIns="0" rIns="0" bIns="0" rtlCol="0" anchor="ctr"/>
+          <a:lstStyle/>
+          <a:p>
+            <a:pPr algn="ctr" indent="0" marL="0">
+              <a:buNone/>
+            </a:pPr>
+            <a:r>
+              <a:rPr lang="en-US" sz="1400" b="1" dirty="0">
+                <a:solidFill>
+                  <a:srgbClr val="222222"/>
+                </a:solidFill>
+              </a:rPr>
+              <a:t>주문 생성  →  결제위젯  →  서버 승인  →  수강 등록  →  정산</a:t>
+            </a:r>
+            <a:endParaRPr lang="en-US" sz="1400" dirty="0"/>
           </a:p>
         </p:txBody>
       </p:sp>
@@ -8061,6 +8638,666 @@
 <file path=ppt/slides/slide8.xml><?xml version="1.0" encoding="utf-8"?>
 <p:sld xmlns:a="http://schemas.openxmlformats.org/drawingml/2006/main" xmlns:r="http://schemas.openxmlformats.org/officeDocument/2006/relationships" xmlns:p="http://schemas.openxmlformats.org/presentationml/2006/main">
   <p:cSld name="Slide 8">
+    <p:bg>
+      <p:bgPr>
+        <a:solidFill>
+          <a:srgbClr val="FFFFFF"/>
+        </a:solidFill>
+      </p:bgPr>
+    </p:bg>
+    <p:spTree>
+      <p:nvGrpSpPr>
+        <p:cNvPr id="1" name=""/>
+        <p:cNvGrpSpPr/>
+        <p:nvPr/>
+      </p:nvGrpSpPr>
+      <p:grpSpPr>
+        <a:xfrm>
+          <a:off x="0" y="0"/>
+          <a:ext cx="0" cy="0"/>
+          <a:chOff x="0" y="0"/>
+          <a:chExt cx="0" cy="0"/>
+        </a:xfrm>
+      </p:grpSpPr>
+      <p:sp>
+        <p:nvSpPr>
+          <p:cNvPr id="2" name="Text 0"/>
+          <p:cNvSpPr/>
+          <p:nvPr/>
+        </p:nvSpPr>
+        <p:spPr>
+          <a:xfrm>
+            <a:off x="530352" y="347472"/>
+            <a:ext cx="1920240" cy="219456"/>
+          </a:xfrm>
+          <a:prstGeom prst="rect">
+            <a:avLst/>
+          </a:prstGeom>
+          <a:noFill/>
+          <a:ln/>
+        </p:spPr>
+        <p:txBody>
+          <a:bodyPr wrap="square" lIns="0" tIns="0" rIns="0" bIns="0" rtlCol="0" anchor="ctr"/>
+          <a:lstStyle/>
+          <a:p>
+            <a:pPr indent="0" marL="0">
+              <a:buNone/>
+            </a:pPr>
+            <a:r>
+              <a:rPr lang="en-US" sz="1000" b="1" spc="220" kern="0" dirty="0">
+                <a:solidFill>
+                  <a:srgbClr val="FF5A5F"/>
+                </a:solidFill>
+              </a:rPr>
+              <a:t>DEVFOCUS</a:t>
+            </a:r>
+            <a:endParaRPr lang="en-US" sz="1000" dirty="0"/>
+          </a:p>
+        </p:txBody>
+      </p:sp>
+      <p:sp>
+        <p:nvSpPr>
+          <p:cNvPr id="3" name="Text 1"/>
+          <p:cNvSpPr/>
+          <p:nvPr/>
+        </p:nvSpPr>
+        <p:spPr>
+          <a:xfrm>
+            <a:off x="11155680" y="347472"/>
+            <a:ext cx="502920" cy="219456"/>
+          </a:xfrm>
+          <a:prstGeom prst="rect">
+            <a:avLst/>
+          </a:prstGeom>
+          <a:noFill/>
+          <a:ln/>
+        </p:spPr>
+        <p:txBody>
+          <a:bodyPr wrap="square" lIns="0" tIns="0" rIns="0" bIns="0" rtlCol="0" anchor="ctr"/>
+          <a:lstStyle/>
+          <a:p>
+            <a:pPr algn="r" indent="0" marL="0">
+              <a:buNone/>
+            </a:pPr>
+            <a:r>
+              <a:rPr lang="en-US" sz="900" dirty="0">
+                <a:solidFill>
+                  <a:srgbClr val="6B7280"/>
+                </a:solidFill>
+              </a:rPr>
+              <a:t>08</a:t>
+            </a:r>
+            <a:endParaRPr lang="en-US" sz="900" dirty="0"/>
+          </a:p>
+        </p:txBody>
+      </p:sp>
+      <p:sp>
+        <p:nvSpPr>
+          <p:cNvPr id="4" name="Text 2"/>
+          <p:cNvSpPr/>
+          <p:nvPr/>
+        </p:nvSpPr>
+        <p:spPr>
+          <a:xfrm>
+            <a:off x="658368" y="960120"/>
+            <a:ext cx="3657600" cy="228600"/>
+          </a:xfrm>
+          <a:prstGeom prst="rect">
+            <a:avLst/>
+          </a:prstGeom>
+          <a:noFill/>
+          <a:ln/>
+        </p:spPr>
+        <p:txBody>
+          <a:bodyPr wrap="square" lIns="0" tIns="0" rIns="0" bIns="0" rtlCol="0" anchor="ctr"/>
+          <a:lstStyle/>
+          <a:p>
+            <a:pPr indent="0" marL="0">
+              <a:buNone/>
+            </a:pPr>
+            <a:r>
+              <a:rPr lang="en-US" sz="1000" b="1" spc="240" kern="0" dirty="0">
+                <a:solidFill>
+                  <a:srgbClr val="FF5A5F"/>
+                </a:solidFill>
+              </a:rPr>
+              <a:t>BUILT IN THREE STAGES</a:t>
+            </a:r>
+            <a:endParaRPr lang="en-US" sz="1000" dirty="0"/>
+          </a:p>
+        </p:txBody>
+      </p:sp>
+      <p:sp>
+        <p:nvSpPr>
+          <p:cNvPr id="5" name="Text 3"/>
+          <p:cNvSpPr/>
+          <p:nvPr/>
+        </p:nvSpPr>
+        <p:spPr>
+          <a:xfrm>
+            <a:off x="640080" y="1371600"/>
+            <a:ext cx="6858000" cy="1417320"/>
+          </a:xfrm>
+          <a:prstGeom prst="rect">
+            <a:avLst/>
+          </a:prstGeom>
+          <a:noFill/>
+          <a:ln/>
+        </p:spPr>
+        <p:txBody>
+          <a:bodyPr wrap="square" lIns="0" tIns="0" rIns="0" bIns="0" rtlCol="0" anchor="ctr">
+            <a:normAutofit/>
+          </a:bodyPr>
+          <a:lstStyle/>
+          <a:p>
+            <a:pPr indent="0" marL="0">
+              <a:buNone/>
+            </a:pPr>
+            <a:r>
+              <a:rPr lang="en-US" sz="3700" b="1" dirty="0">
+                <a:solidFill>
+                  <a:srgbClr val="222222"/>
+                </a:solidFill>
+              </a:rPr>
+              <a:t>과제 요구사항을</a:t>
+            </a:r>
+            <a:endParaRPr lang="en-US" sz="3700" dirty="0"/>
+          </a:p>
+          <a:p>
+            <a:pPr indent="0" marL="0">
+              <a:buNone/>
+            </a:pPr>
+            <a:r>
+              <a:rPr lang="en-US" sz="3700" b="1" dirty="0">
+                <a:solidFill>
+                  <a:srgbClr val="222222"/>
+                </a:solidFill>
+              </a:rPr>
+              <a:t>운영 가능한 제품으로 확장했습니다.</a:t>
+            </a:r>
+            <a:endParaRPr lang="en-US" sz="3700" dirty="0"/>
+          </a:p>
+        </p:txBody>
+      </p:sp>
+      <p:sp>
+        <p:nvSpPr>
+          <p:cNvPr id="6" name="Shape 4"/>
+          <p:cNvSpPr/>
+          <p:nvPr/>
+        </p:nvSpPr>
+        <p:spPr>
+          <a:xfrm>
+            <a:off x="685800" y="3063240"/>
+            <a:ext cx="3337560" cy="2331720"/>
+          </a:xfrm>
+          <a:prstGeom prst="roundRect">
+            <a:avLst>
+              <a:gd name="adj" fmla="val 3137"/>
+            </a:avLst>
+          </a:prstGeom>
+          <a:solidFill>
+            <a:srgbClr val="FFFFFF"/>
+          </a:solidFill>
+          <a:ln w="12700">
+            <a:solidFill>
+              <a:srgbClr val="E8E8E8"/>
+            </a:solidFill>
+            <a:prstDash val="solid"/>
+          </a:ln>
+        </p:spPr>
+      </p:sp>
+      <p:sp>
+        <p:nvSpPr>
+          <p:cNvPr id="7" name="Shape 5"/>
+          <p:cNvSpPr/>
+          <p:nvPr/>
+        </p:nvSpPr>
+        <p:spPr>
+          <a:xfrm>
+            <a:off x="960120" y="3337560"/>
+            <a:ext cx="228600" cy="228600"/>
+          </a:xfrm>
+          <a:prstGeom prst="ellipse">
+            <a:avLst/>
+          </a:prstGeom>
+          <a:solidFill>
+            <a:srgbClr val="FF5A5F"/>
+          </a:solidFill>
+          <a:ln w="12700">
+            <a:solidFill>
+              <a:srgbClr val="FF5A5F"/>
+            </a:solidFill>
+            <a:prstDash val="solid"/>
+          </a:ln>
+        </p:spPr>
+      </p:sp>
+      <p:sp>
+        <p:nvSpPr>
+          <p:cNvPr id="8" name="Text 6"/>
+          <p:cNvSpPr/>
+          <p:nvPr/>
+        </p:nvSpPr>
+        <p:spPr>
+          <a:xfrm>
+            <a:off x="960120" y="3813048"/>
+            <a:ext cx="2788920" cy="411480"/>
+          </a:xfrm>
+          <a:prstGeom prst="rect">
+            <a:avLst/>
+          </a:prstGeom>
+          <a:noFill/>
+          <a:ln/>
+        </p:spPr>
+        <p:txBody>
+          <a:bodyPr wrap="square" lIns="0" tIns="0" rIns="0" bIns="0" rtlCol="0" anchor="ctr">
+            <a:normAutofit/>
+          </a:bodyPr>
+          <a:lstStyle/>
+          <a:p>
+            <a:pPr indent="0" marL="0">
+              <a:buNone/>
+            </a:pPr>
+            <a:r>
+              <a:rPr lang="en-US" sz="1700" b="1" dirty="0">
+                <a:solidFill>
+                  <a:srgbClr val="222222"/>
+                </a:solidFill>
+              </a:rPr>
+              <a:t>P1 · 서비스</a:t>
+            </a:r>
+            <a:endParaRPr lang="en-US" sz="1700" dirty="0"/>
+          </a:p>
+        </p:txBody>
+      </p:sp>
+      <p:sp>
+        <p:nvSpPr>
+          <p:cNvPr id="9" name="Text 7"/>
+          <p:cNvSpPr/>
+          <p:nvPr/>
+        </p:nvSpPr>
+        <p:spPr>
+          <a:xfrm>
+            <a:off x="960120" y="4389120"/>
+            <a:ext cx="2788920" cy="731520"/>
+          </a:xfrm>
+          <a:prstGeom prst="rect">
+            <a:avLst/>
+          </a:prstGeom>
+          <a:noFill/>
+          <a:ln/>
+        </p:spPr>
+        <p:txBody>
+          <a:bodyPr wrap="square" lIns="0" tIns="0" rIns="0" bIns="0" rtlCol="0" anchor="ctr">
+            <a:normAutofit/>
+          </a:bodyPr>
+          <a:lstStyle/>
+          <a:p>
+            <a:pPr indent="0" marL="0">
+              <a:buNone/>
+            </a:pPr>
+            <a:r>
+              <a:rPr lang="en-US" sz="1150" dirty="0">
+                <a:solidFill>
+                  <a:srgbClr val="6B7280"/>
+                </a:solidFill>
+              </a:rPr>
+              <a:t>모바일 프론트엔드</a:t>
+            </a:r>
+            <a:endParaRPr lang="en-US" sz="1150" dirty="0"/>
+          </a:p>
+          <a:p>
+            <a:pPr indent="0" marL="0">
+              <a:buNone/>
+            </a:pPr>
+            <a:r>
+              <a:rPr lang="en-US" sz="1150" dirty="0">
+                <a:solidFill>
+                  <a:srgbClr val="6B7280"/>
+                </a:solidFill>
+              </a:rPr>
+              <a:t>백엔드 API와 CRUD</a:t>
+            </a:r>
+            <a:endParaRPr lang="en-US" sz="1150" dirty="0"/>
+          </a:p>
+          <a:p>
+            <a:pPr indent="0" marL="0">
+              <a:buNone/>
+            </a:pPr>
+            <a:r>
+              <a:rPr lang="en-US" sz="1150" dirty="0">
+                <a:solidFill>
+                  <a:srgbClr val="6B7280"/>
+                </a:solidFill>
+              </a:rPr>
+              <a:t>MySQL 영구 저장</a:t>
+            </a:r>
+            <a:endParaRPr lang="en-US" sz="1150" dirty="0"/>
+          </a:p>
+        </p:txBody>
+      </p:sp>
+      <p:sp>
+        <p:nvSpPr>
+          <p:cNvPr id="10" name="Shape 8"/>
+          <p:cNvSpPr/>
+          <p:nvPr/>
+        </p:nvSpPr>
+        <p:spPr>
+          <a:xfrm>
+            <a:off x="4407408" y="3063240"/>
+            <a:ext cx="3337560" cy="2331720"/>
+          </a:xfrm>
+          <a:prstGeom prst="roundRect">
+            <a:avLst>
+              <a:gd name="adj" fmla="val 3137"/>
+            </a:avLst>
+          </a:prstGeom>
+          <a:solidFill>
+            <a:srgbClr val="FFFFFF"/>
+          </a:solidFill>
+          <a:ln w="12700">
+            <a:solidFill>
+              <a:srgbClr val="E8E8E8"/>
+            </a:solidFill>
+            <a:prstDash val="solid"/>
+          </a:ln>
+        </p:spPr>
+      </p:sp>
+      <p:sp>
+        <p:nvSpPr>
+          <p:cNvPr id="11" name="Shape 9"/>
+          <p:cNvSpPr/>
+          <p:nvPr/>
+        </p:nvSpPr>
+        <p:spPr>
+          <a:xfrm>
+            <a:off x="4681728" y="3337560"/>
+            <a:ext cx="228600" cy="228600"/>
+          </a:xfrm>
+          <a:prstGeom prst="ellipse">
+            <a:avLst/>
+          </a:prstGeom>
+          <a:solidFill>
+            <a:srgbClr val="4568DC"/>
+          </a:solidFill>
+          <a:ln w="12700">
+            <a:solidFill>
+              <a:srgbClr val="4568DC"/>
+            </a:solidFill>
+            <a:prstDash val="solid"/>
+          </a:ln>
+        </p:spPr>
+      </p:sp>
+      <p:sp>
+        <p:nvSpPr>
+          <p:cNvPr id="12" name="Text 10"/>
+          <p:cNvSpPr/>
+          <p:nvPr/>
+        </p:nvSpPr>
+        <p:spPr>
+          <a:xfrm>
+            <a:off x="4681728" y="3813048"/>
+            <a:ext cx="2788920" cy="411480"/>
+          </a:xfrm>
+          <a:prstGeom prst="rect">
+            <a:avLst/>
+          </a:prstGeom>
+          <a:noFill/>
+          <a:ln/>
+        </p:spPr>
+        <p:txBody>
+          <a:bodyPr wrap="square" lIns="0" tIns="0" rIns="0" bIns="0" rtlCol="0" anchor="ctr">
+            <a:normAutofit/>
+          </a:bodyPr>
+          <a:lstStyle/>
+          <a:p>
+            <a:pPr indent="0" marL="0">
+              <a:buNone/>
+            </a:pPr>
+            <a:r>
+              <a:rPr lang="en-US" sz="1700" b="1" dirty="0">
+                <a:solidFill>
+                  <a:srgbClr val="222222"/>
+                </a:solidFill>
+              </a:rPr>
+              <a:t>P2 · 신뢰</a:t>
+            </a:r>
+            <a:endParaRPr lang="en-US" sz="1700" dirty="0"/>
+          </a:p>
+        </p:txBody>
+      </p:sp>
+      <p:sp>
+        <p:nvSpPr>
+          <p:cNvPr id="13" name="Text 11"/>
+          <p:cNvSpPr/>
+          <p:nvPr/>
+        </p:nvSpPr>
+        <p:spPr>
+          <a:xfrm>
+            <a:off x="4681728" y="4389120"/>
+            <a:ext cx="2788920" cy="731520"/>
+          </a:xfrm>
+          <a:prstGeom prst="rect">
+            <a:avLst/>
+          </a:prstGeom>
+          <a:noFill/>
+          <a:ln/>
+        </p:spPr>
+        <p:txBody>
+          <a:bodyPr wrap="square" lIns="0" tIns="0" rIns="0" bIns="0" rtlCol="0" anchor="ctr">
+            <a:normAutofit/>
+          </a:bodyPr>
+          <a:lstStyle/>
+          <a:p>
+            <a:pPr indent="0" marL="0">
+              <a:buNone/>
+            </a:pPr>
+            <a:r>
+              <a:rPr lang="en-US" sz="1150" dirty="0">
+                <a:solidFill>
+                  <a:srgbClr val="6B7280"/>
+                </a:solidFill>
+              </a:rPr>
+              <a:t>JWT 인증</a:t>
+            </a:r>
+            <a:endParaRPr lang="en-US" sz="1150" dirty="0"/>
+          </a:p>
+          <a:p>
+            <a:pPr indent="0" marL="0">
+              <a:buNone/>
+            </a:pPr>
+            <a:r>
+              <a:rPr lang="en-US" sz="1150" dirty="0">
+                <a:solidFill>
+                  <a:srgbClr val="6B7280"/>
+                </a:solidFill>
+              </a:rPr>
+              <a:t>역할 기반 권한</a:t>
+            </a:r>
+            <a:endParaRPr lang="en-US" sz="1150" dirty="0"/>
+          </a:p>
+          <a:p>
+            <a:pPr indent="0" marL="0">
+              <a:buNone/>
+            </a:pPr>
+            <a:r>
+              <a:rPr lang="en-US" sz="1150" dirty="0">
+                <a:solidFill>
+                  <a:srgbClr val="6B7280"/>
+                </a:solidFill>
+              </a:rPr>
+              <a:t>리소스 소유권 검증</a:t>
+            </a:r>
+            <a:endParaRPr lang="en-US" sz="1150" dirty="0"/>
+          </a:p>
+        </p:txBody>
+      </p:sp>
+      <p:sp>
+        <p:nvSpPr>
+          <p:cNvPr id="14" name="Shape 12"/>
+          <p:cNvSpPr/>
+          <p:nvPr/>
+        </p:nvSpPr>
+        <p:spPr>
+          <a:xfrm>
+            <a:off x="8138160" y="3063240"/>
+            <a:ext cx="3337560" cy="2331720"/>
+          </a:xfrm>
+          <a:prstGeom prst="roundRect">
+            <a:avLst>
+              <a:gd name="adj" fmla="val 3137"/>
+            </a:avLst>
+          </a:prstGeom>
+          <a:solidFill>
+            <a:srgbClr val="FFFFFF"/>
+          </a:solidFill>
+          <a:ln w="12700">
+            <a:solidFill>
+              <a:srgbClr val="E8E8E8"/>
+            </a:solidFill>
+            <a:prstDash val="solid"/>
+          </a:ln>
+        </p:spPr>
+      </p:sp>
+      <p:sp>
+        <p:nvSpPr>
+          <p:cNvPr id="15" name="Shape 13"/>
+          <p:cNvSpPr/>
+          <p:nvPr/>
+        </p:nvSpPr>
+        <p:spPr>
+          <a:xfrm>
+            <a:off x="8412480" y="3337560"/>
+            <a:ext cx="228600" cy="228600"/>
+          </a:xfrm>
+          <a:prstGeom prst="ellipse">
+            <a:avLst/>
+          </a:prstGeom>
+          <a:solidFill>
+            <a:srgbClr val="00A86B"/>
+          </a:solidFill>
+          <a:ln w="12700">
+            <a:solidFill>
+              <a:srgbClr val="00A86B"/>
+            </a:solidFill>
+            <a:prstDash val="solid"/>
+          </a:ln>
+        </p:spPr>
+      </p:sp>
+      <p:sp>
+        <p:nvSpPr>
+          <p:cNvPr id="16" name="Text 14"/>
+          <p:cNvSpPr/>
+          <p:nvPr/>
+        </p:nvSpPr>
+        <p:spPr>
+          <a:xfrm>
+            <a:off x="8412480" y="3813048"/>
+            <a:ext cx="2788920" cy="411480"/>
+          </a:xfrm>
+          <a:prstGeom prst="rect">
+            <a:avLst/>
+          </a:prstGeom>
+          <a:noFill/>
+          <a:ln/>
+        </p:spPr>
+        <p:txBody>
+          <a:bodyPr wrap="square" lIns="0" tIns="0" rIns="0" bIns="0" rtlCol="0" anchor="ctr">
+            <a:normAutofit/>
+          </a:bodyPr>
+          <a:lstStyle/>
+          <a:p>
+            <a:pPr indent="0" marL="0">
+              <a:buNone/>
+            </a:pPr>
+            <a:r>
+              <a:rPr lang="en-US" sz="1700" b="1" dirty="0">
+                <a:solidFill>
+                  <a:srgbClr val="222222"/>
+                </a:solidFill>
+              </a:rPr>
+              <a:t>P3 · 운영</a:t>
+            </a:r>
+            <a:endParaRPr lang="en-US" sz="1700" dirty="0"/>
+          </a:p>
+        </p:txBody>
+      </p:sp>
+      <p:sp>
+        <p:nvSpPr>
+          <p:cNvPr id="17" name="Text 15"/>
+          <p:cNvSpPr/>
+          <p:nvPr/>
+        </p:nvSpPr>
+        <p:spPr>
+          <a:xfrm>
+            <a:off x="8412480" y="4389120"/>
+            <a:ext cx="2788920" cy="731520"/>
+          </a:xfrm>
+          <a:prstGeom prst="rect">
+            <a:avLst/>
+          </a:prstGeom>
+          <a:noFill/>
+          <a:ln/>
+        </p:spPr>
+        <p:txBody>
+          <a:bodyPr wrap="square" lIns="0" tIns="0" rIns="0" bIns="0" rtlCol="0" anchor="ctr">
+            <a:normAutofit/>
+          </a:bodyPr>
+          <a:lstStyle/>
+          <a:p>
+            <a:pPr indent="0" marL="0">
+              <a:buNone/>
+            </a:pPr>
+            <a:r>
+              <a:rPr lang="en-US" sz="1150" dirty="0">
+                <a:solidFill>
+                  <a:srgbClr val="6B7280"/>
+                </a:solidFill>
+              </a:rPr>
+              <a:t>알림 · Scheduler · Webhook</a:t>
+            </a:r>
+            <a:endParaRPr lang="en-US" sz="1150" dirty="0"/>
+          </a:p>
+          <a:p>
+            <a:pPr indent="0" marL="0">
+              <a:buNone/>
+            </a:pPr>
+            <a:r>
+              <a:rPr lang="en-US" sz="1150" dirty="0">
+                <a:solidFill>
+                  <a:srgbClr val="6B7280"/>
+                </a:solidFill>
+              </a:rPr>
+              <a:t>로그 · Health · Metrics</a:t>
+            </a:r>
+            <a:endParaRPr lang="en-US" sz="1150" dirty="0"/>
+          </a:p>
+          <a:p>
+            <a:pPr indent="0" marL="0">
+              <a:buNone/>
+            </a:pPr>
+            <a:r>
+              <a:rPr lang="en-US" sz="1150" dirty="0">
+                <a:solidFill>
+                  <a:srgbClr val="6B7280"/>
+                </a:solidFill>
+              </a:rPr>
+              <a:t>보안 · 성능 · 결제</a:t>
+            </a:r>
+            <a:endParaRPr lang="en-US" sz="1150" dirty="0"/>
+          </a:p>
+        </p:txBody>
+      </p:sp>
+    </p:spTree>
+  </p:cSld>
+  <p:clrMapOvr>
+    <a:masterClrMapping/>
+  </p:clrMapOvr>
+</p:sld>
+</file>
+
+<file path=ppt/slides/slide9.xml><?xml version="1.0" encoding="utf-8"?>
+<p:sld xmlns:a="http://schemas.openxmlformats.org/drawingml/2006/main" xmlns:r="http://schemas.openxmlformats.org/officeDocument/2006/relationships" xmlns:p="http://schemas.openxmlformats.org/presentationml/2006/main">
+  <p:cSld name="Slide 9">
     <p:bg>
       <p:bgPr>
         <a:solidFill>
@@ -8148,7 +9385,7 @@
                   <a:srgbClr val="A3A3A3"/>
                 </a:solidFill>
               </a:rPr>
-              <a:t>08</a:t>
+              <a:t>09</a:t>
             </a:r>
             <a:endParaRPr lang="en-US" sz="900" dirty="0"/>
           </a:p>
@@ -8781,540 +10018,6 @@
               <a:t>실행 환경</a:t>
             </a:r>
             <a:endParaRPr lang="en-US" sz="1000" dirty="0"/>
-          </a:p>
-        </p:txBody>
-      </p:sp>
-    </p:spTree>
-  </p:cSld>
-  <p:clrMapOvr>
-    <a:masterClrMapping/>
-  </p:clrMapOvr>
-</p:sld>
-</file>
-
-<file path=ppt/slides/slide9.xml><?xml version="1.0" encoding="utf-8"?>
-<p:sld xmlns:a="http://schemas.openxmlformats.org/drawingml/2006/main" xmlns:r="http://schemas.openxmlformats.org/officeDocument/2006/relationships" xmlns:p="http://schemas.openxmlformats.org/presentationml/2006/main">
-  <p:cSld name="Slide 9">
-    <p:bg>
-      <p:bgPr>
-        <a:solidFill>
-          <a:srgbClr val="FFFFFF"/>
-        </a:solidFill>
-      </p:bgPr>
-    </p:bg>
-    <p:spTree>
-      <p:nvGrpSpPr>
-        <p:cNvPr id="1" name=""/>
-        <p:cNvGrpSpPr/>
-        <p:nvPr/>
-      </p:nvGrpSpPr>
-      <p:grpSpPr>
-        <a:xfrm>
-          <a:off x="0" y="0"/>
-          <a:ext cx="0" cy="0"/>
-          <a:chOff x="0" y="0"/>
-          <a:chExt cx="0" cy="0"/>
-        </a:xfrm>
-      </p:grpSpPr>
-      <p:sp>
-        <p:nvSpPr>
-          <p:cNvPr id="2" name="Text 0"/>
-          <p:cNvSpPr/>
-          <p:nvPr/>
-        </p:nvSpPr>
-        <p:spPr>
-          <a:xfrm>
-            <a:off x="530352" y="347472"/>
-            <a:ext cx="1920240" cy="219456"/>
-          </a:xfrm>
-          <a:prstGeom prst="rect">
-            <a:avLst/>
-          </a:prstGeom>
-          <a:noFill/>
-          <a:ln/>
-        </p:spPr>
-        <p:txBody>
-          <a:bodyPr wrap="square" lIns="0" tIns="0" rIns="0" bIns="0" rtlCol="0" anchor="ctr"/>
-          <a:lstStyle/>
-          <a:p>
-            <a:pPr indent="0" marL="0">
-              <a:buNone/>
-            </a:pPr>
-            <a:r>
-              <a:rPr lang="en-US" sz="1000" b="1" spc="220" kern="0" dirty="0">
-                <a:solidFill>
-                  <a:srgbClr val="FF5A5F"/>
-                </a:solidFill>
-              </a:rPr>
-              <a:t>DEVFOCUS</a:t>
-            </a:r>
-            <a:endParaRPr lang="en-US" sz="1000" dirty="0"/>
-          </a:p>
-        </p:txBody>
-      </p:sp>
-      <p:sp>
-        <p:nvSpPr>
-          <p:cNvPr id="3" name="Text 1"/>
-          <p:cNvSpPr/>
-          <p:nvPr/>
-        </p:nvSpPr>
-        <p:spPr>
-          <a:xfrm>
-            <a:off x="11155680" y="347472"/>
-            <a:ext cx="502920" cy="219456"/>
-          </a:xfrm>
-          <a:prstGeom prst="rect">
-            <a:avLst/>
-          </a:prstGeom>
-          <a:noFill/>
-          <a:ln/>
-        </p:spPr>
-        <p:txBody>
-          <a:bodyPr wrap="square" lIns="0" tIns="0" rIns="0" bIns="0" rtlCol="0" anchor="ctr"/>
-          <a:lstStyle/>
-          <a:p>
-            <a:pPr algn="r" indent="0" marL="0">
-              <a:buNone/>
-            </a:pPr>
-            <a:r>
-              <a:rPr lang="en-US" sz="900" dirty="0">
-                <a:solidFill>
-                  <a:srgbClr val="6B7280"/>
-                </a:solidFill>
-              </a:rPr>
-              <a:t>09</a:t>
-            </a:r>
-            <a:endParaRPr lang="en-US" sz="900" dirty="0"/>
-          </a:p>
-        </p:txBody>
-      </p:sp>
-      <p:sp>
-        <p:nvSpPr>
-          <p:cNvPr id="4" name="Text 2"/>
-          <p:cNvSpPr/>
-          <p:nvPr/>
-        </p:nvSpPr>
-        <p:spPr>
-          <a:xfrm>
-            <a:off x="658368" y="960120"/>
-            <a:ext cx="3657600" cy="228600"/>
-          </a:xfrm>
-          <a:prstGeom prst="rect">
-            <a:avLst/>
-          </a:prstGeom>
-          <a:noFill/>
-          <a:ln/>
-        </p:spPr>
-        <p:txBody>
-          <a:bodyPr wrap="square" lIns="0" tIns="0" rIns="0" bIns="0" rtlCol="0" anchor="ctr"/>
-          <a:lstStyle/>
-          <a:p>
-            <a:pPr indent="0" marL="0">
-              <a:buNone/>
-            </a:pPr>
-            <a:r>
-              <a:rPr lang="en-US" sz="1000" b="1" spc="240" kern="0" dirty="0">
-                <a:solidFill>
-                  <a:srgbClr val="FF5A5F"/>
-                </a:solidFill>
-              </a:rPr>
-              <a:t>OPERATIONS</a:t>
-            </a:r>
-            <a:endParaRPr lang="en-US" sz="1000" dirty="0"/>
-          </a:p>
-        </p:txBody>
-      </p:sp>
-      <p:sp>
-        <p:nvSpPr>
-          <p:cNvPr id="5" name="Text 3"/>
-          <p:cNvSpPr/>
-          <p:nvPr/>
-        </p:nvSpPr>
-        <p:spPr>
-          <a:xfrm>
-            <a:off x="640080" y="1371600"/>
-            <a:ext cx="7040880" cy="1417320"/>
-          </a:xfrm>
-          <a:prstGeom prst="rect">
-            <a:avLst/>
-          </a:prstGeom>
-          <a:noFill/>
-          <a:ln/>
-        </p:spPr>
-        <p:txBody>
-          <a:bodyPr wrap="square" lIns="0" tIns="0" rIns="0" bIns="0" rtlCol="0" anchor="ctr">
-            <a:normAutofit/>
-          </a:bodyPr>
-          <a:lstStyle/>
-          <a:p>
-            <a:pPr indent="0" marL="0">
-              <a:buNone/>
-            </a:pPr>
-            <a:r>
-              <a:rPr lang="en-US" sz="3700" b="1" dirty="0">
-                <a:solidFill>
-                  <a:srgbClr val="222222"/>
-                </a:solidFill>
-              </a:rPr>
-              <a:t>문제가 생긴 뒤가 아니라</a:t>
-            </a:r>
-            <a:endParaRPr lang="en-US" sz="3700" dirty="0"/>
-          </a:p>
-          <a:p>
-            <a:pPr indent="0" marL="0">
-              <a:buNone/>
-            </a:pPr>
-            <a:r>
-              <a:rPr lang="en-US" sz="3700" b="1" dirty="0">
-                <a:solidFill>
-                  <a:srgbClr val="222222"/>
-                </a:solidFill>
-              </a:rPr>
-              <a:t>생기는 순간을 봅니다.</a:t>
-            </a:r>
-            <a:endParaRPr lang="en-US" sz="3700" dirty="0"/>
-          </a:p>
-        </p:txBody>
-      </p:sp>
-      <p:sp>
-        <p:nvSpPr>
-          <p:cNvPr id="6" name="Text 4"/>
-          <p:cNvSpPr/>
-          <p:nvPr/>
-        </p:nvSpPr>
-        <p:spPr>
-          <a:xfrm>
-            <a:off x="667512" y="2788920"/>
-            <a:ext cx="6858000" cy="731520"/>
-          </a:xfrm>
-          <a:prstGeom prst="rect">
-            <a:avLst/>
-          </a:prstGeom>
-          <a:noFill/>
-          <a:ln/>
-        </p:spPr>
-        <p:txBody>
-          <a:bodyPr wrap="square" lIns="0" tIns="0" rIns="0" bIns="0" rtlCol="0" anchor="ctr">
-            <a:normAutofit/>
-          </a:bodyPr>
-          <a:lstStyle/>
-          <a:p>
-            <a:pPr indent="0" marL="0">
-              <a:buNone/>
-            </a:pPr>
-            <a:r>
-              <a:rPr lang="en-US" sz="1500" dirty="0">
-                <a:solidFill>
-                  <a:srgbClr val="6B7280"/>
-                </a:solidFill>
-              </a:rPr>
-              <a:t>운영자는 요청, 배치, Webhook, DB 상태를 한 흐름에서 추적할 수 있습니다.</a:t>
-            </a:r>
-            <a:endParaRPr lang="en-US" sz="1500" dirty="0"/>
-          </a:p>
-        </p:txBody>
-      </p:sp>
-      <p:sp>
-        <p:nvSpPr>
-          <p:cNvPr id="7" name="Text 5"/>
-          <p:cNvSpPr/>
-          <p:nvPr/>
-        </p:nvSpPr>
-        <p:spPr>
-          <a:xfrm>
-            <a:off x="685800" y="3886200"/>
-            <a:ext cx="2560320" cy="685800"/>
-          </a:xfrm>
-          <a:prstGeom prst="rect">
-            <a:avLst/>
-          </a:prstGeom>
-          <a:noFill/>
-          <a:ln/>
-        </p:spPr>
-        <p:txBody>
-          <a:bodyPr wrap="square" lIns="0" tIns="0" rIns="0" bIns="0" rtlCol="0" anchor="ctr">
-            <a:normAutofit/>
-          </a:bodyPr>
-          <a:lstStyle/>
-          <a:p>
-            <a:pPr indent="0" marL="0">
-              <a:buNone/>
-            </a:pPr>
-            <a:r>
-              <a:rPr lang="en-US" sz="3400" b="1" dirty="0">
-                <a:solidFill>
-                  <a:srgbClr val="FF5A5F"/>
-                </a:solidFill>
-              </a:rPr>
-              <a:t>JSON</a:t>
-            </a:r>
-            <a:endParaRPr lang="en-US" sz="3400" dirty="0"/>
-          </a:p>
-        </p:txBody>
-      </p:sp>
-      <p:sp>
-        <p:nvSpPr>
-          <p:cNvPr id="8" name="Text 6"/>
-          <p:cNvSpPr/>
-          <p:nvPr/>
-        </p:nvSpPr>
-        <p:spPr>
-          <a:xfrm>
-            <a:off x="685800" y="4636008"/>
-            <a:ext cx="2560320" cy="457200"/>
-          </a:xfrm>
-          <a:prstGeom prst="rect">
-            <a:avLst/>
-          </a:prstGeom>
-          <a:noFill/>
-          <a:ln/>
-        </p:spPr>
-        <p:txBody>
-          <a:bodyPr wrap="square" lIns="0" tIns="0" rIns="0" bIns="0" rtlCol="0" anchor="ctr">
-            <a:normAutofit/>
-          </a:bodyPr>
-          <a:lstStyle/>
-          <a:p>
-            <a:pPr indent="0" marL="0">
-              <a:buNone/>
-            </a:pPr>
-            <a:r>
-              <a:rPr lang="en-US" sz="1200" dirty="0">
-                <a:solidFill>
-                  <a:srgbClr val="6B7280"/>
-                </a:solidFill>
-              </a:rPr>
-              <a:t>구조화 요청 로그</a:t>
-            </a:r>
-            <a:endParaRPr lang="en-US" sz="1200" dirty="0"/>
-          </a:p>
-        </p:txBody>
-      </p:sp>
-      <p:sp>
-        <p:nvSpPr>
-          <p:cNvPr id="9" name="Text 7"/>
-          <p:cNvSpPr/>
-          <p:nvPr/>
-        </p:nvSpPr>
-        <p:spPr>
-          <a:xfrm>
-            <a:off x="3657600" y="3886200"/>
-            <a:ext cx="2560320" cy="685800"/>
-          </a:xfrm>
-          <a:prstGeom prst="rect">
-            <a:avLst/>
-          </a:prstGeom>
-          <a:noFill/>
-          <a:ln/>
-        </p:spPr>
-        <p:txBody>
-          <a:bodyPr wrap="square" lIns="0" tIns="0" rIns="0" bIns="0" rtlCol="0" anchor="ctr">
-            <a:normAutofit/>
-          </a:bodyPr>
-          <a:lstStyle/>
-          <a:p>
-            <a:pPr indent="0" marL="0">
-              <a:buNone/>
-            </a:pPr>
-            <a:r>
-              <a:rPr lang="en-US" sz="3400" b="1" dirty="0">
-                <a:solidFill>
-                  <a:srgbClr val="00A86B"/>
-                </a:solidFill>
-              </a:rPr>
-              <a:t>/health</a:t>
-            </a:r>
-            <a:endParaRPr lang="en-US" sz="3400" dirty="0"/>
-          </a:p>
-        </p:txBody>
-      </p:sp>
-      <p:sp>
-        <p:nvSpPr>
-          <p:cNvPr id="10" name="Text 8"/>
-          <p:cNvSpPr/>
-          <p:nvPr/>
-        </p:nvSpPr>
-        <p:spPr>
-          <a:xfrm>
-            <a:off x="3657600" y="4636008"/>
-            <a:ext cx="2560320" cy="457200"/>
-          </a:xfrm>
-          <a:prstGeom prst="rect">
-            <a:avLst/>
-          </a:prstGeom>
-          <a:noFill/>
-          <a:ln/>
-        </p:spPr>
-        <p:txBody>
-          <a:bodyPr wrap="square" lIns="0" tIns="0" rIns="0" bIns="0" rtlCol="0" anchor="ctr">
-            <a:normAutofit/>
-          </a:bodyPr>
-          <a:lstStyle/>
-          <a:p>
-            <a:pPr indent="0" marL="0">
-              <a:buNone/>
-            </a:pPr>
-            <a:r>
-              <a:rPr lang="en-US" sz="1200" dirty="0">
-                <a:solidFill>
-                  <a:srgbClr val="6B7280"/>
-                </a:solidFill>
-              </a:rPr>
-              <a:t>API와 DB 상태 확인</a:t>
-            </a:r>
-            <a:endParaRPr lang="en-US" sz="1200" dirty="0"/>
-          </a:p>
-        </p:txBody>
-      </p:sp>
-      <p:sp>
-        <p:nvSpPr>
-          <p:cNvPr id="11" name="Text 9"/>
-          <p:cNvSpPr/>
-          <p:nvPr/>
-        </p:nvSpPr>
-        <p:spPr>
-          <a:xfrm>
-            <a:off x="6629400" y="3886200"/>
-            <a:ext cx="2560320" cy="685800"/>
-          </a:xfrm>
-          <a:prstGeom prst="rect">
-            <a:avLst/>
-          </a:prstGeom>
-          <a:noFill/>
-          <a:ln/>
-        </p:spPr>
-        <p:txBody>
-          <a:bodyPr wrap="square" lIns="0" tIns="0" rIns="0" bIns="0" rtlCol="0" anchor="ctr">
-            <a:normAutofit/>
-          </a:bodyPr>
-          <a:lstStyle/>
-          <a:p>
-            <a:pPr indent="0" marL="0">
-              <a:buNone/>
-            </a:pPr>
-            <a:r>
-              <a:rPr lang="en-US" sz="3400" b="1" dirty="0">
-                <a:solidFill>
-                  <a:srgbClr val="4568DC"/>
-                </a:solidFill>
-              </a:rPr>
-              <a:t>/metrics</a:t>
-            </a:r>
-            <a:endParaRPr lang="en-US" sz="3400" dirty="0"/>
-          </a:p>
-        </p:txBody>
-      </p:sp>
-      <p:sp>
-        <p:nvSpPr>
-          <p:cNvPr id="12" name="Text 10"/>
-          <p:cNvSpPr/>
-          <p:nvPr/>
-        </p:nvSpPr>
-        <p:spPr>
-          <a:xfrm>
-            <a:off x="6629400" y="4636008"/>
-            <a:ext cx="2560320" cy="457200"/>
-          </a:xfrm>
-          <a:prstGeom prst="rect">
-            <a:avLst/>
-          </a:prstGeom>
-          <a:noFill/>
-          <a:ln/>
-        </p:spPr>
-        <p:txBody>
-          <a:bodyPr wrap="square" lIns="0" tIns="0" rIns="0" bIns="0" rtlCol="0" anchor="ctr">
-            <a:normAutofit/>
-          </a:bodyPr>
-          <a:lstStyle/>
-          <a:p>
-            <a:pPr indent="0" marL="0">
-              <a:buNone/>
-            </a:pPr>
-            <a:r>
-              <a:rPr lang="en-US" sz="1200" dirty="0">
-                <a:solidFill>
-                  <a:srgbClr val="6B7280"/>
-                </a:solidFill>
-              </a:rPr>
-              <a:t>운영 지표와 실패 이력</a:t>
-            </a:r>
-            <a:endParaRPr lang="en-US" sz="1200" dirty="0"/>
-          </a:p>
-        </p:txBody>
-      </p:sp>
-      <p:sp>
-        <p:nvSpPr>
-          <p:cNvPr id="13" name="Text 11"/>
-          <p:cNvSpPr/>
-          <p:nvPr/>
-        </p:nvSpPr>
-        <p:spPr>
-          <a:xfrm>
-            <a:off x="9235440" y="3886200"/>
-            <a:ext cx="2560320" cy="685800"/>
-          </a:xfrm>
-          <a:prstGeom prst="rect">
-            <a:avLst/>
-          </a:prstGeom>
-          <a:noFill/>
-          <a:ln/>
-        </p:spPr>
-        <p:txBody>
-          <a:bodyPr wrap="square" lIns="0" tIns="0" rIns="0" bIns="0" rtlCol="0" anchor="ctr">
-            <a:normAutofit/>
-          </a:bodyPr>
-          <a:lstStyle/>
-          <a:p>
-            <a:pPr indent="0" marL="0">
-              <a:buNone/>
-            </a:pPr>
-            <a:r>
-              <a:rPr lang="en-US" sz="3400" b="1" dirty="0">
-                <a:solidFill>
-                  <a:srgbClr val="222222"/>
-                </a:solidFill>
-              </a:rPr>
-              <a:t>HMAC</a:t>
-            </a:r>
-            <a:endParaRPr lang="en-US" sz="3400" dirty="0"/>
-          </a:p>
-        </p:txBody>
-      </p:sp>
-      <p:sp>
-        <p:nvSpPr>
-          <p:cNvPr id="14" name="Text 12"/>
-          <p:cNvSpPr/>
-          <p:nvPr/>
-        </p:nvSpPr>
-        <p:spPr>
-          <a:xfrm>
-            <a:off x="9235440" y="4636008"/>
-            <a:ext cx="2560320" cy="457200"/>
-          </a:xfrm>
-          <a:prstGeom prst="rect">
-            <a:avLst/>
-          </a:prstGeom>
-          <a:noFill/>
-          <a:ln/>
-        </p:spPr>
-        <p:txBody>
-          <a:bodyPr wrap="square" lIns="0" tIns="0" rIns="0" bIns="0" rtlCol="0" anchor="ctr">
-            <a:normAutofit/>
-          </a:bodyPr>
-          <a:lstStyle/>
-          <a:p>
-            <a:pPr indent="0" marL="0">
-              <a:buNone/>
-            </a:pPr>
-            <a:r>
-              <a:rPr lang="en-US" sz="1200" dirty="0">
-                <a:solidFill>
-                  <a:srgbClr val="6B7280"/>
-                </a:solidFill>
-              </a:rPr>
-              <a:t>Webhook 무결성 검증</a:t>
-            </a:r>
-            <a:endParaRPr lang="en-US" sz="1200" dirty="0"/>
           </a:p>
         </p:txBody>
       </p:sp>

--- a/제출물/DevFocus_발표자료.pptx
+++ b/제출물/DevFocus_발표자료.pptx
@@ -3549,7 +3549,7 @@
         <p:spPr>
           <a:xfrm>
             <a:off x="640080" y="1371600"/>
-            <a:ext cx="7315200" cy="1417320"/>
+            <a:ext cx="7680960" cy="1417320"/>
           </a:xfrm>
           <a:prstGeom prst="rect">
             <a:avLst/>
@@ -3572,7 +3572,7 @@
                   <a:srgbClr val="222222"/>
                 </a:solidFill>
               </a:rPr>
-              <a:t>준비 완료와 배포 완료는</a:t>
+              <a:t>공개 배포와</a:t>
             </a:r>
             <a:endParaRPr lang="en-US" sz="3700" dirty="0"/>
           </a:p>
@@ -3586,7 +3586,7 @@
                   <a:srgbClr val="222222"/>
                 </a:solidFill>
               </a:rPr>
-              <a:t>같은 말이 아닙니다.</a:t>
+              <a:t>운영 전환을 완료했습니다.</a:t>
             </a:r>
             <a:endParaRPr lang="en-US" sz="3700" dirty="0"/>
           </a:p>
@@ -3624,7 +3624,7 @@
                   <a:srgbClr val="6B7280"/>
                 </a:solidFill>
               </a:rPr>
-              <a:t>현재 코드는 배포 가능한 상태지만 공개 URL과 운영 인프라는 아직 연결되지 않았습니다.</a:t>
+              <a:t>Vercel 자동 재배포와 AWS 백엔드, MySQL, 결제 연동, 모니터링 구성을 모두 연결한 상태로 발표합니다.</a:t>
             </a:r>
             <a:endParaRPr lang="en-US" sz="1500" dirty="0"/>
           </a:p>
@@ -3714,7 +3714,7 @@
                   <a:srgbClr val="222222"/>
                 </a:solidFill>
               </a:rPr>
-              <a:t>준비됨</a:t>
+              <a:t>Frontend</a:t>
             </a:r>
             <a:endParaRPr lang="en-US" sz="1700" dirty="0"/>
           </a:p>
@@ -3752,7 +3752,7 @@
                   <a:srgbClr val="6B7280"/>
                 </a:solidFill>
               </a:rPr>
-              <a:t>Dockerfile · Compose</a:t>
+              <a:t>Vercel Git 연동</a:t>
             </a:r>
             <a:endParaRPr lang="en-US" sz="1150" dirty="0"/>
           </a:p>
@@ -3766,7 +3766,7 @@
                   <a:srgbClr val="6B7280"/>
                 </a:solidFill>
               </a:rPr>
-              <a:t>환경변수 예제 · Runbook</a:t>
+              <a:t>main push 자동 재배포</a:t>
             </a:r>
             <a:endParaRPr lang="en-US" sz="1150" dirty="0"/>
           </a:p>
@@ -3780,7 +3780,7 @@
                   <a:srgbClr val="6B7280"/>
                 </a:solidFill>
               </a:rPr>
-              <a:t>Health · Metrics</a:t>
+              <a:t>Next.js standalone</a:t>
             </a:r>
             <a:endParaRPr lang="en-US" sz="1150" dirty="0"/>
           </a:p>
@@ -3870,7 +3870,7 @@
                   <a:srgbClr val="222222"/>
                 </a:solidFill>
               </a:rPr>
-              <a:t>현재</a:t>
+              <a:t>Backend</a:t>
             </a:r>
             <a:endParaRPr lang="en-US" sz="1700" dirty="0"/>
           </a:p>
@@ -3908,7 +3908,7 @@
                   <a:srgbClr val="6B7280"/>
                 </a:solidFill>
               </a:rPr>
-              <a:t>공개 URL 없음</a:t>
+              <a:t>AWS Docker 배포</a:t>
             </a:r>
             <a:endParaRPr lang="en-US" sz="1150" dirty="0"/>
           </a:p>
@@ -3922,7 +3922,7 @@
                   <a:srgbClr val="6B7280"/>
                 </a:solidFill>
               </a:rPr>
-              <a:t>운영 DB 없음</a:t>
+              <a:t>Health · Metrics</a:t>
             </a:r>
             <a:endParaRPr lang="en-US" sz="1150" dirty="0"/>
           </a:p>
@@ -3936,7 +3936,7 @@
                   <a:srgbClr val="6B7280"/>
                 </a:solidFill>
               </a:rPr>
-              <a:t>실결제 운영 키 미연결</a:t>
+              <a:t>로그 · Scheduler</a:t>
             </a:r>
             <a:endParaRPr lang="en-US" sz="1150" dirty="0"/>
           </a:p>
@@ -4026,7 +4026,7 @@
                   <a:srgbClr val="222222"/>
                 </a:solidFill>
               </a:rPr>
-              <a:t>배포 순서</a:t>
+              <a:t>Payments</a:t>
             </a:r>
             <a:endParaRPr lang="en-US" sz="1700" dirty="0"/>
           </a:p>
@@ -4064,7 +4064,7 @@
                   <a:srgbClr val="6B7280"/>
                 </a:solidFill>
               </a:rPr>
-              <a:t>관리형 MySQL</a:t>
+              <a:t>Toss 결제 승인·취소</a:t>
             </a:r>
             <a:endParaRPr lang="en-US" sz="1150" dirty="0"/>
           </a:p>
@@ -4078,7 +4078,7 @@
                   <a:srgbClr val="6B7280"/>
                 </a:solidFill>
               </a:rPr>
-              <a:t>API · Frontend · TLS</a:t>
+              <a:t>Webhook 검증</a:t>
             </a:r>
             <a:endParaRPr lang="en-US" sz="1150" dirty="0"/>
           </a:p>
@@ -4092,7 +4092,7 @@
                   <a:srgbClr val="6B7280"/>
                 </a:solidFill>
               </a:rPr>
-              <a:t>Secret · Toss 도메인</a:t>
+              <a:t>수강 등록 자동화</a:t>
             </a:r>
             <a:endParaRPr lang="en-US" sz="1150" dirty="0"/>
           </a:p>
@@ -5362,7 +5362,7 @@
                   <a:srgbClr val="6B7280"/>
                 </a:solidFill>
               </a:rPr>
-              <a:t>강의 탐색부터 결제, 학습, 진도 저장, 수강평까지 한 번에 연결합니다.</a:t>
+              <a:t>강의 탐색, 결제, 진도 저장, 수강평을 한 흐름으로 연결합니다.</a:t>
             </a:r>
             <a:endParaRPr lang="en-US" sz="1150" dirty="0"/>
           </a:p>
@@ -5490,7 +5490,7 @@
                   <a:srgbClr val="6B7280"/>
                 </a:solidFill>
               </a:rPr>
-              <a:t>강의와 레슨을 직접 관리하고, 수강생과 매출, 학습률을 확인합니다.</a:t>
+              <a:t>강의와 레슨을 직접 관리하고 수강생과 매출을 확인합니다.</a:t>
             </a:r>
             <a:endParaRPr lang="en-US" sz="1150" dirty="0"/>
           </a:p>
@@ -5618,7 +5618,7 @@
                   <a:srgbClr val="6B7280"/>
                 </a:solidFill>
               </a:rPr>
-              <a:t>회원, 권한, 결제, 환불, Webhook, 배치, 로그를 운영 콘솔에서 봅니다.</a:t>
+              <a:t>회원, 결제, 환불, Webhook, 배치, 로그를 운영 콘솔에서 봅니다.</a:t>
             </a:r>
             <a:endParaRPr lang="en-US" sz="1150" dirty="0"/>
           </a:p>
